--- a/PPTs/Lecture 3 Exercises ANS.pptx
+++ b/PPTs/Lecture 3 Exercises ANS.pptx
@@ -5,7 +5,7 @@
     <p:sldMasterId id="2147483670" r:id="rId1"/>
   </p:sldMasterIdLst>
   <p:notesMasterIdLst>
-    <p:notesMasterId r:id="rId14"/>
+    <p:notesMasterId r:id="rId18"/>
   </p:notesMasterIdLst>
   <p:sldIdLst>
     <p:sldId id="257" r:id="rId2"/>
@@ -20,38 +20,42 @@
     <p:sldId id="1270" r:id="rId11"/>
     <p:sldId id="1272" r:id="rId12"/>
     <p:sldId id="1273" r:id="rId13"/>
+    <p:sldId id="1274" r:id="rId14"/>
+    <p:sldId id="1275" r:id="rId15"/>
+    <p:sldId id="1276" r:id="rId16"/>
+    <p:sldId id="1277" r:id="rId17"/>
   </p:sldIdLst>
   <p:sldSz cx="9144000" cy="5143500" type="screen16x9"/>
   <p:notesSz cx="6858000" cy="9144000"/>
   <p:embeddedFontLst>
     <p:embeddedFont>
       <p:font typeface="ＭＳ Ｐゴシック" panose="020B0600070205080204" pitchFamily="34" charset="-128"/>
-      <p:regular r:id="rId15"/>
+      <p:regular r:id="rId19"/>
     </p:embeddedFont>
     <p:embeddedFont>
       <p:font typeface="Cambria Math" panose="02040503050406030204" pitchFamily="18" charset="0"/>
-      <p:regular r:id="rId16"/>
+      <p:regular r:id="rId20"/>
     </p:embeddedFont>
     <p:embeddedFont>
       <p:font typeface="Roboto" panose="02000000000000000000" pitchFamily="2" charset="0"/>
-      <p:regular r:id="rId17"/>
-      <p:bold r:id="rId18"/>
-      <p:italic r:id="rId19"/>
-      <p:boldItalic r:id="rId20"/>
-    </p:embeddedFont>
-    <p:embeddedFont>
-      <p:font typeface="Roboto Light" panose="02000000000000000000" pitchFamily="2" charset="0"/>
       <p:regular r:id="rId21"/>
       <p:bold r:id="rId22"/>
       <p:italic r:id="rId23"/>
       <p:boldItalic r:id="rId24"/>
     </p:embeddedFont>
     <p:embeddedFont>
-      <p:font typeface="Roboto Medium" panose="02000000000000000000" pitchFamily="2" charset="0"/>
+      <p:font typeface="Roboto Light" panose="02000000000000000000" pitchFamily="2" charset="0"/>
       <p:regular r:id="rId25"/>
       <p:bold r:id="rId26"/>
       <p:italic r:id="rId27"/>
       <p:boldItalic r:id="rId28"/>
+    </p:embeddedFont>
+    <p:embeddedFont>
+      <p:font typeface="Roboto Medium" panose="02000000000000000000" pitchFamily="2" charset="0"/>
+      <p:regular r:id="rId29"/>
+      <p:bold r:id="rId30"/>
+      <p:italic r:id="rId31"/>
+      <p:boldItalic r:id="rId32"/>
     </p:embeddedFont>
   </p:embeddedFontLst>
   <p:defaultTextStyle>
@@ -294,7 +298,7 @@
 <file path=ppt/revisionInfo.xml><?xml version="1.0" encoding="utf-8"?>
 <p1510:revInfo xmlns:a="http://schemas.openxmlformats.org/drawingml/2006/main" xmlns:r="http://schemas.openxmlformats.org/officeDocument/2006/relationships" xmlns:p1510="http://schemas.microsoft.com/office/powerpoint/2015/10/main">
   <p1510:revLst>
-    <p1510:client id="{416DF321-CFFE-45A2-82D9-C165B3959C78}" v="397" dt="2026-01-30T02:54:19.912"/>
+    <p1510:client id="{416DF321-CFFE-45A2-82D9-C165B3959C78}" v="428" dt="2026-02-01T03:13:59.907"/>
   </p1510:revLst>
 </p1510:revInfo>
 </file>
@@ -303,11 +307,26 @@
 <pc:chgInfo xmlns:a="http://schemas.openxmlformats.org/drawingml/2006/main" xmlns:r="http://schemas.openxmlformats.org/officeDocument/2006/relationships" xmlns:ac="http://schemas.microsoft.com/office/drawing/2013/main/command" xmlns:pc="http://schemas.microsoft.com/office/powerpoint/2013/main/command">
   <pc:docChgLst>
     <pc:chgData name="Zonghua Gu" userId="9a7e1853e1951ef5" providerId="LiveId" clId="{CF1FAA12-072C-4ED5-BA76-0FFFAEFDB88A}"/>
-    <pc:docChg chg="undo custSel addSld delSld modSld">
-      <pc:chgData name="Zonghua Gu" userId="9a7e1853e1951ef5" providerId="LiveId" clId="{CF1FAA12-072C-4ED5-BA76-0FFFAEFDB88A}" dt="2026-01-30T02:54:19.912" v="642" actId="20577"/>
+    <pc:docChg chg="undo custSel addSld delSld modSld sldOrd modMainMaster">
+      <pc:chgData name="Zonghua Gu" userId="9a7e1853e1951ef5" providerId="LiveId" clId="{CF1FAA12-072C-4ED5-BA76-0FFFAEFDB88A}" dt="2026-02-01T03:14:30.310" v="1138"/>
       <pc:docMkLst>
         <pc:docMk/>
       </pc:docMkLst>
+      <pc:sldChg chg="modSp mod">
+        <pc:chgData name="Zonghua Gu" userId="9a7e1853e1951ef5" providerId="LiveId" clId="{CF1FAA12-072C-4ED5-BA76-0FFFAEFDB88A}" dt="2026-02-01T02:47:37.758" v="645" actId="20577"/>
+        <pc:sldMkLst>
+          <pc:docMk/>
+          <pc:sldMk cId="0" sldId="257"/>
+        </pc:sldMkLst>
+        <pc:spChg chg="mod">
+          <ac:chgData name="Zonghua Gu" userId="9a7e1853e1951ef5" providerId="LiveId" clId="{CF1FAA12-072C-4ED5-BA76-0FFFAEFDB88A}" dt="2026-02-01T02:47:37.758" v="645" actId="20577"/>
+          <ac:spMkLst>
+            <pc:docMk/>
+            <pc:sldMk cId="0" sldId="257"/>
+            <ac:spMk id="167" creationId="{00000000-0000-0000-0000-000000000000}"/>
+          </ac:spMkLst>
+        </pc:spChg>
+      </pc:sldChg>
       <pc:sldChg chg="modSp mod">
         <pc:chgData name="Zonghua Gu" userId="9a7e1853e1951ef5" providerId="LiveId" clId="{CF1FAA12-072C-4ED5-BA76-0FFFAEFDB88A}" dt="2026-01-30T02:33:26.862" v="254" actId="20577"/>
         <pc:sldMkLst>
@@ -360,33 +379,9 @@
             <ac:spMk id="3" creationId="{E5A0EDEB-DF4F-02F2-0219-D7E5E5242A29}"/>
           </ac:spMkLst>
         </pc:spChg>
-        <pc:picChg chg="del">
-          <ac:chgData name="Zonghua Gu" userId="9a7e1853e1951ef5" providerId="LiveId" clId="{CF1FAA12-072C-4ED5-BA76-0FFFAEFDB88A}" dt="2026-01-30T02:21:50.522" v="20" actId="478"/>
-          <ac:picMkLst>
-            <pc:docMk/>
-            <pc:sldMk cId="3787782379" sldId="1267"/>
-            <ac:picMk id="16" creationId="{73E4C26B-E083-912C-1A8F-4BEA31274E86}"/>
-          </ac:picMkLst>
-        </pc:picChg>
-        <pc:inkChg chg="del">
-          <ac:chgData name="Zonghua Gu" userId="9a7e1853e1951ef5" providerId="LiveId" clId="{CF1FAA12-072C-4ED5-BA76-0FFFAEFDB88A}" dt="2026-01-30T02:21:50.522" v="20" actId="478"/>
-          <ac:inkMkLst>
-            <pc:docMk/>
-            <pc:sldMk cId="3787782379" sldId="1267"/>
-            <ac:inkMk id="6" creationId="{17BB12DD-7CD8-1798-2A3B-8D7B347A5BF8}"/>
-          </ac:inkMkLst>
-        </pc:inkChg>
-        <pc:inkChg chg="del">
-          <ac:chgData name="Zonghua Gu" userId="9a7e1853e1951ef5" providerId="LiveId" clId="{CF1FAA12-072C-4ED5-BA76-0FFFAEFDB88A}" dt="2026-01-30T02:21:50.522" v="20" actId="478"/>
-          <ac:inkMkLst>
-            <pc:docMk/>
-            <pc:sldMk cId="3787782379" sldId="1267"/>
-            <ac:inkMk id="7" creationId="{14AC6EF8-3FAC-3C12-1E5D-171D2FBEF1D0}"/>
-          </ac:inkMkLst>
-        </pc:inkChg>
       </pc:sldChg>
       <pc:sldChg chg="modSp add mod">
-        <pc:chgData name="Zonghua Gu" userId="9a7e1853e1951ef5" providerId="LiveId" clId="{CF1FAA12-072C-4ED5-BA76-0FFFAEFDB88A}" dt="2026-01-30T02:24:46.471" v="87" actId="20577"/>
+        <pc:chgData name="Zonghua Gu" userId="9a7e1853e1951ef5" providerId="LiveId" clId="{CF1FAA12-072C-4ED5-BA76-0FFFAEFDB88A}" dt="2026-02-01T03:14:17.884" v="1136" actId="1076"/>
         <pc:sldMkLst>
           <pc:docMk/>
           <pc:sldMk cId="1696198607" sldId="1268"/>
@@ -400,20 +395,13 @@
           </ac:spMkLst>
         </pc:spChg>
         <pc:spChg chg="mod">
-          <ac:chgData name="Zonghua Gu" userId="9a7e1853e1951ef5" providerId="LiveId" clId="{CF1FAA12-072C-4ED5-BA76-0FFFAEFDB88A}" dt="2026-01-30T02:24:46.471" v="87" actId="20577"/>
+          <ac:chgData name="Zonghua Gu" userId="9a7e1853e1951ef5" providerId="LiveId" clId="{CF1FAA12-072C-4ED5-BA76-0FFFAEFDB88A}" dt="2026-02-01T03:14:17.884" v="1136" actId="1076"/>
           <ac:spMkLst>
             <pc:docMk/>
             <pc:sldMk cId="1696198607" sldId="1268"/>
             <ac:spMk id="3" creationId="{986DDED0-DD66-63C1-CEC6-FDA581D3FB0B}"/>
           </ac:spMkLst>
         </pc:spChg>
-      </pc:sldChg>
-      <pc:sldChg chg="new del">
-        <pc:chgData name="Zonghua Gu" userId="9a7e1853e1951ef5" providerId="LiveId" clId="{CF1FAA12-072C-4ED5-BA76-0FFFAEFDB88A}" dt="2026-01-30T02:27:11.233" v="166" actId="680"/>
-        <pc:sldMkLst>
-          <pc:docMk/>
-          <pc:sldMk cId="1826428881" sldId="1269"/>
-        </pc:sldMkLst>
       </pc:sldChg>
       <pc:sldChg chg="modSp add mod">
         <pc:chgData name="Zonghua Gu" userId="9a7e1853e1951ef5" providerId="LiveId" clId="{CF1FAA12-072C-4ED5-BA76-0FFFAEFDB88A}" dt="2026-01-30T02:28:24.975" v="180" actId="20577"/>
@@ -461,21 +449,6 @@
           </ac:spMkLst>
         </pc:spChg>
       </pc:sldChg>
-      <pc:sldChg chg="modSp new del mod">
-        <pc:chgData name="Zonghua Gu" userId="9a7e1853e1951ef5" providerId="LiveId" clId="{CF1FAA12-072C-4ED5-BA76-0FFFAEFDB88A}" dt="2026-01-30T02:52:58.014" v="622" actId="47"/>
-        <pc:sldMkLst>
-          <pc:docMk/>
-          <pc:sldMk cId="31368453" sldId="1271"/>
-        </pc:sldMkLst>
-        <pc:spChg chg="mod">
-          <ac:chgData name="Zonghua Gu" userId="9a7e1853e1951ef5" providerId="LiveId" clId="{CF1FAA12-072C-4ED5-BA76-0FFFAEFDB88A}" dt="2026-01-30T02:37:41.532" v="296" actId="27636"/>
-          <ac:spMkLst>
-            <pc:docMk/>
-            <pc:sldMk cId="31368453" sldId="1271"/>
-            <ac:spMk id="2" creationId="{15063CE9-81C5-378D-B69C-69E213A18429}"/>
-          </ac:spMkLst>
-        </pc:spChg>
-      </pc:sldChg>
       <pc:sldChg chg="addSp modSp add mod modNotes">
         <pc:chgData name="Zonghua Gu" userId="9a7e1853e1951ef5" providerId="LiveId" clId="{CF1FAA12-072C-4ED5-BA76-0FFFAEFDB88A}" dt="2026-01-30T02:53:59.322" v="640" actId="20577"/>
         <pc:sldMkLst>
@@ -498,22 +471,6 @@
             <ac:spMk id="3" creationId="{5128AC50-2E5A-BA00-9067-9CDF801D2F2F}"/>
           </ac:spMkLst>
         </pc:spChg>
-        <pc:spChg chg="add mod">
-          <ac:chgData name="Zonghua Gu" userId="9a7e1853e1951ef5" providerId="LiveId" clId="{CF1FAA12-072C-4ED5-BA76-0FFFAEFDB88A}" dt="2026-01-30T02:44:39.555" v="533"/>
-          <ac:spMkLst>
-            <pc:docMk/>
-            <pc:sldMk cId="2247612272" sldId="1272"/>
-            <ac:spMk id="5" creationId="{3A08628B-CCCB-453D-CAB1-7BF5BA4AD130}"/>
-          </ac:spMkLst>
-        </pc:spChg>
-        <pc:graphicFrameChg chg="add mod">
-          <ac:chgData name="Zonghua Gu" userId="9a7e1853e1951ef5" providerId="LiveId" clId="{CF1FAA12-072C-4ED5-BA76-0FFFAEFDB88A}" dt="2026-01-30T02:44:38.984" v="532"/>
-          <ac:graphicFrameMkLst>
-            <pc:docMk/>
-            <pc:sldMk cId="2247612272" sldId="1272"/>
-            <ac:graphicFrameMk id="4" creationId="{1361B4A7-FAC3-3A28-D98D-05514AC6708B}"/>
-          </ac:graphicFrameMkLst>
-        </pc:graphicFrameChg>
       </pc:sldChg>
       <pc:sldChg chg="modSp add mod">
         <pc:chgData name="Zonghua Gu" userId="9a7e1853e1951ef5" providerId="LiveId" clId="{CF1FAA12-072C-4ED5-BA76-0FFFAEFDB88A}" dt="2026-01-30T02:54:19.912" v="642" actId="20577"/>
@@ -538,6 +495,160 @@
           </ac:spMkLst>
         </pc:spChg>
       </pc:sldChg>
+      <pc:sldChg chg="new del">
+        <pc:chgData name="Zonghua Gu" userId="9a7e1853e1951ef5" providerId="LiveId" clId="{CF1FAA12-072C-4ED5-BA76-0FFFAEFDB88A}" dt="2026-02-01T02:48:06.048" v="647" actId="680"/>
+        <pc:sldMkLst>
+          <pc:docMk/>
+          <pc:sldMk cId="2066151820" sldId="1274"/>
+        </pc:sldMkLst>
+      </pc:sldChg>
+      <pc:sldChg chg="addSp modSp add mod">
+        <pc:chgData name="Zonghua Gu" userId="9a7e1853e1951ef5" providerId="LiveId" clId="{CF1FAA12-072C-4ED5-BA76-0FFFAEFDB88A}" dt="2026-02-01T03:01:10.496" v="945" actId="27636"/>
+        <pc:sldMkLst>
+          <pc:docMk/>
+          <pc:sldMk cId="4059797061" sldId="1274"/>
+        </pc:sldMkLst>
+        <pc:spChg chg="mod">
+          <ac:chgData name="Zonghua Gu" userId="9a7e1853e1951ef5" providerId="LiveId" clId="{CF1FAA12-072C-4ED5-BA76-0FFFAEFDB88A}" dt="2026-02-01T02:59:34.828" v="906" actId="20577"/>
+          <ac:spMkLst>
+            <pc:docMk/>
+            <pc:sldMk cId="4059797061" sldId="1274"/>
+            <ac:spMk id="2" creationId="{A32FC9C6-5635-D4CB-5A42-F596F5C4907C}"/>
+          </ac:spMkLst>
+        </pc:spChg>
+        <pc:spChg chg="mod">
+          <ac:chgData name="Zonghua Gu" userId="9a7e1853e1951ef5" providerId="LiveId" clId="{CF1FAA12-072C-4ED5-BA76-0FFFAEFDB88A}" dt="2026-02-01T03:01:10.496" v="945" actId="27636"/>
+          <ac:spMkLst>
+            <pc:docMk/>
+            <pc:sldMk cId="4059797061" sldId="1274"/>
+            <ac:spMk id="3" creationId="{08B1A53D-BE96-9908-6EB6-D5CF7B0E825C}"/>
+          </ac:spMkLst>
+        </pc:spChg>
+        <pc:picChg chg="add mod">
+          <ac:chgData name="Zonghua Gu" userId="9a7e1853e1951ef5" providerId="LiveId" clId="{CF1FAA12-072C-4ED5-BA76-0FFFAEFDB88A}" dt="2026-02-01T02:52:23.400" v="734" actId="1076"/>
+          <ac:picMkLst>
+            <pc:docMk/>
+            <pc:sldMk cId="4059797061" sldId="1274"/>
+            <ac:picMk id="5" creationId="{DD8101C4-61B5-B86D-2A93-BCAF5BD00D59}"/>
+          </ac:picMkLst>
+        </pc:picChg>
+      </pc:sldChg>
+      <pc:sldChg chg="modSp add mod ord">
+        <pc:chgData name="Zonghua Gu" userId="9a7e1853e1951ef5" providerId="LiveId" clId="{CF1FAA12-072C-4ED5-BA76-0FFFAEFDB88A}" dt="2026-02-01T03:14:30.310" v="1138"/>
+        <pc:sldMkLst>
+          <pc:docMk/>
+          <pc:sldMk cId="661331575" sldId="1275"/>
+        </pc:sldMkLst>
+        <pc:spChg chg="mod">
+          <ac:chgData name="Zonghua Gu" userId="9a7e1853e1951ef5" providerId="LiveId" clId="{CF1FAA12-072C-4ED5-BA76-0FFFAEFDB88A}" dt="2026-02-01T03:11:31.269" v="1070" actId="14100"/>
+          <ac:spMkLst>
+            <pc:docMk/>
+            <pc:sldMk cId="661331575" sldId="1275"/>
+            <ac:spMk id="2" creationId="{61F00D06-4459-E1AF-4433-EB7EB451761C}"/>
+          </ac:spMkLst>
+        </pc:spChg>
+        <pc:spChg chg="mod">
+          <ac:chgData name="Zonghua Gu" userId="9a7e1853e1951ef5" providerId="LiveId" clId="{CF1FAA12-072C-4ED5-BA76-0FFFAEFDB88A}" dt="2026-02-01T02:59:13.571" v="904" actId="20577"/>
+          <ac:spMkLst>
+            <pc:docMk/>
+            <pc:sldMk cId="661331575" sldId="1275"/>
+            <ac:spMk id="3" creationId="{BCD90292-74C8-9145-40C4-220F2EBBDB5A}"/>
+          </ac:spMkLst>
+        </pc:spChg>
+        <pc:picChg chg="mod">
+          <ac:chgData name="Zonghua Gu" userId="9a7e1853e1951ef5" providerId="LiveId" clId="{CF1FAA12-072C-4ED5-BA76-0FFFAEFDB88A}" dt="2026-02-01T02:54:31.614" v="793" actId="1076"/>
+          <ac:picMkLst>
+            <pc:docMk/>
+            <pc:sldMk cId="661331575" sldId="1275"/>
+            <ac:picMk id="5" creationId="{82263838-146D-C20D-CD01-6B1CDBC1F761}"/>
+          </ac:picMkLst>
+        </pc:picChg>
+      </pc:sldChg>
+      <pc:sldChg chg="modSp add mod">
+        <pc:chgData name="Zonghua Gu" userId="9a7e1853e1951ef5" providerId="LiveId" clId="{CF1FAA12-072C-4ED5-BA76-0FFFAEFDB88A}" dt="2026-02-01T03:12:34.894" v="1116" actId="20577"/>
+        <pc:sldMkLst>
+          <pc:docMk/>
+          <pc:sldMk cId="349922459" sldId="1276"/>
+        </pc:sldMkLst>
+        <pc:spChg chg="mod">
+          <ac:chgData name="Zonghua Gu" userId="9a7e1853e1951ef5" providerId="LiveId" clId="{CF1FAA12-072C-4ED5-BA76-0FFFAEFDB88A}" dt="2026-02-01T02:59:57.031" v="913" actId="20577"/>
+          <ac:spMkLst>
+            <pc:docMk/>
+            <pc:sldMk cId="349922459" sldId="1276"/>
+            <ac:spMk id="2" creationId="{21CF0434-D174-6BE2-1629-31C6E6E7EF45}"/>
+          </ac:spMkLst>
+        </pc:spChg>
+        <pc:spChg chg="mod">
+          <ac:chgData name="Zonghua Gu" userId="9a7e1853e1951ef5" providerId="LiveId" clId="{CF1FAA12-072C-4ED5-BA76-0FFFAEFDB88A}" dt="2026-02-01T03:12:34.894" v="1116" actId="20577"/>
+          <ac:spMkLst>
+            <pc:docMk/>
+            <pc:sldMk cId="349922459" sldId="1276"/>
+            <ac:spMk id="3" creationId="{074BA215-8363-02BC-EBDF-A16B8D17B68B}"/>
+          </ac:spMkLst>
+        </pc:spChg>
+        <pc:picChg chg="mod">
+          <ac:chgData name="Zonghua Gu" userId="9a7e1853e1951ef5" providerId="LiveId" clId="{CF1FAA12-072C-4ED5-BA76-0FFFAEFDB88A}" dt="2026-02-01T03:11:16.125" v="1065" actId="1076"/>
+          <ac:picMkLst>
+            <pc:docMk/>
+            <pc:sldMk cId="349922459" sldId="1276"/>
+            <ac:picMk id="5" creationId="{7FA3061E-A000-9427-7DFB-24A54F3921DF}"/>
+          </ac:picMkLst>
+        </pc:picChg>
+      </pc:sldChg>
+      <pc:sldChg chg="new del">
+        <pc:chgData name="Zonghua Gu" userId="9a7e1853e1951ef5" providerId="LiveId" clId="{CF1FAA12-072C-4ED5-BA76-0FFFAEFDB88A}" dt="2026-02-01T02:59:37.790" v="908" actId="680"/>
+        <pc:sldMkLst>
+          <pc:docMk/>
+          <pc:sldMk cId="2143236628" sldId="1276"/>
+        </pc:sldMkLst>
+      </pc:sldChg>
+      <pc:sldChg chg="modSp add mod">
+        <pc:chgData name="Zonghua Gu" userId="9a7e1853e1951ef5" providerId="LiveId" clId="{CF1FAA12-072C-4ED5-BA76-0FFFAEFDB88A}" dt="2026-02-01T03:13:23.614" v="1135" actId="20577"/>
+        <pc:sldMkLst>
+          <pc:docMk/>
+          <pc:sldMk cId="623579125" sldId="1277"/>
+        </pc:sldMkLst>
+        <pc:spChg chg="mod">
+          <ac:chgData name="Zonghua Gu" userId="9a7e1853e1951ef5" providerId="LiveId" clId="{CF1FAA12-072C-4ED5-BA76-0FFFAEFDB88A}" dt="2026-02-01T03:11:46.960" v="1081" actId="1076"/>
+          <ac:spMkLst>
+            <pc:docMk/>
+            <pc:sldMk cId="623579125" sldId="1277"/>
+            <ac:spMk id="2" creationId="{BCD43FDC-6B0A-1999-F9EC-ECC81C570141}"/>
+          </ac:spMkLst>
+        </pc:spChg>
+        <pc:spChg chg="mod">
+          <ac:chgData name="Zonghua Gu" userId="9a7e1853e1951ef5" providerId="LiveId" clId="{CF1FAA12-072C-4ED5-BA76-0FFFAEFDB88A}" dt="2026-02-01T03:13:23.614" v="1135" actId="20577"/>
+          <ac:spMkLst>
+            <pc:docMk/>
+            <pc:sldMk cId="623579125" sldId="1277"/>
+            <ac:spMk id="3" creationId="{BB363AB7-8BDB-FC7D-22A1-C299003B130E}"/>
+          </ac:spMkLst>
+        </pc:spChg>
+      </pc:sldChg>
+      <pc:sldMasterChg chg="modSldLayout">
+        <pc:chgData name="Zonghua Gu" userId="9a7e1853e1951ef5" providerId="LiveId" clId="{CF1FAA12-072C-4ED5-BA76-0FFFAEFDB88A}" dt="2026-02-01T02:52:48.662" v="738" actId="20577"/>
+        <pc:sldMasterMkLst>
+          <pc:docMk/>
+          <pc:sldMasterMk cId="0" sldId="2147483670"/>
+        </pc:sldMasterMkLst>
+        <pc:sldLayoutChg chg="modSp mod">
+          <pc:chgData name="Zonghua Gu" userId="9a7e1853e1951ef5" providerId="LiveId" clId="{CF1FAA12-072C-4ED5-BA76-0FFFAEFDB88A}" dt="2026-02-01T02:52:48.662" v="738" actId="20577"/>
+          <pc:sldLayoutMkLst>
+            <pc:docMk/>
+            <pc:sldMasterMk cId="0" sldId="2147483670"/>
+            <pc:sldLayoutMk cId="1180794181" sldId="2147483671"/>
+          </pc:sldLayoutMkLst>
+          <pc:spChg chg="mod">
+            <ac:chgData name="Zonghua Gu" userId="9a7e1853e1951ef5" providerId="LiveId" clId="{CF1FAA12-072C-4ED5-BA76-0FFFAEFDB88A}" dt="2026-02-01T02:52:48.662" v="738" actId="20577"/>
+            <ac:spMkLst>
+              <pc:docMk/>
+              <pc:sldMasterMk cId="0" sldId="2147483670"/>
+              <pc:sldLayoutMk cId="1180794181" sldId="2147483671"/>
+              <ac:spMk id="10" creationId="{2E873D4E-4EDA-1349-AB14-5DC995BFCD39}"/>
+            </ac:spMkLst>
+          </pc:spChg>
+        </pc:sldLayoutChg>
+      </pc:sldMasterChg>
     </pc:docChg>
   </pc:docChgLst>
 </pc:chgInfo>
@@ -751,6 +862,84 @@
 </inkml:ink>
 </file>
 
+<file path=ppt/ink/ink17.xml><?xml version="1.0" encoding="utf-8"?>
+<inkml:ink xmlns:inkml="http://www.w3.org/2003/InkML">
+  <inkml:definitions>
+    <inkml:context xml:id="ctx0">
+      <inkml:inkSource xml:id="inkSrc0">
+        <inkml:traceFormat>
+          <inkml:channel name="X" type="integer" min="-2.14748E9" max="2.14748E9" units="cm"/>
+          <inkml:channel name="Y" type="integer" min="-2.14748E9" max="2.14748E9" units="cm"/>
+        </inkml:traceFormat>
+        <inkml:channelProperties>
+          <inkml:channelProperty channel="X" name="resolution" value="1000" units="1/cm"/>
+          <inkml:channelProperty channel="Y" name="resolution" value="1000" units="1/cm"/>
+        </inkml:channelProperties>
+      </inkml:inkSource>
+      <inkml:timestamp xml:id="ts0" timeString="2024-10-21T23:16:07.146"/>
+    </inkml:context>
+    <inkml:brush xml:id="br0">
+      <inkml:brushProperty name="width" value="0.05" units="cm"/>
+      <inkml:brushProperty name="height" value="0.05" units="cm"/>
+      <inkml:brushProperty name="ignorePressure" value="1"/>
+    </inkml:brush>
+  </inkml:definitions>
+  <inkml:trace contextRef="#ctx0" brushRef="#br0">0 0,'0'0</inkml:trace>
+</inkml:ink>
+</file>
+
+<file path=ppt/ink/ink18.xml><?xml version="1.0" encoding="utf-8"?>
+<inkml:ink xmlns:inkml="http://www.w3.org/2003/InkML">
+  <inkml:definitions>
+    <inkml:context xml:id="ctx0">
+      <inkml:inkSource xml:id="inkSrc0">
+        <inkml:traceFormat>
+          <inkml:channel name="X" type="integer" min="-2.14748E9" max="2.14748E9" units="cm"/>
+          <inkml:channel name="Y" type="integer" min="-2.14748E9" max="2.14748E9" units="cm"/>
+        </inkml:traceFormat>
+        <inkml:channelProperties>
+          <inkml:channelProperty channel="X" name="resolution" value="1000" units="1/cm"/>
+          <inkml:channelProperty channel="Y" name="resolution" value="1000" units="1/cm"/>
+        </inkml:channelProperties>
+      </inkml:inkSource>
+      <inkml:timestamp xml:id="ts0" timeString="2024-10-21T23:16:08.010"/>
+    </inkml:context>
+    <inkml:brush xml:id="br0">
+      <inkml:brushProperty name="width" value="0.05" units="cm"/>
+      <inkml:brushProperty name="height" value="0.05" units="cm"/>
+      <inkml:brushProperty name="ignorePressure" value="1"/>
+    </inkml:brush>
+  </inkml:definitions>
+  <inkml:trace contextRef="#ctx0" brushRef="#br0">0 1,'0'0</inkml:trace>
+</inkml:ink>
+</file>
+
+<file path=ppt/ink/ink19.xml><?xml version="1.0" encoding="utf-8"?>
+<inkml:ink xmlns:inkml="http://www.w3.org/2003/InkML">
+  <inkml:definitions>
+    <inkml:context xml:id="ctx0">
+      <inkml:inkSource xml:id="inkSrc0">
+        <inkml:traceFormat>
+          <inkml:channel name="X" type="integer" min="-2.14748E9" max="2.14748E9" units="cm"/>
+          <inkml:channel name="Y" type="integer" min="-2.14748E9" max="2.14748E9" units="cm"/>
+        </inkml:traceFormat>
+        <inkml:channelProperties>
+          <inkml:channelProperty channel="X" name="resolution" value="1000" units="1/cm"/>
+          <inkml:channelProperty channel="Y" name="resolution" value="1000" units="1/cm"/>
+        </inkml:channelProperties>
+      </inkml:inkSource>
+      <inkml:timestamp xml:id="ts0" timeString="2024-10-21T23:16:07.146"/>
+    </inkml:context>
+    <inkml:brush xml:id="br0">
+      <inkml:brushProperty name="width" value="0.05" units="cm"/>
+      <inkml:brushProperty name="height" value="0.05" units="cm"/>
+      <inkml:brushProperty name="ignorePressure" value="1"/>
+    </inkml:brush>
+  </inkml:definitions>
+  <inkml:trace contextRef="#ctx0" brushRef="#br0">0 0,'0'0</inkml:trace>
+</inkml:ink>
+</file>
+
 <file path=ppt/ink/ink2.xml><?xml version="1.0" encoding="utf-8"?>
 <inkml:ink xmlns:inkml="http://www.w3.org/2003/InkML">
   <inkml:definitions>
@@ -766,6 +955,136 @@
         </inkml:channelProperties>
       </inkml:inkSource>
       <inkml:timestamp xml:id="ts0" timeString="2024-10-21T23:16:06.290"/>
+    </inkml:context>
+    <inkml:brush xml:id="br0">
+      <inkml:brushProperty name="width" value="0.05" units="cm"/>
+      <inkml:brushProperty name="height" value="0.05" units="cm"/>
+      <inkml:brushProperty name="ignorePressure" value="1"/>
+    </inkml:brush>
+  </inkml:definitions>
+  <inkml:trace contextRef="#ctx0" brushRef="#br0">0 1,'0'0</inkml:trace>
+</inkml:ink>
+</file>
+
+<file path=ppt/ink/ink20.xml><?xml version="1.0" encoding="utf-8"?>
+<inkml:ink xmlns:inkml="http://www.w3.org/2003/InkML">
+  <inkml:definitions>
+    <inkml:context xml:id="ctx0">
+      <inkml:inkSource xml:id="inkSrc0">
+        <inkml:traceFormat>
+          <inkml:channel name="X" type="integer" min="-2.14748E9" max="2.14748E9" units="cm"/>
+          <inkml:channel name="Y" type="integer" min="-2.14748E9" max="2.14748E9" units="cm"/>
+        </inkml:traceFormat>
+        <inkml:channelProperties>
+          <inkml:channelProperty channel="X" name="resolution" value="1000" units="1/cm"/>
+          <inkml:channelProperty channel="Y" name="resolution" value="1000" units="1/cm"/>
+        </inkml:channelProperties>
+      </inkml:inkSource>
+      <inkml:timestamp xml:id="ts0" timeString="2024-10-21T23:16:08.010"/>
+    </inkml:context>
+    <inkml:brush xml:id="br0">
+      <inkml:brushProperty name="width" value="0.05" units="cm"/>
+      <inkml:brushProperty name="height" value="0.05" units="cm"/>
+      <inkml:brushProperty name="ignorePressure" value="1"/>
+    </inkml:brush>
+  </inkml:definitions>
+  <inkml:trace contextRef="#ctx0" brushRef="#br0">0 1,'0'0</inkml:trace>
+</inkml:ink>
+</file>
+
+<file path=ppt/ink/ink21.xml><?xml version="1.0" encoding="utf-8"?>
+<inkml:ink xmlns:inkml="http://www.w3.org/2003/InkML">
+  <inkml:definitions>
+    <inkml:context xml:id="ctx0">
+      <inkml:inkSource xml:id="inkSrc0">
+        <inkml:traceFormat>
+          <inkml:channel name="X" type="integer" min="-2.14748E9" max="2.14748E9" units="cm"/>
+          <inkml:channel name="Y" type="integer" min="-2.14748E9" max="2.14748E9" units="cm"/>
+        </inkml:traceFormat>
+        <inkml:channelProperties>
+          <inkml:channelProperty channel="X" name="resolution" value="1000" units="1/cm"/>
+          <inkml:channelProperty channel="Y" name="resolution" value="1000" units="1/cm"/>
+        </inkml:channelProperties>
+      </inkml:inkSource>
+      <inkml:timestamp xml:id="ts0" timeString="2024-10-21T23:16:07.146"/>
+    </inkml:context>
+    <inkml:brush xml:id="br0">
+      <inkml:brushProperty name="width" value="0.05" units="cm"/>
+      <inkml:brushProperty name="height" value="0.05" units="cm"/>
+      <inkml:brushProperty name="ignorePressure" value="1"/>
+    </inkml:brush>
+  </inkml:definitions>
+  <inkml:trace contextRef="#ctx0" brushRef="#br0">0 0,'0'0</inkml:trace>
+</inkml:ink>
+</file>
+
+<file path=ppt/ink/ink22.xml><?xml version="1.0" encoding="utf-8"?>
+<inkml:ink xmlns:inkml="http://www.w3.org/2003/InkML">
+  <inkml:definitions>
+    <inkml:context xml:id="ctx0">
+      <inkml:inkSource xml:id="inkSrc0">
+        <inkml:traceFormat>
+          <inkml:channel name="X" type="integer" min="-2.14748E9" max="2.14748E9" units="cm"/>
+          <inkml:channel name="Y" type="integer" min="-2.14748E9" max="2.14748E9" units="cm"/>
+        </inkml:traceFormat>
+        <inkml:channelProperties>
+          <inkml:channelProperty channel="X" name="resolution" value="1000" units="1/cm"/>
+          <inkml:channelProperty channel="Y" name="resolution" value="1000" units="1/cm"/>
+        </inkml:channelProperties>
+      </inkml:inkSource>
+      <inkml:timestamp xml:id="ts0" timeString="2024-10-21T23:16:08.010"/>
+    </inkml:context>
+    <inkml:brush xml:id="br0">
+      <inkml:brushProperty name="width" value="0.05" units="cm"/>
+      <inkml:brushProperty name="height" value="0.05" units="cm"/>
+      <inkml:brushProperty name="ignorePressure" value="1"/>
+    </inkml:brush>
+  </inkml:definitions>
+  <inkml:trace contextRef="#ctx0" brushRef="#br0">0 1,'0'0</inkml:trace>
+</inkml:ink>
+</file>
+
+<file path=ppt/ink/ink23.xml><?xml version="1.0" encoding="utf-8"?>
+<inkml:ink xmlns:inkml="http://www.w3.org/2003/InkML">
+  <inkml:definitions>
+    <inkml:context xml:id="ctx0">
+      <inkml:inkSource xml:id="inkSrc0">
+        <inkml:traceFormat>
+          <inkml:channel name="X" type="integer" min="-2.14748E9" max="2.14748E9" units="cm"/>
+          <inkml:channel name="Y" type="integer" min="-2.14748E9" max="2.14748E9" units="cm"/>
+        </inkml:traceFormat>
+        <inkml:channelProperties>
+          <inkml:channelProperty channel="X" name="resolution" value="1000" units="1/cm"/>
+          <inkml:channelProperty channel="Y" name="resolution" value="1000" units="1/cm"/>
+        </inkml:channelProperties>
+      </inkml:inkSource>
+      <inkml:timestamp xml:id="ts0" timeString="2024-10-21T23:16:07.146"/>
+    </inkml:context>
+    <inkml:brush xml:id="br0">
+      <inkml:brushProperty name="width" value="0.05" units="cm"/>
+      <inkml:brushProperty name="height" value="0.05" units="cm"/>
+      <inkml:brushProperty name="ignorePressure" value="1"/>
+    </inkml:brush>
+  </inkml:definitions>
+  <inkml:trace contextRef="#ctx0" brushRef="#br0">0 0,'0'0</inkml:trace>
+</inkml:ink>
+</file>
+
+<file path=ppt/ink/ink24.xml><?xml version="1.0" encoding="utf-8"?>
+<inkml:ink xmlns:inkml="http://www.w3.org/2003/InkML">
+  <inkml:definitions>
+    <inkml:context xml:id="ctx0">
+      <inkml:inkSource xml:id="inkSrc0">
+        <inkml:traceFormat>
+          <inkml:channel name="X" type="integer" min="-2.14748E9" max="2.14748E9" units="cm"/>
+          <inkml:channel name="Y" type="integer" min="-2.14748E9" max="2.14748E9" units="cm"/>
+        </inkml:traceFormat>
+        <inkml:channelProperties>
+          <inkml:channelProperty channel="X" name="resolution" value="1000" units="1/cm"/>
+          <inkml:channelProperty channel="Y" name="resolution" value="1000" units="1/cm"/>
+        </inkml:channelProperties>
+      </inkml:inkSource>
+      <inkml:timestamp xml:id="ts0" timeString="2024-10-21T23:16:08.010"/>
     </inkml:context>
     <inkml:brush xml:id="br0">
       <inkml:brushProperty name="width" value="0.05" units="cm"/>
@@ -8409,10 +8728,6 @@
             </a:lvl1pPr>
           </a:lstStyle>
           <a:p>
-            <a:r>
-              <a:rPr lang="en-US" dirty="0"/>
-              <a:t>Introduction: 1-</a:t>
-            </a:r>
             <a:fld id="{C4204591-24BD-A542-B9D5-F8D8A88D2FEE}" type="slidenum">
               <a:rPr lang="en-US" smtClean="0"/>
               <a:pPr/>
@@ -13599,7 +13914,7 @@
     <p:sldLayoutId id="2147483669" r:id="rId19"/>
     <p:sldLayoutId id="2147483671" r:id="rId20"/>
   </p:sldLayoutIdLst>
-  <p:hf sldNum="0" hdr="0" ftr="0" dt="0"/>
+  <p:hf hdr="0" ftr="0" dt="0"/>
   <p:txStyles>
     <p:titleStyle>
       <a:defPPr marR="0" lvl="0" algn="l" rtl="0">
@@ -14390,30 +14705,7 @@
                 <a:cs typeface="Roboto"/>
                 <a:sym typeface="Roboto"/>
               </a:rPr>
-              <a:t>Bandwidth and</a:t>
-            </a:r>
-            <a:br>
-              <a:rPr lang="en" b="1" dirty="0">
-                <a:solidFill>
-                  <a:schemeClr val="accent3"/>
-                </a:solidFill>
-                <a:latin typeface="Roboto"/>
-                <a:ea typeface="Roboto"/>
-                <a:cs typeface="Roboto"/>
-                <a:sym typeface="Roboto"/>
-              </a:rPr>
-            </a:br>
-            <a:r>
-              <a:rPr lang="en" b="1" dirty="0">
-                <a:solidFill>
-                  <a:schemeClr val="accent3"/>
-                </a:solidFill>
-                <a:latin typeface="Roboto"/>
-                <a:ea typeface="Roboto"/>
-                <a:cs typeface="Roboto"/>
-                <a:sym typeface="Roboto"/>
-              </a:rPr>
-              <a:t>Propagation Delay</a:t>
+              <a:t>Bandwidth and Propagation Delay</a:t>
             </a:r>
             <a:endParaRPr b="1" dirty="0">
               <a:solidFill>
@@ -14483,36 +14775,6 @@
                 <a:cs typeface="Roboto"/>
               </a:rPr>
               <a:t>Overloaded Links</a:t>
-            </a:r>
-            <a:endParaRPr b="1" dirty="0">
-              <a:solidFill>
-                <a:schemeClr val="accent3"/>
-              </a:solidFill>
-              <a:latin typeface="Roboto"/>
-              <a:ea typeface="Roboto"/>
-              <a:cs typeface="Roboto"/>
-            </a:endParaRPr>
-          </a:p>
-          <a:p>
-            <a:pPr marL="0" lvl="0" indent="0" algn="l" rtl="0">
-              <a:spcBef>
-                <a:spcPts val="600"/>
-              </a:spcBef>
-              <a:spcAft>
-                <a:spcPts val="0"/>
-              </a:spcAft>
-              <a:buNone/>
-            </a:pPr>
-            <a:r>
-              <a:rPr lang="en" b="1" dirty="0">
-                <a:solidFill>
-                  <a:schemeClr val="accent3"/>
-                </a:solidFill>
-                <a:latin typeface="Roboto"/>
-                <a:ea typeface="Roboto"/>
-                <a:cs typeface="Roboto"/>
-              </a:rPr>
-              <a:t>Brief Preview of the Semester</a:t>
             </a:r>
             <a:endParaRPr b="1" dirty="0">
               <a:solidFill>
@@ -14621,6 +14883,44 @@
               <a:t>2026</a:t>
             </a:r>
             <a:endParaRPr dirty="0"/>
+          </a:p>
+        </p:txBody>
+      </p:sp>
+      <p:sp>
+        <p:nvSpPr>
+          <p:cNvPr id="3" name="Slide Number Placeholder 2">
+            <a:extLst>
+              <a:ext uri="{FF2B5EF4-FFF2-40B4-BE49-F238E27FC236}">
+                <a16:creationId xmlns:a16="http://schemas.microsoft.com/office/drawing/2014/main" id="{BB1700D9-8E43-5310-ED82-BC6D7108F651}"/>
+              </a:ext>
+            </a:extLst>
+          </p:cNvPr>
+          <p:cNvSpPr>
+            <a:spLocks noGrp="1"/>
+          </p:cNvSpPr>
+          <p:nvPr>
+            <p:ph type="sldNum" idx="12"/>
+          </p:nvPr>
+        </p:nvSpPr>
+        <p:spPr/>
+        <p:txBody>
+          <a:bodyPr/>
+          <a:lstStyle/>
+          <a:p>
+            <a:pPr marL="0" lvl="0" indent="0" algn="r" rtl="0">
+              <a:spcBef>
+                <a:spcPts val="0"/>
+              </a:spcBef>
+              <a:spcAft>
+                <a:spcPts val="0"/>
+              </a:spcAft>
+              <a:buNone/>
+            </a:pPr>
+            <a:fld id="{00000000-1234-1234-1234-123412341234}" type="slidenum">
+              <a:rPr lang="en" smtClean="0"/>
+              <a:t>1</a:t>
+            </a:fld>
+            <a:endParaRPr lang="en"/>
           </a:p>
         </p:txBody>
       </p:sp>
@@ -14690,8 +14990,8 @@
           </a:p>
         </p:txBody>
       </p:sp>
-      <mc:AlternateContent xmlns:mc="http://schemas.openxmlformats.org/markup-compatibility/2006">
-        <mc:Choice xmlns:a14="http://schemas.microsoft.com/office/drawing/2010/main" Requires="a14">
+      <mc:AlternateContent xmlns:mc="http://schemas.openxmlformats.org/markup-compatibility/2006" xmlns:a14="http://schemas.microsoft.com/office/drawing/2010/main">
+        <mc:Choice Requires="a14">
           <p:sp>
             <p:nvSpPr>
               <p:cNvPr id="3" name="Content Placeholder 2">
@@ -14731,30 +15031,40 @@
                     <m:sSub>
                       <m:sSubPr>
                         <m:ctrlPr>
-                          <a:rPr lang="ar-AE"/>
+                          <a:rPr lang="ar-AE" i="1">
+                            <a:latin typeface="Cambria Math" panose="02040503050406030204" pitchFamily="18" charset="0"/>
+                          </a:rPr>
                         </m:ctrlPr>
                       </m:sSubPr>
                       <m:e>
                         <m:r>
-                          <a:rPr lang="ar-AE" i="1"/>
+                          <a:rPr lang="ar-AE" i="1">
+                            <a:latin typeface="Cambria Math" panose="02040503050406030204" pitchFamily="18" charset="0"/>
+                          </a:rPr>
                           <m:t>𝑡</m:t>
                         </m:r>
                       </m:e>
                       <m:sub>
                         <m:r>
-                          <a:rPr lang="ar-AE" i="1"/>
+                          <a:rPr lang="ar-AE" i="1">
+                            <a:latin typeface="Cambria Math" panose="02040503050406030204" pitchFamily="18" charset="0"/>
+                          </a:rPr>
                           <m:t>𝑡𝑥</m:t>
                         </m:r>
                       </m:sub>
                     </m:sSub>
                     <m:r>
-                      <a:rPr lang="ar-AE"/>
+                      <a:rPr lang="ar-AE">
+                        <a:latin typeface="Cambria Math" panose="02040503050406030204" pitchFamily="18" charset="0"/>
+                      </a:rPr>
                       <m:t>=</m:t>
                     </m:r>
                     <m:f>
                       <m:fPr>
                         <m:ctrlPr>
-                          <a:rPr lang="ar-AE" i="1"/>
+                          <a:rPr lang="ar-AE" i="1">
+                            <a:latin typeface="Cambria Math" panose="02040503050406030204" pitchFamily="18" charset="0"/>
+                          </a:rPr>
                         </m:ctrlPr>
                       </m:fPr>
                       <m:num>
@@ -14791,45 +15101,61 @@
                       </m:den>
                     </m:f>
                     <m:r>
-                      <a:rPr lang="ar-AE"/>
+                      <a:rPr lang="ar-AE">
+                        <a:latin typeface="Cambria Math" panose="02040503050406030204" pitchFamily="18" charset="0"/>
+                      </a:rPr>
                       <m:t>=</m:t>
                     </m:r>
                     <m:f>
                       <m:fPr>
                         <m:ctrlPr>
-                          <a:rPr lang="ar-AE" i="1"/>
+                          <a:rPr lang="ar-AE" i="1">
+                            <a:latin typeface="Cambria Math" panose="02040503050406030204" pitchFamily="18" charset="0"/>
+                          </a:rPr>
                         </m:ctrlPr>
                       </m:fPr>
                       <m:num>
                         <m:r>
-                          <a:rPr lang="ar-AE"/>
+                          <a:rPr lang="ar-AE">
+                            <a:latin typeface="Cambria Math" panose="02040503050406030204" pitchFamily="18" charset="0"/>
+                          </a:rPr>
                           <m:t>8192</m:t>
                         </m:r>
                       </m:num>
                       <m:den>
                         <m:r>
-                          <a:rPr lang="ar-AE"/>
+                          <a:rPr lang="ar-AE">
+                            <a:latin typeface="Cambria Math" panose="02040503050406030204" pitchFamily="18" charset="0"/>
+                          </a:rPr>
                           <m:t>512</m:t>
                         </m:r>
                         <m:r>
-                          <a:rPr lang="ar-AE"/>
+                          <a:rPr lang="ar-AE">
+                            <a:latin typeface="Cambria Math" panose="02040503050406030204" pitchFamily="18" charset="0"/>
+                          </a:rPr>
                           <m:t>×</m:t>
                         </m:r>
                         <m:sSup>
                           <m:sSupPr>
                             <m:ctrlPr>
-                              <a:rPr lang="ar-AE" i="1"/>
+                              <a:rPr lang="ar-AE" i="1">
+                                <a:latin typeface="Cambria Math" panose="02040503050406030204" pitchFamily="18" charset="0"/>
+                              </a:rPr>
                             </m:ctrlPr>
                           </m:sSupPr>
                           <m:e>
                             <m:r>
-                              <a:rPr lang="ar-AE"/>
+                              <a:rPr lang="ar-AE">
+                                <a:latin typeface="Cambria Math" panose="02040503050406030204" pitchFamily="18" charset="0"/>
+                              </a:rPr>
                               <m:t>10</m:t>
                             </m:r>
                           </m:e>
                           <m:sup>
                             <m:r>
-                              <a:rPr lang="ar-AE"/>
+                              <a:rPr lang="ar-AE">
+                                <a:latin typeface="Cambria Math" panose="02040503050406030204" pitchFamily="18" charset="0"/>
+                              </a:rPr>
                               <m:t>9</m:t>
                             </m:r>
                           </m:sup>
@@ -14837,18 +15163,24 @@
                       </m:den>
                     </m:f>
                     <m:r>
-                      <a:rPr lang="ar-AE"/>
+                      <a:rPr lang="ar-AE">
+                        <a:latin typeface="Cambria Math" panose="02040503050406030204" pitchFamily="18" charset="0"/>
+                      </a:rPr>
                       <m:t>=</m:t>
                     </m:r>
                     <m:f>
                       <m:fPr>
                         <m:ctrlPr>
-                          <a:rPr lang="ar-AE" i="1"/>
+                          <a:rPr lang="ar-AE" i="1">
+                            <a:latin typeface="Cambria Math" panose="02040503050406030204" pitchFamily="18" charset="0"/>
+                          </a:rPr>
                         </m:ctrlPr>
                       </m:fPr>
                       <m:num>
                         <m:r>
-                          <a:rPr lang="ar-AE"/>
+                          <a:rPr lang="ar-AE">
+                            <a:latin typeface="Cambria Math" panose="02040503050406030204" pitchFamily="18" charset="0"/>
+                          </a:rPr>
                           <m:t>16</m:t>
                         </m:r>
                       </m:num>
@@ -14856,18 +15188,24 @@
                         <m:sSup>
                           <m:sSupPr>
                             <m:ctrlPr>
-                              <a:rPr lang="ar-AE" i="1"/>
+                              <a:rPr lang="ar-AE" i="1">
+                                <a:latin typeface="Cambria Math" panose="02040503050406030204" pitchFamily="18" charset="0"/>
+                              </a:rPr>
                             </m:ctrlPr>
                           </m:sSupPr>
                           <m:e>
                             <m:r>
-                              <a:rPr lang="ar-AE"/>
+                              <a:rPr lang="ar-AE">
+                                <a:latin typeface="Cambria Math" panose="02040503050406030204" pitchFamily="18" charset="0"/>
+                              </a:rPr>
                               <m:t>10</m:t>
                             </m:r>
                           </m:e>
                           <m:sup>
                             <m:r>
-                              <a:rPr lang="ar-AE"/>
+                              <a:rPr lang="ar-AE">
+                                <a:latin typeface="Cambria Math" panose="02040503050406030204" pitchFamily="18" charset="0"/>
+                              </a:rPr>
                               <m:t>9</m:t>
                             </m:r>
                           </m:sup>
@@ -14875,44 +15213,62 @@
                       </m:den>
                     </m:f>
                     <m:r>
-                      <a:rPr lang="ar-AE"/>
+                      <a:rPr lang="ar-AE">
+                        <a:latin typeface="Cambria Math" panose="02040503050406030204" pitchFamily="18" charset="0"/>
+                      </a:rPr>
                       <m:t>=</m:t>
                     </m:r>
                     <m:r>
-                      <a:rPr lang="ar-AE"/>
+                      <a:rPr lang="ar-AE">
+                        <a:latin typeface="Cambria Math" panose="02040503050406030204" pitchFamily="18" charset="0"/>
+                      </a:rPr>
                       <m:t>1</m:t>
                     </m:r>
                     <m:r>
-                      <a:rPr lang="ar-AE"/>
+                      <a:rPr lang="ar-AE">
+                        <a:latin typeface="Cambria Math" panose="02040503050406030204" pitchFamily="18" charset="0"/>
+                      </a:rPr>
                       <m:t>.</m:t>
                     </m:r>
                     <m:r>
-                      <a:rPr lang="ar-AE"/>
+                      <a:rPr lang="ar-AE">
+                        <a:latin typeface="Cambria Math" panose="02040503050406030204" pitchFamily="18" charset="0"/>
+                      </a:rPr>
                       <m:t>6</m:t>
                     </m:r>
                     <m:r>
-                      <a:rPr lang="ar-AE"/>
+                      <a:rPr lang="ar-AE">
+                        <a:latin typeface="Cambria Math" panose="02040503050406030204" pitchFamily="18" charset="0"/>
+                      </a:rPr>
                       <m:t>×</m:t>
                     </m:r>
                     <m:sSup>
                       <m:sSupPr>
                         <m:ctrlPr>
-                          <a:rPr lang="ar-AE" i="1"/>
+                          <a:rPr lang="ar-AE" i="1">
+                            <a:latin typeface="Cambria Math" panose="02040503050406030204" pitchFamily="18" charset="0"/>
+                          </a:rPr>
                         </m:ctrlPr>
                       </m:sSupPr>
                       <m:e>
                         <m:r>
-                          <a:rPr lang="ar-AE"/>
+                          <a:rPr lang="ar-AE">
+                            <a:latin typeface="Cambria Math" panose="02040503050406030204" pitchFamily="18" charset="0"/>
+                          </a:rPr>
                           <m:t>10</m:t>
                         </m:r>
                       </m:e>
                       <m:sup>
                         <m:r>
-                          <a:rPr lang="ar-AE"/>
+                          <a:rPr lang="ar-AE">
+                            <a:latin typeface="Cambria Math" panose="02040503050406030204" pitchFamily="18" charset="0"/>
+                          </a:rPr>
                           <m:t>−</m:t>
                         </m:r>
                         <m:r>
-                          <a:rPr lang="ar-AE"/>
+                          <a:rPr lang="ar-AE">
+                            <a:latin typeface="Cambria Math" panose="02040503050406030204" pitchFamily="18" charset="0"/>
+                          </a:rPr>
                           <m:t>8</m:t>
                         </m:r>
                       </m:sup>
@@ -14956,62 +15312,84 @@
                     <m:sSub>
                       <m:sSubPr>
                         <m:ctrlPr>
-                          <a:rPr lang="ar-AE"/>
+                          <a:rPr lang="ar-AE" i="1">
+                            <a:latin typeface="Cambria Math" panose="02040503050406030204" pitchFamily="18" charset="0"/>
+                          </a:rPr>
                         </m:ctrlPr>
                       </m:sSubPr>
                       <m:e>
                         <m:r>
-                          <a:rPr lang="ar-AE" i="1"/>
+                          <a:rPr lang="ar-AE" i="1">
+                            <a:latin typeface="Cambria Math" panose="02040503050406030204" pitchFamily="18" charset="0"/>
+                          </a:rPr>
                           <m:t>𝑡</m:t>
                         </m:r>
                       </m:e>
                       <m:sub>
                         <m:r>
-                          <a:rPr lang="ar-AE" i="1"/>
+                          <a:rPr lang="ar-AE" i="1">
+                            <a:latin typeface="Cambria Math" panose="02040503050406030204" pitchFamily="18" charset="0"/>
+                          </a:rPr>
                           <m:t>𝑝𝑟𝑜𝑝</m:t>
                         </m:r>
                       </m:sub>
                     </m:sSub>
                     <m:r>
-                      <a:rPr lang="ar-AE"/>
+                      <a:rPr lang="ar-AE">
+                        <a:latin typeface="Cambria Math" panose="02040503050406030204" pitchFamily="18" charset="0"/>
+                      </a:rPr>
                       <m:t>=</m:t>
                     </m:r>
                     <m:f>
                       <m:fPr>
                         <m:ctrlPr>
-                          <a:rPr lang="ar-AE" i="1"/>
+                          <a:rPr lang="ar-AE" i="1">
+                            <a:latin typeface="Cambria Math" panose="02040503050406030204" pitchFamily="18" charset="0"/>
+                          </a:rPr>
                         </m:ctrlPr>
                       </m:fPr>
                       <m:num>
                         <m:r>
-                          <a:rPr lang="ar-AE" i="1"/>
+                          <a:rPr lang="ar-AE" i="1">
+                            <a:latin typeface="Cambria Math" panose="02040503050406030204" pitchFamily="18" charset="0"/>
+                          </a:rPr>
                           <m:t>𝑀</m:t>
                         </m:r>
                       </m:num>
                       <m:den>
                         <m:r>
-                          <a:rPr lang="ar-AE"/>
+                          <a:rPr lang="ar-AE">
+                            <a:latin typeface="Cambria Math" panose="02040503050406030204" pitchFamily="18" charset="0"/>
+                          </a:rPr>
                           <m:t>2</m:t>
                         </m:r>
                         <m:r>
-                          <a:rPr lang="ar-AE"/>
+                          <a:rPr lang="ar-AE">
+                            <a:latin typeface="Cambria Math" panose="02040503050406030204" pitchFamily="18" charset="0"/>
+                          </a:rPr>
                           <m:t>×</m:t>
                         </m:r>
                         <m:sSup>
                           <m:sSupPr>
                             <m:ctrlPr>
-                              <a:rPr lang="ar-AE" i="1"/>
+                              <a:rPr lang="ar-AE" i="1">
+                                <a:latin typeface="Cambria Math" panose="02040503050406030204" pitchFamily="18" charset="0"/>
+                              </a:rPr>
                             </m:ctrlPr>
                           </m:sSupPr>
                           <m:e>
                             <m:r>
-                              <a:rPr lang="ar-AE"/>
+                              <a:rPr lang="ar-AE">
+                                <a:latin typeface="Cambria Math" panose="02040503050406030204" pitchFamily="18" charset="0"/>
+                              </a:rPr>
                               <m:t>10</m:t>
                             </m:r>
                           </m:e>
                           <m:sup>
                             <m:r>
-                              <a:rPr lang="ar-AE"/>
+                              <a:rPr lang="ar-AE">
+                                <a:latin typeface="Cambria Math" panose="02040503050406030204" pitchFamily="18" charset="0"/>
+                              </a:rPr>
                               <m:t>9</m:t>
                             </m:r>
                           </m:sup>
@@ -15037,39 +15415,53 @@
                     <m:f>
                       <m:fPr>
                         <m:ctrlPr>
-                          <a:rPr lang="ar-AE"/>
+                          <a:rPr lang="ar-AE" i="1">
+                            <a:latin typeface="Cambria Math" panose="02040503050406030204" pitchFamily="18" charset="0"/>
+                          </a:rPr>
                         </m:ctrlPr>
                       </m:fPr>
                       <m:num>
                         <m:r>
-                          <a:rPr lang="ar-AE" i="1"/>
+                          <a:rPr lang="ar-AE" i="1">
+                            <a:latin typeface="Cambria Math" panose="02040503050406030204" pitchFamily="18" charset="0"/>
+                          </a:rPr>
                           <m:t>𝑀</m:t>
                         </m:r>
                       </m:num>
                       <m:den>
                         <m:r>
-                          <a:rPr lang="ar-AE"/>
+                          <a:rPr lang="ar-AE">
+                            <a:latin typeface="Cambria Math" panose="02040503050406030204" pitchFamily="18" charset="0"/>
+                          </a:rPr>
                           <m:t>2</m:t>
                         </m:r>
                         <m:r>
-                          <a:rPr lang="ar-AE"/>
+                          <a:rPr lang="ar-AE">
+                            <a:latin typeface="Cambria Math" panose="02040503050406030204" pitchFamily="18" charset="0"/>
+                          </a:rPr>
                           <m:t>×</m:t>
                         </m:r>
                         <m:sSup>
                           <m:sSupPr>
                             <m:ctrlPr>
-                              <a:rPr lang="ar-AE" i="1"/>
+                              <a:rPr lang="ar-AE" i="1">
+                                <a:latin typeface="Cambria Math" panose="02040503050406030204" pitchFamily="18" charset="0"/>
+                              </a:rPr>
                             </m:ctrlPr>
                           </m:sSupPr>
                           <m:e>
                             <m:r>
-                              <a:rPr lang="ar-AE"/>
+                              <a:rPr lang="ar-AE">
+                                <a:latin typeface="Cambria Math" panose="02040503050406030204" pitchFamily="18" charset="0"/>
+                              </a:rPr>
                               <m:t>10</m:t>
                             </m:r>
                           </m:e>
                           <m:sup>
                             <m:r>
-                              <a:rPr lang="ar-AE"/>
+                              <a:rPr lang="ar-AE">
+                                <a:latin typeface="Cambria Math" panose="02040503050406030204" pitchFamily="18" charset="0"/>
+                              </a:rPr>
                               <m:t>9</m:t>
                             </m:r>
                           </m:sup>
@@ -15077,44 +15469,62 @@
                       </m:den>
                     </m:f>
                     <m:r>
-                      <a:rPr lang="ar-AE"/>
+                      <a:rPr lang="ar-AE">
+                        <a:latin typeface="Cambria Math" panose="02040503050406030204" pitchFamily="18" charset="0"/>
+                      </a:rPr>
                       <m:t>=</m:t>
                     </m:r>
                     <m:r>
-                      <a:rPr lang="ar-AE"/>
+                      <a:rPr lang="ar-AE">
+                        <a:latin typeface="Cambria Math" panose="02040503050406030204" pitchFamily="18" charset="0"/>
+                      </a:rPr>
                       <m:t>1</m:t>
                     </m:r>
                     <m:r>
-                      <a:rPr lang="ar-AE"/>
+                      <a:rPr lang="ar-AE">
+                        <a:latin typeface="Cambria Math" panose="02040503050406030204" pitchFamily="18" charset="0"/>
+                      </a:rPr>
                       <m:t>.</m:t>
                     </m:r>
                     <m:r>
-                      <a:rPr lang="ar-AE"/>
+                      <a:rPr lang="ar-AE">
+                        <a:latin typeface="Cambria Math" panose="02040503050406030204" pitchFamily="18" charset="0"/>
+                      </a:rPr>
                       <m:t>6</m:t>
                     </m:r>
                     <m:r>
-                      <a:rPr lang="ar-AE"/>
+                      <a:rPr lang="ar-AE">
+                        <a:latin typeface="Cambria Math" panose="02040503050406030204" pitchFamily="18" charset="0"/>
+                      </a:rPr>
                       <m:t>×</m:t>
                     </m:r>
                     <m:sSup>
                       <m:sSupPr>
                         <m:ctrlPr>
-                          <a:rPr lang="ar-AE" i="1"/>
+                          <a:rPr lang="ar-AE" i="1">
+                            <a:latin typeface="Cambria Math" panose="02040503050406030204" pitchFamily="18" charset="0"/>
+                          </a:rPr>
                         </m:ctrlPr>
                       </m:sSupPr>
                       <m:e>
                         <m:r>
-                          <a:rPr lang="ar-AE"/>
+                          <a:rPr lang="ar-AE">
+                            <a:latin typeface="Cambria Math" panose="02040503050406030204" pitchFamily="18" charset="0"/>
+                          </a:rPr>
                           <m:t>10</m:t>
                         </m:r>
                       </m:e>
                       <m:sup>
                         <m:r>
-                          <a:rPr lang="ar-AE"/>
+                          <a:rPr lang="ar-AE">
+                            <a:latin typeface="Cambria Math" panose="02040503050406030204" pitchFamily="18" charset="0"/>
+                          </a:rPr>
                           <m:t>−</m:t>
                         </m:r>
                         <m:r>
-                          <a:rPr lang="ar-AE"/>
+                          <a:rPr lang="ar-AE">
+                            <a:latin typeface="Cambria Math" panose="02040503050406030204" pitchFamily="18" charset="0"/>
+                          </a:rPr>
                           <m:t>8</m:t>
                         </m:r>
                       </m:sup>
@@ -15127,15 +15537,21 @@
                 <a14:m>
                   <m:oMath xmlns:m="http://schemas.openxmlformats.org/officeDocument/2006/math">
                     <m:r>
-                      <a:rPr lang="ar-AE" i="1"/>
+                      <a:rPr lang="ar-AE" i="1">
+                        <a:latin typeface="Cambria Math" panose="02040503050406030204" pitchFamily="18" charset="0"/>
+                      </a:rPr>
                       <m:t>𝑀</m:t>
                     </m:r>
                     <m:r>
-                      <a:rPr lang="ar-AE"/>
+                      <a:rPr lang="ar-AE">
+                        <a:latin typeface="Cambria Math" panose="02040503050406030204" pitchFamily="18" charset="0"/>
+                      </a:rPr>
                       <m:t>=</m:t>
                     </m:r>
                     <m:r>
-                      <a:rPr lang="ar-AE"/>
+                      <a:rPr lang="ar-AE">
+                        <a:latin typeface="Cambria Math" panose="02040503050406030204" pitchFamily="18" charset="0"/>
+                      </a:rPr>
                       <m:t>32</m:t>
                     </m:r>
                   </m:oMath>
@@ -15149,7 +15565,7 @@
             </p:txBody>
           </p:sp>
         </mc:Choice>
-        <mc:Fallback>
+        <mc:Fallback xmlns="">
           <p:sp>
             <p:nvSpPr>
               <p:cNvPr id="3" name="Content Placeholder 2">
@@ -15193,8 +15609,8 @@
           </p:sp>
         </mc:Fallback>
       </mc:AlternateContent>
-      <mc:AlternateContent xmlns:mc="http://schemas.openxmlformats.org/markup-compatibility/2006">
-        <mc:Choice xmlns:p14="http://schemas.microsoft.com/office/powerpoint/2010/main" Requires="p14">
+      <mc:AlternateContent xmlns:mc="http://schemas.openxmlformats.org/markup-compatibility/2006" xmlns:p14="http://schemas.microsoft.com/office/powerpoint/2010/main">
+        <mc:Choice Requires="p14">
           <p:contentPart p14:bwMode="auto" r:id="rId3">
             <p14:nvContentPartPr>
               <p14:cNvPr id="8" name="Ink 7">
@@ -15213,7 +15629,7 @@
             </p14:xfrm>
           </p:contentPart>
         </mc:Choice>
-        <mc:Fallback>
+        <mc:Fallback xmlns="">
           <p:pic>
             <p:nvPicPr>
               <p:cNvPr id="8" name="Ink 7">
@@ -15244,8 +15660,8 @@
           </p:pic>
         </mc:Fallback>
       </mc:AlternateContent>
-      <mc:AlternateContent xmlns:mc="http://schemas.openxmlformats.org/markup-compatibility/2006">
-        <mc:Choice xmlns:p14="http://schemas.microsoft.com/office/powerpoint/2010/main" Requires="p14">
+      <mc:AlternateContent xmlns:mc="http://schemas.openxmlformats.org/markup-compatibility/2006" xmlns:p14="http://schemas.microsoft.com/office/powerpoint/2010/main">
+        <mc:Choice Requires="p14">
           <p:contentPart p14:bwMode="auto" r:id="rId5">
             <p14:nvContentPartPr>
               <p14:cNvPr id="9" name="Ink 8">
@@ -15264,7 +15680,7 @@
             </p14:xfrm>
           </p:contentPart>
         </mc:Choice>
-        <mc:Fallback>
+        <mc:Fallback xmlns="">
           <p:pic>
             <p:nvPicPr>
               <p:cNvPr id="9" name="Ink 8">
@@ -15340,6 +15756,36 @@
           </a:p>
         </p:txBody>
       </p:sp>
+      <p:sp>
+        <p:nvSpPr>
+          <p:cNvPr id="5" name="Slide Number Placeholder 4">
+            <a:extLst>
+              <a:ext uri="{FF2B5EF4-FFF2-40B4-BE49-F238E27FC236}">
+                <a16:creationId xmlns:a16="http://schemas.microsoft.com/office/drawing/2014/main" id="{5E0C8E04-71D0-BBFA-0EC7-0D3ABC9C238D}"/>
+              </a:ext>
+            </a:extLst>
+          </p:cNvPr>
+          <p:cNvSpPr>
+            <a:spLocks noGrp="1"/>
+          </p:cNvSpPr>
+          <p:nvPr>
+            <p:ph type="sldNum" sz="quarter" idx="4"/>
+          </p:nvPr>
+        </p:nvSpPr>
+        <p:spPr/>
+        <p:txBody>
+          <a:bodyPr/>
+          <a:lstStyle/>
+          <a:p>
+            <a:fld id="{C4204591-24BD-A542-B9D5-F8D8A88D2FEE}" type="slidenum">
+              <a:rPr lang="en-US" smtClean="0"/>
+              <a:pPr/>
+              <a:t>10</a:t>
+            </a:fld>
+            <a:endParaRPr lang="en-US" dirty="0"/>
+          </a:p>
+        </p:txBody>
+      </p:sp>
     </p:spTree>
     <p:extLst>
       <p:ext uri="{BB962C8B-B14F-4D97-AF65-F5344CB8AC3E}">
@@ -15411,8 +15857,8 @@
           </a:p>
         </p:txBody>
       </p:sp>
-      <mc:AlternateContent xmlns:mc="http://schemas.openxmlformats.org/markup-compatibility/2006">
-        <mc:Choice xmlns:a14="http://schemas.microsoft.com/office/drawing/2010/main" Requires="a14">
+      <mc:AlternateContent xmlns:mc="http://schemas.openxmlformats.org/markup-compatibility/2006" xmlns:a14="http://schemas.microsoft.com/office/drawing/2010/main">
+        <mc:Choice Requires="a14">
           <p:sp>
             <p:nvSpPr>
               <p:cNvPr id="3" name="Content Placeholder 2">
@@ -15448,15 +15894,21 @@
                 <a14:m>
                   <m:oMath xmlns:m="http://schemas.openxmlformats.org/officeDocument/2006/math">
                     <m:r>
-                      <a:rPr lang="en-US" b="0" i="1"/>
+                      <a:rPr lang="en-US" b="0" i="1">
+                        <a:latin typeface="Cambria Math" panose="02040503050406030204" pitchFamily="18" charset="0"/>
+                      </a:rPr>
                       <m:t>𝐿</m:t>
                     </m:r>
                     <m:r>
-                      <a:rPr lang="en-US" b="0"/>
+                      <a:rPr lang="en-US" b="0">
+                        <a:latin typeface="Cambria Math" panose="02040503050406030204" pitchFamily="18" charset="0"/>
+                      </a:rPr>
                       <m:t>=</m:t>
                     </m:r>
                     <m:r>
-                      <a:rPr lang="en-US" b="0"/>
+                      <a:rPr lang="en-US" b="0">
+                        <a:latin typeface="Cambria Math" panose="02040503050406030204" pitchFamily="18" charset="0"/>
+                      </a:rPr>
                       <m:t>8000</m:t>
                     </m:r>
                   </m:oMath>
@@ -15468,15 +15920,21 @@
                 <a14:m>
                   <m:oMath xmlns:m="http://schemas.openxmlformats.org/officeDocument/2006/math">
                     <m:r>
-                      <a:rPr lang="en-US" b="0" i="1"/>
+                      <a:rPr lang="en-US" b="0" i="1">
+                        <a:latin typeface="Cambria Math" panose="02040503050406030204" pitchFamily="18" charset="0"/>
+                      </a:rPr>
                       <m:t>𝐵</m:t>
                     </m:r>
                     <m:r>
-                      <a:rPr lang="en-US" b="0"/>
+                      <a:rPr lang="en-US" b="0">
+                        <a:latin typeface="Cambria Math" panose="02040503050406030204" pitchFamily="18" charset="0"/>
+                      </a:rPr>
                       <m:t>=</m:t>
                     </m:r>
                     <m:r>
-                      <a:rPr lang="en-US" b="0"/>
+                      <a:rPr lang="en-US" b="0">
+                        <a:latin typeface="Cambria Math" panose="02040503050406030204" pitchFamily="18" charset="0"/>
+                      </a:rPr>
                       <m:t>8000</m:t>
                     </m:r>
                   </m:oMath>
@@ -15533,14 +15991,14 @@
                         <m:nor/>
                       </m:rPr>
                       <a:rPr lang="en-US" sz="1600"/>
-                      <m:t>Kby</m:t>
+                      <m:t>Kbyte</m:t>
                     </m:r>
                     <m:r>
                       <m:rPr>
                         <m:nor/>
                       </m:rPr>
                       <a:rPr lang="en-US" sz="1600" b="0" smtClean="0"/>
-                      <m:t>tes</m:t>
+                      <m:t>s</m:t>
                     </m:r>
                   </m:oMath>
                 </a14:m>
@@ -15603,7 +16061,7 @@
             </p:txBody>
           </p:sp>
         </mc:Choice>
-        <mc:Fallback>
+        <mc:Fallback xmlns="">
           <p:sp>
             <p:nvSpPr>
               <p:cNvPr id="3" name="Content Placeholder 2">
@@ -15647,8 +16105,8 @@
           </p:sp>
         </mc:Fallback>
       </mc:AlternateContent>
-      <mc:AlternateContent xmlns:mc="http://schemas.openxmlformats.org/markup-compatibility/2006">
-        <mc:Choice xmlns:p14="http://schemas.microsoft.com/office/powerpoint/2010/main" Requires="p14">
+      <mc:AlternateContent xmlns:mc="http://schemas.openxmlformats.org/markup-compatibility/2006" xmlns:p14="http://schemas.microsoft.com/office/powerpoint/2010/main">
+        <mc:Choice Requires="p14">
           <p:contentPart p14:bwMode="auto" r:id="rId4">
             <p14:nvContentPartPr>
               <p14:cNvPr id="8" name="Ink 7">
@@ -15667,7 +16125,7 @@
             </p14:xfrm>
           </p:contentPart>
         </mc:Choice>
-        <mc:Fallback>
+        <mc:Fallback xmlns="">
           <p:pic>
             <p:nvPicPr>
               <p:cNvPr id="8" name="Ink 7">
@@ -15698,8 +16156,8 @@
           </p:pic>
         </mc:Fallback>
       </mc:AlternateContent>
-      <mc:AlternateContent xmlns:mc="http://schemas.openxmlformats.org/markup-compatibility/2006">
-        <mc:Choice xmlns:p14="http://schemas.microsoft.com/office/powerpoint/2010/main" Requires="p14">
+      <mc:AlternateContent xmlns:mc="http://schemas.openxmlformats.org/markup-compatibility/2006" xmlns:p14="http://schemas.microsoft.com/office/powerpoint/2010/main">
+        <mc:Choice Requires="p14">
           <p:contentPart p14:bwMode="auto" r:id="rId6">
             <p14:nvContentPartPr>
               <p14:cNvPr id="9" name="Ink 8">
@@ -15718,7 +16176,7 @@
             </p14:xfrm>
           </p:contentPart>
         </mc:Choice>
-        <mc:Fallback>
+        <mc:Fallback xmlns="">
           <p:pic>
             <p:nvPicPr>
               <p:cNvPr id="9" name="Ink 8">
@@ -15791,6 +16249,36 @@
           <a:lstStyle/>
           <a:p>
             <a:endParaRPr lang="en-US" sz="1050"/>
+          </a:p>
+        </p:txBody>
+      </p:sp>
+      <p:sp>
+        <p:nvSpPr>
+          <p:cNvPr id="5" name="Slide Number Placeholder 4">
+            <a:extLst>
+              <a:ext uri="{FF2B5EF4-FFF2-40B4-BE49-F238E27FC236}">
+                <a16:creationId xmlns:a16="http://schemas.microsoft.com/office/drawing/2014/main" id="{087023DE-858E-CE3A-6BD3-A38639D9D6C7}"/>
+              </a:ext>
+            </a:extLst>
+          </p:cNvPr>
+          <p:cNvSpPr>
+            <a:spLocks noGrp="1"/>
+          </p:cNvSpPr>
+          <p:nvPr>
+            <p:ph type="sldNum" sz="quarter" idx="4"/>
+          </p:nvPr>
+        </p:nvSpPr>
+        <p:spPr/>
+        <p:txBody>
+          <a:bodyPr/>
+          <a:lstStyle/>
+          <a:p>
+            <a:fld id="{C4204591-24BD-A542-B9D5-F8D8A88D2FEE}" type="slidenum">
+              <a:rPr lang="en-US" smtClean="0"/>
+              <a:pPr/>
+              <a:t>11</a:t>
+            </a:fld>
+            <a:endParaRPr lang="en-US" dirty="0"/>
           </a:p>
         </p:txBody>
       </p:sp>
@@ -15870,8 +16358,8 @@
           </a:p>
         </p:txBody>
       </p:sp>
-      <mc:AlternateContent xmlns:mc="http://schemas.openxmlformats.org/markup-compatibility/2006">
-        <mc:Choice xmlns:a14="http://schemas.microsoft.com/office/drawing/2010/main" Requires="a14">
+      <mc:AlternateContent xmlns:mc="http://schemas.openxmlformats.org/markup-compatibility/2006" xmlns:a14="http://schemas.microsoft.com/office/drawing/2010/main">
+        <mc:Choice Requires="a14">
           <p:sp>
             <p:nvSpPr>
               <p:cNvPr id="3" name="Content Placeholder 2">
@@ -15907,15 +16395,21 @@
                 <a14:m>
                   <m:oMath xmlns:m="http://schemas.openxmlformats.org/officeDocument/2006/math">
                     <m:r>
-                      <a:rPr lang="en-US" b="0" i="1"/>
+                      <a:rPr lang="en-US" b="0" i="1">
+                        <a:latin typeface="Cambria Math" panose="02040503050406030204" pitchFamily="18" charset="0"/>
+                      </a:rPr>
                       <m:t>𝐿</m:t>
                     </m:r>
                     <m:r>
-                      <a:rPr lang="en-US" b="0"/>
+                      <a:rPr lang="en-US" b="0">
+                        <a:latin typeface="Cambria Math" panose="02040503050406030204" pitchFamily="18" charset="0"/>
+                      </a:rPr>
                       <m:t>=</m:t>
                     </m:r>
                     <m:r>
-                      <a:rPr lang="en-US" b="0"/>
+                      <a:rPr lang="en-US" b="0">
+                        <a:latin typeface="Cambria Math" panose="02040503050406030204" pitchFamily="18" charset="0"/>
+                      </a:rPr>
                       <m:t>8000</m:t>
                     </m:r>
                   </m:oMath>
@@ -15927,15 +16421,21 @@
                 <a14:m>
                   <m:oMath xmlns:m="http://schemas.openxmlformats.org/officeDocument/2006/math">
                     <m:r>
-                      <a:rPr lang="en-US" b="0" i="1"/>
+                      <a:rPr lang="en-US" b="0" i="1">
+                        <a:latin typeface="Cambria Math" panose="02040503050406030204" pitchFamily="18" charset="0"/>
+                      </a:rPr>
                       <m:t>𝐵</m:t>
                     </m:r>
                     <m:r>
-                      <a:rPr lang="en-US" b="0"/>
+                      <a:rPr lang="en-US" b="0">
+                        <a:latin typeface="Cambria Math" panose="02040503050406030204" pitchFamily="18" charset="0"/>
+                      </a:rPr>
                       <m:t>=</m:t>
                     </m:r>
                     <m:r>
-                      <a:rPr lang="en-US" b="0"/>
+                      <a:rPr lang="en-US" b="0">
+                        <a:latin typeface="Cambria Math" panose="02040503050406030204" pitchFamily="18" charset="0"/>
+                      </a:rPr>
                       <m:t>8000</m:t>
                     </m:r>
                   </m:oMath>
@@ -16152,14 +16652,14 @@
                         <m:nor/>
                       </m:rPr>
                       <a:rPr lang="en-US" sz="1600"/>
-                      <m:t>Kby</m:t>
+                      <m:t>Kbyte</m:t>
                     </m:r>
                     <m:r>
                       <m:rPr>
                         <m:nor/>
                       </m:rPr>
                       <a:rPr lang="en-US" sz="1600" b="0" smtClean="0"/>
-                      <m:t>tes</m:t>
+                      <m:t>s</m:t>
                     </m:r>
                   </m:oMath>
                 </a14:m>
@@ -16476,7 +16976,7 @@
             </p:txBody>
           </p:sp>
         </mc:Choice>
-        <mc:Fallback>
+        <mc:Fallback xmlns="">
           <p:sp>
             <p:nvSpPr>
               <p:cNvPr id="3" name="Content Placeholder 2">
@@ -16520,8 +17020,8 @@
           </p:sp>
         </mc:Fallback>
       </mc:AlternateContent>
-      <mc:AlternateContent xmlns:mc="http://schemas.openxmlformats.org/markup-compatibility/2006">
-        <mc:Choice xmlns:p14="http://schemas.microsoft.com/office/powerpoint/2010/main" Requires="p14">
+      <mc:AlternateContent xmlns:mc="http://schemas.openxmlformats.org/markup-compatibility/2006" xmlns:p14="http://schemas.microsoft.com/office/powerpoint/2010/main">
+        <mc:Choice Requires="p14">
           <p:contentPart p14:bwMode="auto" r:id="rId4">
             <p14:nvContentPartPr>
               <p14:cNvPr id="8" name="Ink 7">
@@ -16540,7 +17040,7 @@
             </p14:xfrm>
           </p:contentPart>
         </mc:Choice>
-        <mc:Fallback>
+        <mc:Fallback xmlns="">
           <p:pic>
             <p:nvPicPr>
               <p:cNvPr id="8" name="Ink 7">
@@ -16571,8 +17071,8 @@
           </p:pic>
         </mc:Fallback>
       </mc:AlternateContent>
-      <mc:AlternateContent xmlns:mc="http://schemas.openxmlformats.org/markup-compatibility/2006">
-        <mc:Choice xmlns:p14="http://schemas.microsoft.com/office/powerpoint/2010/main" Requires="p14">
+      <mc:AlternateContent xmlns:mc="http://schemas.openxmlformats.org/markup-compatibility/2006" xmlns:p14="http://schemas.microsoft.com/office/powerpoint/2010/main">
+        <mc:Choice Requires="p14">
           <p:contentPart p14:bwMode="auto" r:id="rId6">
             <p14:nvContentPartPr>
               <p14:cNvPr id="9" name="Ink 8">
@@ -16591,7 +17091,7 @@
             </p14:xfrm>
           </p:contentPart>
         </mc:Choice>
-        <mc:Fallback>
+        <mc:Fallback xmlns="">
           <p:pic>
             <p:nvPicPr>
               <p:cNvPr id="9" name="Ink 8">
@@ -16667,10 +17167,1530 @@
           </a:p>
         </p:txBody>
       </p:sp>
+      <p:sp>
+        <p:nvSpPr>
+          <p:cNvPr id="5" name="Slide Number Placeholder 4">
+            <a:extLst>
+              <a:ext uri="{FF2B5EF4-FFF2-40B4-BE49-F238E27FC236}">
+                <a16:creationId xmlns:a16="http://schemas.microsoft.com/office/drawing/2014/main" id="{6EBA2943-D25A-A780-4E7D-AC283B7F044B}"/>
+              </a:ext>
+            </a:extLst>
+          </p:cNvPr>
+          <p:cNvSpPr>
+            <a:spLocks noGrp="1"/>
+          </p:cNvSpPr>
+          <p:nvPr>
+            <p:ph type="sldNum" sz="quarter" idx="4"/>
+          </p:nvPr>
+        </p:nvSpPr>
+        <p:spPr/>
+        <p:txBody>
+          <a:bodyPr/>
+          <a:lstStyle/>
+          <a:p>
+            <a:fld id="{C4204591-24BD-A542-B9D5-F8D8A88D2FEE}" type="slidenum">
+              <a:rPr lang="en-US" smtClean="0"/>
+              <a:pPr/>
+              <a:t>12</a:t>
+            </a:fld>
+            <a:endParaRPr lang="en-US" dirty="0"/>
+          </a:p>
+        </p:txBody>
+      </p:sp>
     </p:spTree>
     <p:extLst>
       <p:ext uri="{BB962C8B-B14F-4D97-AF65-F5344CB8AC3E}">
         <p14:creationId xmlns:p14="http://schemas.microsoft.com/office/powerpoint/2010/main" val="2647804915"/>
+      </p:ext>
+    </p:extLst>
+  </p:cSld>
+  <p:clrMapOvr>
+    <a:masterClrMapping/>
+  </p:clrMapOvr>
+</p:sld>
+</file>
+
+<file path=ppt/slides/slide13.xml><?xml version="1.0" encoding="utf-8"?>
+<p:sld xmlns:a="http://schemas.openxmlformats.org/drawingml/2006/main" xmlns:r="http://schemas.openxmlformats.org/officeDocument/2006/relationships" xmlns:p="http://schemas.openxmlformats.org/presentationml/2006/main">
+  <p:cSld>
+    <p:spTree>
+      <p:nvGrpSpPr>
+        <p:cNvPr id="1" name="">
+          <a:extLst>
+            <a:ext uri="{FF2B5EF4-FFF2-40B4-BE49-F238E27FC236}">
+              <a16:creationId xmlns:a16="http://schemas.microsoft.com/office/drawing/2014/main" id="{7BC34941-33F7-CED5-B96B-7F80E232959C}"/>
+            </a:ext>
+          </a:extLst>
+        </p:cNvPr>
+        <p:cNvGrpSpPr/>
+        <p:nvPr/>
+      </p:nvGrpSpPr>
+      <p:grpSpPr>
+        <a:xfrm>
+          <a:off x="0" y="0"/>
+          <a:ext cx="0" cy="0"/>
+          <a:chOff x="0" y="0"/>
+          <a:chExt cx="0" cy="0"/>
+        </a:xfrm>
+      </p:grpSpPr>
+      <p:sp>
+        <p:nvSpPr>
+          <p:cNvPr id="2" name="Title 1">
+            <a:extLst>
+              <a:ext uri="{FF2B5EF4-FFF2-40B4-BE49-F238E27FC236}">
+                <a16:creationId xmlns:a16="http://schemas.microsoft.com/office/drawing/2014/main" id="{A32FC9C6-5635-D4CB-5A42-F596F5C4907C}"/>
+              </a:ext>
+            </a:extLst>
+          </p:cNvPr>
+          <p:cNvSpPr>
+            <a:spLocks noGrp="1"/>
+          </p:cNvSpPr>
+          <p:nvPr>
+            <p:ph type="title"/>
+          </p:nvPr>
+        </p:nvSpPr>
+        <p:spPr>
+          <a:xfrm>
+            <a:off x="505326" y="338866"/>
+            <a:ext cx="4247148" cy="670967"/>
+          </a:xfrm>
+        </p:spPr>
+        <p:txBody>
+          <a:bodyPr>
+            <a:normAutofit fontScale="90000"/>
+          </a:bodyPr>
+          <a:lstStyle/>
+          <a:p>
+            <a:r>
+              <a:rPr lang="en-US" dirty="0"/>
+              <a:t>Q5.1 Pipe Diagram</a:t>
+            </a:r>
+          </a:p>
+        </p:txBody>
+      </p:sp>
+      <p:sp>
+        <p:nvSpPr>
+          <p:cNvPr id="3" name="Content Placeholder 2">
+            <a:extLst>
+              <a:ext uri="{FF2B5EF4-FFF2-40B4-BE49-F238E27FC236}">
+                <a16:creationId xmlns:a16="http://schemas.microsoft.com/office/drawing/2014/main" id="{08B1A53D-BE96-9908-6EB6-D5CF7B0E825C}"/>
+              </a:ext>
+            </a:extLst>
+          </p:cNvPr>
+          <p:cNvSpPr>
+            <a:spLocks noGrp="1"/>
+          </p:cNvSpPr>
+          <p:nvPr>
+            <p:ph sz="half" idx="1"/>
+          </p:nvPr>
+        </p:nvSpPr>
+        <p:spPr>
+          <a:xfrm>
+            <a:off x="91820" y="1009834"/>
+            <a:ext cx="8724376" cy="4027992"/>
+          </a:xfrm>
+        </p:spPr>
+        <p:txBody>
+          <a:bodyPr>
+            <a:normAutofit/>
+          </a:bodyPr>
+          <a:lstStyle/>
+          <a:p>
+            <a:r>
+              <a:rPr lang="en-US" sz="1600" dirty="0"/>
+              <a:t>Consider the pipe diagram, with a single packet in the pipe.</a:t>
+            </a:r>
+          </a:p>
+          <a:p>
+            <a:r>
+              <a:rPr lang="en-US" sz="1600" dirty="0"/>
+              <a:t>1) What is the size of this packet?</a:t>
+            </a:r>
+          </a:p>
+          <a:p>
+            <a:r>
+              <a:rPr lang="en-US" sz="1600" dirty="0"/>
+              <a:t>2) How long does it take to send a packet of the same size as the packet shown?(Count from the time the first byte is sent, to the time the last byte is received.)</a:t>
+            </a:r>
+          </a:p>
+          <a:p>
+            <a:r>
+              <a:rPr lang="en-US" sz="1600" dirty="0"/>
+              <a:t>3) How long does it take to send 7 packets, all of the same size as the packet shown?(Count from the time the first byte of the first packet is sent, to the time the last byte of the last packet is received.)</a:t>
+            </a:r>
+          </a:p>
+          <a:p>
+            <a:r>
+              <a:rPr lang="en-US" sz="1600" dirty="0"/>
+              <a:t>4) What is the maximum number of packets that could be in the process of being sent </a:t>
+            </a:r>
+            <a:r>
+              <a:rPr lang="en-US" sz="1600" dirty="0" err="1"/>
+              <a:t>alongthis</a:t>
+            </a:r>
+            <a:r>
+              <a:rPr lang="en-US" sz="1600" dirty="0"/>
+              <a:t> link, at any given </a:t>
+            </a:r>
+            <a:r>
+              <a:rPr lang="en-US" sz="1600" dirty="0" err="1"/>
+              <a:t>moment?Don’t</a:t>
+            </a:r>
+            <a:r>
+              <a:rPr lang="en-US" sz="1600" dirty="0"/>
+              <a:t> worry about fractions and rounding (e.g. assume 𝑥, 𝑦, and 𝑧 are defined such that all </a:t>
+            </a:r>
+            <a:r>
+              <a:rPr lang="en-US" sz="1600" dirty="0" err="1"/>
+              <a:t>answerchoices</a:t>
+            </a:r>
+            <a:r>
+              <a:rPr lang="en-US" sz="1600" dirty="0"/>
+              <a:t> are integers).</a:t>
+            </a:r>
+          </a:p>
+          <a:p>
+            <a:endParaRPr lang="en-US" sz="1600" dirty="0"/>
+          </a:p>
+        </p:txBody>
+      </p:sp>
+      <mc:AlternateContent xmlns:mc="http://schemas.openxmlformats.org/markup-compatibility/2006" xmlns:p14="http://schemas.microsoft.com/office/powerpoint/2010/main">
+        <mc:Choice Requires="p14">
+          <p:contentPart p14:bwMode="auto" r:id="rId2">
+            <p14:nvContentPartPr>
+              <p14:cNvPr id="8" name="Ink 7">
+                <a:extLst>
+                  <a:ext uri="{FF2B5EF4-FFF2-40B4-BE49-F238E27FC236}">
+                    <a16:creationId xmlns:a16="http://schemas.microsoft.com/office/drawing/2014/main" id="{20582250-1FE1-A030-8F53-A1DD6C1DFDAD}"/>
+                  </a:ext>
+                </a:extLst>
+              </p14:cNvPr>
+              <p14:cNvContentPartPr/>
+              <p14:nvPr/>
+            </p14:nvContentPartPr>
+            <p14:xfrm>
+              <a:off x="2394024" y="1900753"/>
+              <a:ext cx="270" cy="270"/>
+            </p14:xfrm>
+          </p:contentPart>
+        </mc:Choice>
+        <mc:Fallback xmlns="">
+          <p:pic>
+            <p:nvPicPr>
+              <p:cNvPr id="8" name="Ink 7">
+                <a:extLst>
+                  <a:ext uri="{FF2B5EF4-FFF2-40B4-BE49-F238E27FC236}">
+                    <a16:creationId xmlns:a16="http://schemas.microsoft.com/office/drawing/2014/main" id="{BF9B16F1-26FB-0E56-FA0A-E1AE729E92E6}"/>
+                  </a:ext>
+                </a:extLst>
+              </p:cNvPr>
+              <p:cNvPicPr/>
+              <p:nvPr/>
+            </p:nvPicPr>
+            <p:blipFill>
+              <a:blip r:embed="rId4"/>
+              <a:stretch>
+                <a:fillRect/>
+              </a:stretch>
+            </p:blipFill>
+            <p:spPr>
+              <a:xfrm>
+                <a:off x="2387274" y="1894003"/>
+                <a:ext cx="13500" cy="13500"/>
+              </a:xfrm>
+              <a:prstGeom prst="rect">
+                <a:avLst/>
+              </a:prstGeom>
+            </p:spPr>
+          </p:pic>
+        </mc:Fallback>
+      </mc:AlternateContent>
+      <mc:AlternateContent xmlns:mc="http://schemas.openxmlformats.org/markup-compatibility/2006" xmlns:p14="http://schemas.microsoft.com/office/powerpoint/2010/main">
+        <mc:Choice Requires="p14">
+          <p:contentPart p14:bwMode="auto" r:id="rId5">
+            <p14:nvContentPartPr>
+              <p14:cNvPr id="9" name="Ink 8">
+                <a:extLst>
+                  <a:ext uri="{FF2B5EF4-FFF2-40B4-BE49-F238E27FC236}">
+                    <a16:creationId xmlns:a16="http://schemas.microsoft.com/office/drawing/2014/main" id="{2CA5184B-A4D6-E349-D4DA-85B4DAB3B93E}"/>
+                  </a:ext>
+                </a:extLst>
+              </p14:cNvPr>
+              <p14:cNvContentPartPr/>
+              <p14:nvPr/>
+            </p14:nvContentPartPr>
+            <p14:xfrm>
+              <a:off x="1142574" y="1551373"/>
+              <a:ext cx="270" cy="270"/>
+            </p14:xfrm>
+          </p:contentPart>
+        </mc:Choice>
+        <mc:Fallback xmlns="">
+          <p:pic>
+            <p:nvPicPr>
+              <p:cNvPr id="9" name="Ink 8">
+                <a:extLst>
+                  <a:ext uri="{FF2B5EF4-FFF2-40B4-BE49-F238E27FC236}">
+                    <a16:creationId xmlns:a16="http://schemas.microsoft.com/office/drawing/2014/main" id="{BC90F249-0F8D-8A72-C826-5B5928532520}"/>
+                  </a:ext>
+                </a:extLst>
+              </p:cNvPr>
+              <p:cNvPicPr/>
+              <p:nvPr/>
+            </p:nvPicPr>
+            <p:blipFill>
+              <a:blip r:embed="rId4"/>
+              <a:stretch>
+                <a:fillRect/>
+              </a:stretch>
+            </p:blipFill>
+            <p:spPr>
+              <a:xfrm>
+                <a:off x="1135824" y="1544623"/>
+                <a:ext cx="13500" cy="13500"/>
+              </a:xfrm>
+              <a:prstGeom prst="rect">
+                <a:avLst/>
+              </a:prstGeom>
+            </p:spPr>
+          </p:pic>
+        </mc:Fallback>
+      </mc:AlternateContent>
+      <p:sp>
+        <p:nvSpPr>
+          <p:cNvPr id="12" name="AutoShape 4">
+            <a:extLst>
+              <a:ext uri="{FF2B5EF4-FFF2-40B4-BE49-F238E27FC236}">
+                <a16:creationId xmlns:a16="http://schemas.microsoft.com/office/drawing/2014/main" id="{E2CA02C3-E449-5C3E-4965-31666DC88D64}"/>
+              </a:ext>
+            </a:extLst>
+          </p:cNvPr>
+          <p:cNvSpPr>
+            <a:spLocks noChangeAspect="1" noChangeArrowheads="1"/>
+          </p:cNvSpPr>
+          <p:nvPr/>
+        </p:nvSpPr>
+        <p:spPr bwMode="auto">
+          <a:xfrm>
+            <a:off x="3239691" y="1325166"/>
+            <a:ext cx="2664619" cy="2493169"/>
+          </a:xfrm>
+          <a:prstGeom prst="rect">
+            <a:avLst/>
+          </a:prstGeom>
+          <a:noFill/>
+          <a:extLst>
+            <a:ext uri="{909E8E84-426E-40DD-AFC4-6F175D3DCCD1}">
+              <a14:hiddenFill xmlns:a14="http://schemas.microsoft.com/office/drawing/2010/main">
+                <a:solidFill>
+                  <a:srgbClr val="FFFFFF"/>
+                </a:solidFill>
+              </a14:hiddenFill>
+            </a:ext>
+          </a:extLst>
+        </p:spPr>
+        <p:txBody>
+          <a:bodyPr vert="horz" wrap="square" lIns="68580" tIns="34290" rIns="68580" bIns="34290" numCol="1" anchor="t" anchorCtr="0" compatLnSpc="1">
+            <a:prstTxWarp prst="textNoShape">
+              <a:avLst/>
+            </a:prstTxWarp>
+          </a:bodyPr>
+          <a:lstStyle/>
+          <a:p>
+            <a:endParaRPr lang="en-US" sz="1050"/>
+          </a:p>
+        </p:txBody>
+      </p:sp>
+      <p:pic>
+        <p:nvPicPr>
+          <p:cNvPr id="5" name="Picture 4">
+            <a:extLst>
+              <a:ext uri="{FF2B5EF4-FFF2-40B4-BE49-F238E27FC236}">
+                <a16:creationId xmlns:a16="http://schemas.microsoft.com/office/drawing/2014/main" id="{DD8101C4-61B5-B86D-2A93-BCAF5BD00D59}"/>
+              </a:ext>
+            </a:extLst>
+          </p:cNvPr>
+          <p:cNvPicPr>
+            <a:picLocks noChangeAspect="1"/>
+          </p:cNvPicPr>
+          <p:nvPr/>
+        </p:nvPicPr>
+        <p:blipFill>
+          <a:blip r:embed="rId6"/>
+          <a:stretch>
+            <a:fillRect/>
+          </a:stretch>
+        </p:blipFill>
+        <p:spPr>
+          <a:xfrm>
+            <a:off x="5597871" y="13171"/>
+            <a:ext cx="3454309" cy="1677994"/>
+          </a:xfrm>
+          <a:prstGeom prst="rect">
+            <a:avLst/>
+          </a:prstGeom>
+        </p:spPr>
+      </p:pic>
+      <p:sp>
+        <p:nvSpPr>
+          <p:cNvPr id="7" name="Slide Number Placeholder 6">
+            <a:extLst>
+              <a:ext uri="{FF2B5EF4-FFF2-40B4-BE49-F238E27FC236}">
+                <a16:creationId xmlns:a16="http://schemas.microsoft.com/office/drawing/2014/main" id="{68321D6F-7DBC-A0D3-6A41-32ADD56AE932}"/>
+              </a:ext>
+            </a:extLst>
+          </p:cNvPr>
+          <p:cNvSpPr>
+            <a:spLocks noGrp="1"/>
+          </p:cNvSpPr>
+          <p:nvPr>
+            <p:ph type="sldNum" sz="quarter" idx="4"/>
+          </p:nvPr>
+        </p:nvSpPr>
+        <p:spPr/>
+        <p:txBody>
+          <a:bodyPr/>
+          <a:lstStyle/>
+          <a:p>
+            <a:fld id="{C4204591-24BD-A542-B9D5-F8D8A88D2FEE}" type="slidenum">
+              <a:rPr lang="en-US" smtClean="0"/>
+              <a:pPr/>
+              <a:t>13</a:t>
+            </a:fld>
+            <a:endParaRPr lang="en-US" dirty="0"/>
+          </a:p>
+        </p:txBody>
+      </p:sp>
+    </p:spTree>
+    <p:extLst>
+      <p:ext uri="{BB962C8B-B14F-4D97-AF65-F5344CB8AC3E}">
+        <p14:creationId xmlns:p14="http://schemas.microsoft.com/office/powerpoint/2010/main" val="4059797061"/>
+      </p:ext>
+    </p:extLst>
+  </p:cSld>
+  <p:clrMapOvr>
+    <a:masterClrMapping/>
+  </p:clrMapOvr>
+</p:sld>
+</file>
+
+<file path=ppt/slides/slide14.xml><?xml version="1.0" encoding="utf-8"?>
+<p:sld xmlns:a="http://schemas.openxmlformats.org/drawingml/2006/main" xmlns:r="http://schemas.openxmlformats.org/officeDocument/2006/relationships" xmlns:p="http://schemas.openxmlformats.org/presentationml/2006/main">
+  <p:cSld>
+    <p:spTree>
+      <p:nvGrpSpPr>
+        <p:cNvPr id="1" name="">
+          <a:extLst>
+            <a:ext uri="{FF2B5EF4-FFF2-40B4-BE49-F238E27FC236}">
+              <a16:creationId xmlns:a16="http://schemas.microsoft.com/office/drawing/2014/main" id="{AAA3AA6A-0DAF-49FA-AEF3-2135181B85D8}"/>
+            </a:ext>
+          </a:extLst>
+        </p:cNvPr>
+        <p:cNvGrpSpPr/>
+        <p:nvPr/>
+      </p:nvGrpSpPr>
+      <p:grpSpPr>
+        <a:xfrm>
+          <a:off x="0" y="0"/>
+          <a:ext cx="0" cy="0"/>
+          <a:chOff x="0" y="0"/>
+          <a:chExt cx="0" cy="0"/>
+        </a:xfrm>
+      </p:grpSpPr>
+      <p:sp>
+        <p:nvSpPr>
+          <p:cNvPr id="2" name="Title 1">
+            <a:extLst>
+              <a:ext uri="{FF2B5EF4-FFF2-40B4-BE49-F238E27FC236}">
+                <a16:creationId xmlns:a16="http://schemas.microsoft.com/office/drawing/2014/main" id="{61F00D06-4459-E1AF-4433-EB7EB451761C}"/>
+              </a:ext>
+            </a:extLst>
+          </p:cNvPr>
+          <p:cNvSpPr>
+            <a:spLocks noGrp="1"/>
+          </p:cNvSpPr>
+          <p:nvPr>
+            <p:ph type="title"/>
+          </p:nvPr>
+        </p:nvSpPr>
+        <p:spPr>
+          <a:xfrm>
+            <a:off x="505325" y="338866"/>
+            <a:ext cx="4963821" cy="670967"/>
+          </a:xfrm>
+        </p:spPr>
+        <p:txBody>
+          <a:bodyPr>
+            <a:normAutofit fontScale="90000"/>
+          </a:bodyPr>
+          <a:lstStyle/>
+          <a:p>
+            <a:r>
+              <a:rPr lang="en-US" dirty="0"/>
+              <a:t>Q5.1 Pipe Diagram ANS</a:t>
+            </a:r>
+          </a:p>
+        </p:txBody>
+      </p:sp>
+      <p:sp>
+        <p:nvSpPr>
+          <p:cNvPr id="3" name="Content Placeholder 2">
+            <a:extLst>
+              <a:ext uri="{FF2B5EF4-FFF2-40B4-BE49-F238E27FC236}">
+                <a16:creationId xmlns:a16="http://schemas.microsoft.com/office/drawing/2014/main" id="{BCD90292-74C8-9145-40C4-220F2EBBDB5A}"/>
+              </a:ext>
+            </a:extLst>
+          </p:cNvPr>
+          <p:cNvSpPr>
+            <a:spLocks noGrp="1"/>
+          </p:cNvSpPr>
+          <p:nvPr>
+            <p:ph sz="half" idx="1"/>
+          </p:nvPr>
+        </p:nvSpPr>
+        <p:spPr>
+          <a:xfrm>
+            <a:off x="91820" y="1325166"/>
+            <a:ext cx="8724376" cy="3712660"/>
+          </a:xfrm>
+        </p:spPr>
+        <p:txBody>
+          <a:bodyPr>
+            <a:normAutofit fontScale="62500" lnSpcReduction="20000"/>
+          </a:bodyPr>
+          <a:lstStyle/>
+          <a:p>
+            <a:r>
+              <a:rPr lang="en-US" sz="1600" dirty="0"/>
+              <a:t>1) What is the size of this packet?</a:t>
+            </a:r>
+          </a:p>
+          <a:p>
+            <a:r>
+              <a:rPr lang="en-US" sz="1600" dirty="0"/>
+              <a:t>ANS: </a:t>
+            </a:r>
+            <a:r>
+              <a:rPr lang="en-US" sz="1600" dirty="0" err="1"/>
+              <a:t>xy</a:t>
+            </a:r>
+            <a:r>
+              <a:rPr lang="en-US" sz="1600" dirty="0"/>
+              <a:t>. 𝑥 is the transmission delay (time it takes to transmit the packet).𝑦 is the bandwidth of the link, i.e. how many bytes can be sent per second. Multiplying 𝑥 (seconds) and 𝑦 (bytes/second) gives the overall size of this packet.</a:t>
+            </a:r>
+          </a:p>
+          <a:p>
+            <a:r>
+              <a:rPr lang="en-US" sz="1600" dirty="0"/>
+              <a:t>2) How long does it take to send a packet of the same size as the packet shown?(Count from the time the first byte is sent, to the time the last byte is received.)</a:t>
+            </a:r>
+          </a:p>
+          <a:p>
+            <a:r>
+              <a:rPr lang="en-US" sz="1600" dirty="0"/>
+              <a:t>ANS: 𝑥 + 𝑧. 𝑥 is the transmission delay (time it takes to transmit the packet). 𝑧 is the propagation delay.</a:t>
+            </a:r>
+          </a:p>
+          <a:p>
+            <a:r>
+              <a:rPr lang="en-US" sz="1600" dirty="0"/>
+              <a:t>3) How long does it take to send 7 packets, all of the same size as the packet shown?(Count from the time the first byte of the first packet is sent, to the time the last byte of the last packet is received.)</a:t>
+            </a:r>
+          </a:p>
+          <a:p>
+            <a:r>
+              <a:rPr lang="en-US" sz="1600" dirty="0"/>
+              <a:t>ANS: 7𝑥 + 𝑧. 𝑥 is the transmission delay, so it takes 7𝑥 seconds to transmit all 7 packets. 𝑧 is the propagation delay.</a:t>
+            </a:r>
+          </a:p>
+          <a:p>
+            <a:r>
+              <a:rPr lang="en-US" sz="1600" dirty="0"/>
+              <a:t>4) What is the maximum number of packets that could be in the process of being sent along this link, at any given </a:t>
+            </a:r>
+            <a:r>
+              <a:rPr lang="en-US" sz="1600" dirty="0" err="1"/>
+              <a:t>moment?Don’t</a:t>
+            </a:r>
+            <a:r>
+              <a:rPr lang="en-US" sz="1600" dirty="0"/>
+              <a:t> worry about fractions and rounding (e.g. assume 𝑥, 𝑦, and 𝑧 are defined such that all answer choices are integers).</a:t>
+            </a:r>
+          </a:p>
+          <a:p>
+            <a:r>
+              <a:rPr lang="en-US" sz="1600" dirty="0"/>
+              <a:t>ANS: z/x. 𝑥 is the transmission delay, 𝑧 is the propagation delay. The maximum number of packets that can be in flight therefore is 𝑧/𝑥 .</a:t>
+            </a:r>
+          </a:p>
+          <a:p>
+            <a:r>
+              <a:rPr lang="en-US" sz="1600" dirty="0"/>
+              <a:t>5) In this subpart, suppose R1 has 1 other packet in its queue when A sends the packet. How long does it take to send a single packet from A to B?</a:t>
+            </a:r>
+          </a:p>
+          <a:p>
+            <a:r>
+              <a:rPr lang="en-US" sz="1600" dirty="0"/>
+              <a:t>6) In this subpart, suppose R1 has 20 other packets in its queue when A sends the </a:t>
+            </a:r>
+            <a:r>
+              <a:rPr lang="en-US" sz="1600" dirty="0" err="1"/>
+              <a:t>packet.How</a:t>
+            </a:r>
+            <a:r>
+              <a:rPr lang="en-US" sz="1600" dirty="0"/>
+              <a:t> long does it take to send a single packet from A to B? Assume that the queue at R1 is </a:t>
+            </a:r>
+            <a:r>
+              <a:rPr lang="en-US" sz="1600" dirty="0" err="1"/>
+              <a:t>notempty</a:t>
+            </a:r>
+            <a:r>
+              <a:rPr lang="en-US" sz="1600" dirty="0"/>
+              <a:t> when this packet arrives at R1.</a:t>
+            </a:r>
+          </a:p>
+          <a:p>
+            <a:r>
+              <a:rPr lang="en-US" sz="1600" dirty="0"/>
+              <a:t>7) What is the maximum number of packets that can be queued at R1, such that when </a:t>
+            </a:r>
+            <a:r>
+              <a:rPr lang="en-US" sz="1600" dirty="0" err="1"/>
+              <a:t>thelast</a:t>
+            </a:r>
+            <a:r>
+              <a:rPr lang="en-US" sz="1600" dirty="0"/>
+              <a:t> byte of the A-to-B packet reaches R1, there is no queue at R1?Don’t worry about fractions and rounding (e.g. assume 𝑥, 𝑦, and 𝑧 are defined such that all </a:t>
+            </a:r>
+            <a:r>
+              <a:rPr lang="en-US" sz="1600" dirty="0" err="1"/>
+              <a:t>answerchoices</a:t>
+            </a:r>
+            <a:r>
+              <a:rPr lang="en-US" sz="1600" dirty="0"/>
+              <a:t> are integers).</a:t>
+            </a:r>
+          </a:p>
+          <a:p>
+            <a:endParaRPr lang="en-US" sz="1600" dirty="0"/>
+          </a:p>
+        </p:txBody>
+      </p:sp>
+      <mc:AlternateContent xmlns:mc="http://schemas.openxmlformats.org/markup-compatibility/2006" xmlns:p14="http://schemas.microsoft.com/office/powerpoint/2010/main">
+        <mc:Choice Requires="p14">
+          <p:contentPart p14:bwMode="auto" r:id="rId2">
+            <p14:nvContentPartPr>
+              <p14:cNvPr id="8" name="Ink 7">
+                <a:extLst>
+                  <a:ext uri="{FF2B5EF4-FFF2-40B4-BE49-F238E27FC236}">
+                    <a16:creationId xmlns:a16="http://schemas.microsoft.com/office/drawing/2014/main" id="{C29E84F0-1C66-0867-6234-61AE2CAA9C09}"/>
+                  </a:ext>
+                </a:extLst>
+              </p14:cNvPr>
+              <p14:cNvContentPartPr/>
+              <p14:nvPr/>
+            </p14:nvContentPartPr>
+            <p14:xfrm>
+              <a:off x="2394024" y="1900753"/>
+              <a:ext cx="270" cy="270"/>
+            </p14:xfrm>
+          </p:contentPart>
+        </mc:Choice>
+        <mc:Fallback xmlns="">
+          <p:pic>
+            <p:nvPicPr>
+              <p:cNvPr id="8" name="Ink 7">
+                <a:extLst>
+                  <a:ext uri="{FF2B5EF4-FFF2-40B4-BE49-F238E27FC236}">
+                    <a16:creationId xmlns:a16="http://schemas.microsoft.com/office/drawing/2014/main" id="{BF9B16F1-26FB-0E56-FA0A-E1AE729E92E6}"/>
+                  </a:ext>
+                </a:extLst>
+              </p:cNvPr>
+              <p:cNvPicPr/>
+              <p:nvPr/>
+            </p:nvPicPr>
+            <p:blipFill>
+              <a:blip r:embed="rId4"/>
+              <a:stretch>
+                <a:fillRect/>
+              </a:stretch>
+            </p:blipFill>
+            <p:spPr>
+              <a:xfrm>
+                <a:off x="2387274" y="1894003"/>
+                <a:ext cx="13500" cy="13500"/>
+              </a:xfrm>
+              <a:prstGeom prst="rect">
+                <a:avLst/>
+              </a:prstGeom>
+            </p:spPr>
+          </p:pic>
+        </mc:Fallback>
+      </mc:AlternateContent>
+      <mc:AlternateContent xmlns:mc="http://schemas.openxmlformats.org/markup-compatibility/2006" xmlns:p14="http://schemas.microsoft.com/office/powerpoint/2010/main">
+        <mc:Choice Requires="p14">
+          <p:contentPart p14:bwMode="auto" r:id="rId5">
+            <p14:nvContentPartPr>
+              <p14:cNvPr id="9" name="Ink 8">
+                <a:extLst>
+                  <a:ext uri="{FF2B5EF4-FFF2-40B4-BE49-F238E27FC236}">
+                    <a16:creationId xmlns:a16="http://schemas.microsoft.com/office/drawing/2014/main" id="{D33B8011-865F-3015-47F9-3B15D7A82DB9}"/>
+                  </a:ext>
+                </a:extLst>
+              </p14:cNvPr>
+              <p14:cNvContentPartPr/>
+              <p14:nvPr/>
+            </p14:nvContentPartPr>
+            <p14:xfrm>
+              <a:off x="1142574" y="1551373"/>
+              <a:ext cx="270" cy="270"/>
+            </p14:xfrm>
+          </p:contentPart>
+        </mc:Choice>
+        <mc:Fallback xmlns="">
+          <p:pic>
+            <p:nvPicPr>
+              <p:cNvPr id="9" name="Ink 8">
+                <a:extLst>
+                  <a:ext uri="{FF2B5EF4-FFF2-40B4-BE49-F238E27FC236}">
+                    <a16:creationId xmlns:a16="http://schemas.microsoft.com/office/drawing/2014/main" id="{BC90F249-0F8D-8A72-C826-5B5928532520}"/>
+                  </a:ext>
+                </a:extLst>
+              </p:cNvPr>
+              <p:cNvPicPr/>
+              <p:nvPr/>
+            </p:nvPicPr>
+            <p:blipFill>
+              <a:blip r:embed="rId4"/>
+              <a:stretch>
+                <a:fillRect/>
+              </a:stretch>
+            </p:blipFill>
+            <p:spPr>
+              <a:xfrm>
+                <a:off x="1135824" y="1544623"/>
+                <a:ext cx="13500" cy="13500"/>
+              </a:xfrm>
+              <a:prstGeom prst="rect">
+                <a:avLst/>
+              </a:prstGeom>
+            </p:spPr>
+          </p:pic>
+        </mc:Fallback>
+      </mc:AlternateContent>
+      <p:sp>
+        <p:nvSpPr>
+          <p:cNvPr id="12" name="AutoShape 4">
+            <a:extLst>
+              <a:ext uri="{FF2B5EF4-FFF2-40B4-BE49-F238E27FC236}">
+                <a16:creationId xmlns:a16="http://schemas.microsoft.com/office/drawing/2014/main" id="{65F84396-2BBE-BDAF-70BE-A0B6169F11C9}"/>
+              </a:ext>
+            </a:extLst>
+          </p:cNvPr>
+          <p:cNvSpPr>
+            <a:spLocks noChangeAspect="1" noChangeArrowheads="1"/>
+          </p:cNvSpPr>
+          <p:nvPr/>
+        </p:nvSpPr>
+        <p:spPr bwMode="auto">
+          <a:xfrm>
+            <a:off x="3239691" y="1325166"/>
+            <a:ext cx="2664619" cy="2493169"/>
+          </a:xfrm>
+          <a:prstGeom prst="rect">
+            <a:avLst/>
+          </a:prstGeom>
+          <a:noFill/>
+          <a:extLst>
+            <a:ext uri="{909E8E84-426E-40DD-AFC4-6F175D3DCCD1}">
+              <a14:hiddenFill xmlns:a14="http://schemas.microsoft.com/office/drawing/2010/main">
+                <a:solidFill>
+                  <a:srgbClr val="FFFFFF"/>
+                </a:solidFill>
+              </a14:hiddenFill>
+            </a:ext>
+          </a:extLst>
+        </p:spPr>
+        <p:txBody>
+          <a:bodyPr vert="horz" wrap="square" lIns="68580" tIns="34290" rIns="68580" bIns="34290" numCol="1" anchor="t" anchorCtr="0" compatLnSpc="1">
+            <a:prstTxWarp prst="textNoShape">
+              <a:avLst/>
+            </a:prstTxWarp>
+          </a:bodyPr>
+          <a:lstStyle/>
+          <a:p>
+            <a:endParaRPr lang="en-US" sz="1050"/>
+          </a:p>
+        </p:txBody>
+      </p:sp>
+      <p:pic>
+        <p:nvPicPr>
+          <p:cNvPr id="5" name="Picture 4">
+            <a:extLst>
+              <a:ext uri="{FF2B5EF4-FFF2-40B4-BE49-F238E27FC236}">
+                <a16:creationId xmlns:a16="http://schemas.microsoft.com/office/drawing/2014/main" id="{82263838-146D-C20D-CD01-6B1CDBC1F761}"/>
+              </a:ext>
+            </a:extLst>
+          </p:cNvPr>
+          <p:cNvPicPr>
+            <a:picLocks noChangeAspect="1"/>
+          </p:cNvPicPr>
+          <p:nvPr/>
+        </p:nvPicPr>
+        <p:blipFill>
+          <a:blip r:embed="rId6"/>
+          <a:stretch>
+            <a:fillRect/>
+          </a:stretch>
+        </p:blipFill>
+        <p:spPr>
+          <a:xfrm>
+            <a:off x="5597871" y="0"/>
+            <a:ext cx="3454309" cy="1677994"/>
+          </a:xfrm>
+          <a:prstGeom prst="rect">
+            <a:avLst/>
+          </a:prstGeom>
+        </p:spPr>
+      </p:pic>
+      <p:sp>
+        <p:nvSpPr>
+          <p:cNvPr id="4" name="Slide Number Placeholder 3">
+            <a:extLst>
+              <a:ext uri="{FF2B5EF4-FFF2-40B4-BE49-F238E27FC236}">
+                <a16:creationId xmlns:a16="http://schemas.microsoft.com/office/drawing/2014/main" id="{3E3B44F2-E25A-65A2-310D-8E088BB7FBA5}"/>
+              </a:ext>
+            </a:extLst>
+          </p:cNvPr>
+          <p:cNvSpPr>
+            <a:spLocks noGrp="1"/>
+          </p:cNvSpPr>
+          <p:nvPr>
+            <p:ph type="sldNum" sz="quarter" idx="4"/>
+          </p:nvPr>
+        </p:nvSpPr>
+        <p:spPr/>
+        <p:txBody>
+          <a:bodyPr/>
+          <a:lstStyle/>
+          <a:p>
+            <a:fld id="{C4204591-24BD-A542-B9D5-F8D8A88D2FEE}" type="slidenum">
+              <a:rPr lang="en-US" smtClean="0"/>
+              <a:pPr/>
+              <a:t>14</a:t>
+            </a:fld>
+            <a:endParaRPr lang="en-US" dirty="0"/>
+          </a:p>
+        </p:txBody>
+      </p:sp>
+    </p:spTree>
+    <p:extLst>
+      <p:ext uri="{BB962C8B-B14F-4D97-AF65-F5344CB8AC3E}">
+        <p14:creationId xmlns:p14="http://schemas.microsoft.com/office/powerpoint/2010/main" val="661331575"/>
+      </p:ext>
+    </p:extLst>
+  </p:cSld>
+  <p:clrMapOvr>
+    <a:masterClrMapping/>
+  </p:clrMapOvr>
+</p:sld>
+</file>
+
+<file path=ppt/slides/slide15.xml><?xml version="1.0" encoding="utf-8"?>
+<p:sld xmlns:a="http://schemas.openxmlformats.org/drawingml/2006/main" xmlns:r="http://schemas.openxmlformats.org/officeDocument/2006/relationships" xmlns:p="http://schemas.openxmlformats.org/presentationml/2006/main">
+  <p:cSld>
+    <p:spTree>
+      <p:nvGrpSpPr>
+        <p:cNvPr id="1" name="">
+          <a:extLst>
+            <a:ext uri="{FF2B5EF4-FFF2-40B4-BE49-F238E27FC236}">
+              <a16:creationId xmlns:a16="http://schemas.microsoft.com/office/drawing/2014/main" id="{4A6FC1CA-B981-28A8-2E05-9BA2F35B3C3D}"/>
+            </a:ext>
+          </a:extLst>
+        </p:cNvPr>
+        <p:cNvGrpSpPr/>
+        <p:nvPr/>
+      </p:nvGrpSpPr>
+      <p:grpSpPr>
+        <a:xfrm>
+          <a:off x="0" y="0"/>
+          <a:ext cx="0" cy="0"/>
+          <a:chOff x="0" y="0"/>
+          <a:chExt cx="0" cy="0"/>
+        </a:xfrm>
+      </p:grpSpPr>
+      <p:sp>
+        <p:nvSpPr>
+          <p:cNvPr id="2" name="Title 1">
+            <a:extLst>
+              <a:ext uri="{FF2B5EF4-FFF2-40B4-BE49-F238E27FC236}">
+                <a16:creationId xmlns:a16="http://schemas.microsoft.com/office/drawing/2014/main" id="{21CF0434-D174-6BE2-1629-31C6E6E7EF45}"/>
+              </a:ext>
+            </a:extLst>
+          </p:cNvPr>
+          <p:cNvSpPr>
+            <a:spLocks noGrp="1"/>
+          </p:cNvSpPr>
+          <p:nvPr>
+            <p:ph type="title"/>
+          </p:nvPr>
+        </p:nvSpPr>
+        <p:spPr>
+          <a:xfrm>
+            <a:off x="505326" y="338866"/>
+            <a:ext cx="4247148" cy="670967"/>
+          </a:xfrm>
+        </p:spPr>
+        <p:txBody>
+          <a:bodyPr>
+            <a:normAutofit fontScale="90000"/>
+          </a:bodyPr>
+          <a:lstStyle/>
+          <a:p>
+            <a:r>
+              <a:rPr lang="en-US" dirty="0"/>
+              <a:t>Q5.2 Pipe Diagram</a:t>
+            </a:r>
+          </a:p>
+        </p:txBody>
+      </p:sp>
+      <p:sp>
+        <p:nvSpPr>
+          <p:cNvPr id="3" name="Content Placeholder 2">
+            <a:extLst>
+              <a:ext uri="{FF2B5EF4-FFF2-40B4-BE49-F238E27FC236}">
+                <a16:creationId xmlns:a16="http://schemas.microsoft.com/office/drawing/2014/main" id="{074BA215-8363-02BC-EBDF-A16B8D17B68B}"/>
+              </a:ext>
+            </a:extLst>
+          </p:cNvPr>
+          <p:cNvSpPr>
+            <a:spLocks noGrp="1"/>
+          </p:cNvSpPr>
+          <p:nvPr>
+            <p:ph sz="half" idx="1"/>
+          </p:nvPr>
+        </p:nvSpPr>
+        <p:spPr>
+          <a:xfrm>
+            <a:off x="91820" y="1325166"/>
+            <a:ext cx="8724376" cy="3818334"/>
+          </a:xfrm>
+        </p:spPr>
+        <p:txBody>
+          <a:bodyPr>
+            <a:normAutofit fontScale="85000" lnSpcReduction="20000"/>
+          </a:bodyPr>
+          <a:lstStyle/>
+          <a:p>
+            <a:r>
+              <a:rPr lang="en-US" sz="1600" dirty="0"/>
+              <a:t>Now, consider the network topology with a Router R1, which has an infinite-size queue, and R1 continually processes packets in its queue in FIFO order. R1 can only start transmitting a packet once it has received the entire packet. All packets are the same size as the packet shown in the diagram in Q5.1. A wants to send a packet to B. No other packets are being sent along the links (i.e. suppose the packet in the diagram is not there).In the next two subparts, select how long it takes to send the packet from A to B. Count from the time the first byte of the packet is sent at A, to the time the last byte of the packet is received at B.</a:t>
+            </a:r>
+          </a:p>
+          <a:p>
+            <a:r>
+              <a:rPr lang="en-US" sz="1600" dirty="0"/>
+              <a:t>5) In this subpart, suppose R1 has 1 other packet in its queue when A sends the packet. How long does it take to send a single packet from A to B?</a:t>
+            </a:r>
+          </a:p>
+          <a:p>
+            <a:r>
+              <a:rPr lang="en-US" sz="1600" dirty="0"/>
+              <a:t>6) In this subpart, suppose R1 has 20 other packets in its queue when A sends the packet. How long does it take to send a single packet from A to B? Assume that the queue at R1 is </a:t>
+            </a:r>
+            <a:r>
+              <a:rPr lang="en-US" sz="1600" dirty="0" err="1"/>
+              <a:t>notempty</a:t>
+            </a:r>
+            <a:r>
+              <a:rPr lang="en-US" sz="1600" dirty="0"/>
+              <a:t> when this packet arrives at R1.</a:t>
+            </a:r>
+          </a:p>
+          <a:p>
+            <a:r>
+              <a:rPr lang="en-US" sz="1600" dirty="0"/>
+              <a:t>7) What is the maximum number of packets that can be queued at R1, such that when </a:t>
+            </a:r>
+            <a:r>
+              <a:rPr lang="en-US" sz="1600" dirty="0" err="1"/>
+              <a:t>thelast</a:t>
+            </a:r>
+            <a:r>
+              <a:rPr lang="en-US" sz="1600" dirty="0"/>
+              <a:t> byte of the A-to-B packet reaches R1, there is no queue at R1? Don’t worry about fractions and rounding (e.g. assume 𝑥, 𝑦, and 𝑧 are defined such that all results of division are integers.)</a:t>
+            </a:r>
+          </a:p>
+        </p:txBody>
+      </p:sp>
+      <mc:AlternateContent xmlns:mc="http://schemas.openxmlformats.org/markup-compatibility/2006" xmlns:p14="http://schemas.microsoft.com/office/powerpoint/2010/main">
+        <mc:Choice Requires="p14">
+          <p:contentPart p14:bwMode="auto" r:id="rId2">
+            <p14:nvContentPartPr>
+              <p14:cNvPr id="8" name="Ink 7">
+                <a:extLst>
+                  <a:ext uri="{FF2B5EF4-FFF2-40B4-BE49-F238E27FC236}">
+                    <a16:creationId xmlns:a16="http://schemas.microsoft.com/office/drawing/2014/main" id="{ADF47A1A-67F9-FA82-2128-14A0A3324D20}"/>
+                  </a:ext>
+                </a:extLst>
+              </p14:cNvPr>
+              <p14:cNvContentPartPr/>
+              <p14:nvPr/>
+            </p14:nvContentPartPr>
+            <p14:xfrm>
+              <a:off x="2394024" y="1900753"/>
+              <a:ext cx="270" cy="270"/>
+            </p14:xfrm>
+          </p:contentPart>
+        </mc:Choice>
+        <mc:Fallback xmlns="">
+          <p:pic>
+            <p:nvPicPr>
+              <p:cNvPr id="8" name="Ink 7">
+                <a:extLst>
+                  <a:ext uri="{FF2B5EF4-FFF2-40B4-BE49-F238E27FC236}">
+                    <a16:creationId xmlns:a16="http://schemas.microsoft.com/office/drawing/2014/main" id="{BF9B16F1-26FB-0E56-FA0A-E1AE729E92E6}"/>
+                  </a:ext>
+                </a:extLst>
+              </p:cNvPr>
+              <p:cNvPicPr/>
+              <p:nvPr/>
+            </p:nvPicPr>
+            <p:blipFill>
+              <a:blip r:embed="rId4"/>
+              <a:stretch>
+                <a:fillRect/>
+              </a:stretch>
+            </p:blipFill>
+            <p:spPr>
+              <a:xfrm>
+                <a:off x="2387274" y="1894003"/>
+                <a:ext cx="13500" cy="13500"/>
+              </a:xfrm>
+              <a:prstGeom prst="rect">
+                <a:avLst/>
+              </a:prstGeom>
+            </p:spPr>
+          </p:pic>
+        </mc:Fallback>
+      </mc:AlternateContent>
+      <mc:AlternateContent xmlns:mc="http://schemas.openxmlformats.org/markup-compatibility/2006" xmlns:p14="http://schemas.microsoft.com/office/powerpoint/2010/main">
+        <mc:Choice Requires="p14">
+          <p:contentPart p14:bwMode="auto" r:id="rId5">
+            <p14:nvContentPartPr>
+              <p14:cNvPr id="9" name="Ink 8">
+                <a:extLst>
+                  <a:ext uri="{FF2B5EF4-FFF2-40B4-BE49-F238E27FC236}">
+                    <a16:creationId xmlns:a16="http://schemas.microsoft.com/office/drawing/2014/main" id="{895B8589-CF8A-2B0E-B79C-03F5F041FC97}"/>
+                  </a:ext>
+                </a:extLst>
+              </p14:cNvPr>
+              <p14:cNvContentPartPr/>
+              <p14:nvPr/>
+            </p14:nvContentPartPr>
+            <p14:xfrm>
+              <a:off x="1142574" y="1551373"/>
+              <a:ext cx="270" cy="270"/>
+            </p14:xfrm>
+          </p:contentPart>
+        </mc:Choice>
+        <mc:Fallback xmlns="">
+          <p:pic>
+            <p:nvPicPr>
+              <p:cNvPr id="9" name="Ink 8">
+                <a:extLst>
+                  <a:ext uri="{FF2B5EF4-FFF2-40B4-BE49-F238E27FC236}">
+                    <a16:creationId xmlns:a16="http://schemas.microsoft.com/office/drawing/2014/main" id="{BC90F249-0F8D-8A72-C826-5B5928532520}"/>
+                  </a:ext>
+                </a:extLst>
+              </p:cNvPr>
+              <p:cNvPicPr/>
+              <p:nvPr/>
+            </p:nvPicPr>
+            <p:blipFill>
+              <a:blip r:embed="rId4"/>
+              <a:stretch>
+                <a:fillRect/>
+              </a:stretch>
+            </p:blipFill>
+            <p:spPr>
+              <a:xfrm>
+                <a:off x="1135824" y="1544623"/>
+                <a:ext cx="13500" cy="13500"/>
+              </a:xfrm>
+              <a:prstGeom prst="rect">
+                <a:avLst/>
+              </a:prstGeom>
+            </p:spPr>
+          </p:pic>
+        </mc:Fallback>
+      </mc:AlternateContent>
+      <p:sp>
+        <p:nvSpPr>
+          <p:cNvPr id="12" name="AutoShape 4">
+            <a:extLst>
+              <a:ext uri="{FF2B5EF4-FFF2-40B4-BE49-F238E27FC236}">
+                <a16:creationId xmlns:a16="http://schemas.microsoft.com/office/drawing/2014/main" id="{C0CA2657-7282-DA26-EB5D-991BB9429ACD}"/>
+              </a:ext>
+            </a:extLst>
+          </p:cNvPr>
+          <p:cNvSpPr>
+            <a:spLocks noChangeAspect="1" noChangeArrowheads="1"/>
+          </p:cNvSpPr>
+          <p:nvPr/>
+        </p:nvSpPr>
+        <p:spPr bwMode="auto">
+          <a:xfrm>
+            <a:off x="3239691" y="1325166"/>
+            <a:ext cx="2664619" cy="2493169"/>
+          </a:xfrm>
+          <a:prstGeom prst="rect">
+            <a:avLst/>
+          </a:prstGeom>
+          <a:noFill/>
+          <a:extLst>
+            <a:ext uri="{909E8E84-426E-40DD-AFC4-6F175D3DCCD1}">
+              <a14:hiddenFill xmlns:a14="http://schemas.microsoft.com/office/drawing/2010/main">
+                <a:solidFill>
+                  <a:srgbClr val="FFFFFF"/>
+                </a:solidFill>
+              </a14:hiddenFill>
+            </a:ext>
+          </a:extLst>
+        </p:spPr>
+        <p:txBody>
+          <a:bodyPr vert="horz" wrap="square" lIns="68580" tIns="34290" rIns="68580" bIns="34290" numCol="1" anchor="t" anchorCtr="0" compatLnSpc="1">
+            <a:prstTxWarp prst="textNoShape">
+              <a:avLst/>
+            </a:prstTxWarp>
+          </a:bodyPr>
+          <a:lstStyle/>
+          <a:p>
+            <a:endParaRPr lang="en-US" sz="1050"/>
+          </a:p>
+        </p:txBody>
+      </p:sp>
+      <p:pic>
+        <p:nvPicPr>
+          <p:cNvPr id="5" name="Picture 4">
+            <a:extLst>
+              <a:ext uri="{FF2B5EF4-FFF2-40B4-BE49-F238E27FC236}">
+                <a16:creationId xmlns:a16="http://schemas.microsoft.com/office/drawing/2014/main" id="{7FA3061E-A000-9427-7DFB-24A54F3921DF}"/>
+              </a:ext>
+            </a:extLst>
+          </p:cNvPr>
+          <p:cNvPicPr>
+            <a:picLocks noChangeAspect="1"/>
+          </p:cNvPicPr>
+          <p:nvPr/>
+        </p:nvPicPr>
+        <p:blipFill>
+          <a:blip r:embed="rId6"/>
+          <a:srcRect/>
+          <a:stretch/>
+        </p:blipFill>
+        <p:spPr>
+          <a:xfrm>
+            <a:off x="4210647" y="-24189"/>
+            <a:ext cx="4761465" cy="1397075"/>
+          </a:xfrm>
+          <a:prstGeom prst="rect">
+            <a:avLst/>
+          </a:prstGeom>
+        </p:spPr>
+      </p:pic>
+      <p:sp>
+        <p:nvSpPr>
+          <p:cNvPr id="4" name="Slide Number Placeholder 3">
+            <a:extLst>
+              <a:ext uri="{FF2B5EF4-FFF2-40B4-BE49-F238E27FC236}">
+                <a16:creationId xmlns:a16="http://schemas.microsoft.com/office/drawing/2014/main" id="{566C52A8-E458-0A8C-7E03-A9D3B3AD91E3}"/>
+              </a:ext>
+            </a:extLst>
+          </p:cNvPr>
+          <p:cNvSpPr>
+            <a:spLocks noGrp="1"/>
+          </p:cNvSpPr>
+          <p:nvPr>
+            <p:ph type="sldNum" sz="quarter" idx="4"/>
+          </p:nvPr>
+        </p:nvSpPr>
+        <p:spPr/>
+        <p:txBody>
+          <a:bodyPr/>
+          <a:lstStyle/>
+          <a:p>
+            <a:fld id="{C4204591-24BD-A542-B9D5-F8D8A88D2FEE}" type="slidenum">
+              <a:rPr lang="en-US" smtClean="0"/>
+              <a:pPr/>
+              <a:t>15</a:t>
+            </a:fld>
+            <a:endParaRPr lang="en-US" dirty="0"/>
+          </a:p>
+        </p:txBody>
+      </p:sp>
+    </p:spTree>
+    <p:extLst>
+      <p:ext uri="{BB962C8B-B14F-4D97-AF65-F5344CB8AC3E}">
+        <p14:creationId xmlns:p14="http://schemas.microsoft.com/office/powerpoint/2010/main" val="349922459"/>
+      </p:ext>
+    </p:extLst>
+  </p:cSld>
+  <p:clrMapOvr>
+    <a:masterClrMapping/>
+  </p:clrMapOvr>
+</p:sld>
+</file>
+
+<file path=ppt/slides/slide16.xml><?xml version="1.0" encoding="utf-8"?>
+<p:sld xmlns:a="http://schemas.openxmlformats.org/drawingml/2006/main" xmlns:r="http://schemas.openxmlformats.org/officeDocument/2006/relationships" xmlns:p="http://schemas.openxmlformats.org/presentationml/2006/main">
+  <p:cSld>
+    <p:spTree>
+      <p:nvGrpSpPr>
+        <p:cNvPr id="1" name="">
+          <a:extLst>
+            <a:ext uri="{FF2B5EF4-FFF2-40B4-BE49-F238E27FC236}">
+              <a16:creationId xmlns:a16="http://schemas.microsoft.com/office/drawing/2014/main" id="{7A97960B-19E7-C157-BA3B-4282A20BEFE7}"/>
+            </a:ext>
+          </a:extLst>
+        </p:cNvPr>
+        <p:cNvGrpSpPr/>
+        <p:nvPr/>
+      </p:nvGrpSpPr>
+      <p:grpSpPr>
+        <a:xfrm>
+          <a:off x="0" y="0"/>
+          <a:ext cx="0" cy="0"/>
+          <a:chOff x="0" y="0"/>
+          <a:chExt cx="0" cy="0"/>
+        </a:xfrm>
+      </p:grpSpPr>
+      <p:sp>
+        <p:nvSpPr>
+          <p:cNvPr id="2" name="Title 1">
+            <a:extLst>
+              <a:ext uri="{FF2B5EF4-FFF2-40B4-BE49-F238E27FC236}">
+                <a16:creationId xmlns:a16="http://schemas.microsoft.com/office/drawing/2014/main" id="{BCD43FDC-6B0A-1999-F9EC-ECC81C570141}"/>
+              </a:ext>
+            </a:extLst>
+          </p:cNvPr>
+          <p:cNvSpPr>
+            <a:spLocks noGrp="1"/>
+          </p:cNvSpPr>
+          <p:nvPr>
+            <p:ph type="title"/>
+          </p:nvPr>
+        </p:nvSpPr>
+        <p:spPr>
+          <a:xfrm>
+            <a:off x="171888" y="366405"/>
+            <a:ext cx="4383842" cy="670967"/>
+          </a:xfrm>
+        </p:spPr>
+        <p:txBody>
+          <a:bodyPr>
+            <a:normAutofit/>
+          </a:bodyPr>
+          <a:lstStyle/>
+          <a:p>
+            <a:r>
+              <a:rPr lang="en-US" sz="2800" dirty="0"/>
+              <a:t>Q5.2 Pipe Diagram ANS</a:t>
+            </a:r>
+          </a:p>
+        </p:txBody>
+      </p:sp>
+      <p:sp>
+        <p:nvSpPr>
+          <p:cNvPr id="3" name="Content Placeholder 2">
+            <a:extLst>
+              <a:ext uri="{FF2B5EF4-FFF2-40B4-BE49-F238E27FC236}">
+                <a16:creationId xmlns:a16="http://schemas.microsoft.com/office/drawing/2014/main" id="{BB363AB7-8BDB-FC7D-22A1-C299003B130E}"/>
+              </a:ext>
+            </a:extLst>
+          </p:cNvPr>
+          <p:cNvSpPr>
+            <a:spLocks noGrp="1"/>
+          </p:cNvSpPr>
+          <p:nvPr>
+            <p:ph sz="half" idx="1"/>
+          </p:nvPr>
+        </p:nvSpPr>
+        <p:spPr>
+          <a:xfrm>
+            <a:off x="65940" y="1325166"/>
+            <a:ext cx="8724376" cy="3928321"/>
+          </a:xfrm>
+        </p:spPr>
+        <p:txBody>
+          <a:bodyPr>
+            <a:normAutofit fontScale="70000" lnSpcReduction="20000"/>
+          </a:bodyPr>
+          <a:lstStyle/>
+          <a:p>
+            <a:r>
+              <a:rPr lang="en-US" sz="1600" dirty="0"/>
+              <a:t>5) In this subpart, suppose R1 has 1 other packet in its queue when A sends the packet. How long does it take to send a single packet from A to B?</a:t>
+            </a:r>
+          </a:p>
+          <a:p>
+            <a:r>
+              <a:rPr lang="en-US" sz="1600" dirty="0"/>
+              <a:t>ANS: 2x + 2z. Since all packets are the same size, by the time A transmits the packet onto the A-to-R1 link, R1has finished clearing out its queue. Therefore, there will be no queuing delay at R1.The packet takes 𝑥 + 𝑧 time to travel from A to R1 (transmission delay 𝑥 and propagation delay𝑧). At time 𝑥 + 𝑧, R1 has received the entire packet.R1 then must send the packet along the R1-to-B link, which takes 𝑥 + 𝑧 time again. The total time to transmit the packet from A to B is 2(𝑥 + 𝑧) = 2𝑥 + 2𝑧.</a:t>
+            </a:r>
+          </a:p>
+          <a:p>
+            <a:r>
+              <a:rPr lang="en-US" sz="1600" dirty="0"/>
+              <a:t>6) In this subpart, suppose R1 has 20 other packets in its queue when A sends the packet. How long does it take to send a single packet from A to B? Assume that the queue at R1 is not empty when this packet arrives at R1.</a:t>
+            </a:r>
+          </a:p>
+          <a:p>
+            <a:r>
+              <a:rPr lang="en-US" sz="1600" dirty="0"/>
+              <a:t>ANS: 21𝑥 + 𝑧. By the time the A-to-B packet arrives at R1, the queue is not empty (per the assumption).Therefore, we have to account for queuing delay. More specifically, we have to wait for R1 to finish sending all 20 packets, and then it can send the A-to-B packet. The time it takes for R1 to transmit 21 packets (the 20 in the queue, plus the A-to-B packet) is21𝑥.Then, the time it takes for the A-to-B packet to propagate along the R1-to-B link is 𝑧.Thus, the total packet delay is 21𝑥 + 𝑧.Note that we don’t need to consider the delay on the A-to-R1 link, because we already counted that time in the 21𝑥 term (i.e. the packet was sent from A to R1 while R1 was clearing out it’s the first packet in its queue).</a:t>
+            </a:r>
+          </a:p>
+          <a:p>
+            <a:r>
+              <a:rPr lang="en-US" sz="1600" dirty="0"/>
+              <a:t>7) What is the maximum number of packets that can be queued at R1, such that when the last byte of the A-to-B packet reaches R1, there is no queue at R1?Don’t worry about fractions and rounding (e.g. assume 𝑥, 𝑦, and 𝑧 are defined such that all results of division are integers).</a:t>
+            </a:r>
+          </a:p>
+          <a:p>
+            <a:r>
+              <a:rPr lang="en-US" sz="1600" dirty="0"/>
+              <a:t>ANS: (x + z)/x. The time it takes to send the packet from A to R1 is 𝑥 + 𝑧.R1 needs 𝑥 seconds to send out each </a:t>
+            </a:r>
+            <a:r>
+              <a:rPr lang="en-US" sz="1600" dirty="0" err="1"/>
+              <a:t>packet.Therefore</a:t>
+            </a:r>
+            <a:r>
+              <a:rPr lang="en-US" sz="1600" dirty="0"/>
+              <a:t>, in 𝑥 + 𝑧 seconds, R1 is able to send out 𝑥+𝑧𝑥 packets. Therefore, R1 can have at most 𝑥+𝑧𝑥 packets in its queue, and all of those packets will be sent outby the time the last byte of the A-to-B packet reaches R1.</a:t>
+            </a:r>
+          </a:p>
+          <a:p>
+            <a:pPr marL="114300" indent="0">
+              <a:buNone/>
+            </a:pPr>
+            <a:endParaRPr lang="en-US" sz="1600" dirty="0"/>
+          </a:p>
+        </p:txBody>
+      </p:sp>
+      <mc:AlternateContent xmlns:mc="http://schemas.openxmlformats.org/markup-compatibility/2006" xmlns:p14="http://schemas.microsoft.com/office/powerpoint/2010/main">
+        <mc:Choice Requires="p14">
+          <p:contentPart p14:bwMode="auto" r:id="rId2">
+            <p14:nvContentPartPr>
+              <p14:cNvPr id="8" name="Ink 7">
+                <a:extLst>
+                  <a:ext uri="{FF2B5EF4-FFF2-40B4-BE49-F238E27FC236}">
+                    <a16:creationId xmlns:a16="http://schemas.microsoft.com/office/drawing/2014/main" id="{DD5A0203-39AB-548B-13EB-76791FC4913A}"/>
+                  </a:ext>
+                </a:extLst>
+              </p14:cNvPr>
+              <p14:cNvContentPartPr/>
+              <p14:nvPr/>
+            </p14:nvContentPartPr>
+            <p14:xfrm>
+              <a:off x="2394024" y="1900753"/>
+              <a:ext cx="270" cy="270"/>
+            </p14:xfrm>
+          </p:contentPart>
+        </mc:Choice>
+        <mc:Fallback xmlns="">
+          <p:pic>
+            <p:nvPicPr>
+              <p:cNvPr id="8" name="Ink 7">
+                <a:extLst>
+                  <a:ext uri="{FF2B5EF4-FFF2-40B4-BE49-F238E27FC236}">
+                    <a16:creationId xmlns:a16="http://schemas.microsoft.com/office/drawing/2014/main" id="{BF9B16F1-26FB-0E56-FA0A-E1AE729E92E6}"/>
+                  </a:ext>
+                </a:extLst>
+              </p:cNvPr>
+              <p:cNvPicPr/>
+              <p:nvPr/>
+            </p:nvPicPr>
+            <p:blipFill>
+              <a:blip r:embed="rId4"/>
+              <a:stretch>
+                <a:fillRect/>
+              </a:stretch>
+            </p:blipFill>
+            <p:spPr>
+              <a:xfrm>
+                <a:off x="2387274" y="1894003"/>
+                <a:ext cx="13500" cy="13500"/>
+              </a:xfrm>
+              <a:prstGeom prst="rect">
+                <a:avLst/>
+              </a:prstGeom>
+            </p:spPr>
+          </p:pic>
+        </mc:Fallback>
+      </mc:AlternateContent>
+      <mc:AlternateContent xmlns:mc="http://schemas.openxmlformats.org/markup-compatibility/2006" xmlns:p14="http://schemas.microsoft.com/office/powerpoint/2010/main">
+        <mc:Choice Requires="p14">
+          <p:contentPart p14:bwMode="auto" r:id="rId5">
+            <p14:nvContentPartPr>
+              <p14:cNvPr id="9" name="Ink 8">
+                <a:extLst>
+                  <a:ext uri="{FF2B5EF4-FFF2-40B4-BE49-F238E27FC236}">
+                    <a16:creationId xmlns:a16="http://schemas.microsoft.com/office/drawing/2014/main" id="{45C1376A-19A6-01D9-B8CC-B73AC60506EE}"/>
+                  </a:ext>
+                </a:extLst>
+              </p14:cNvPr>
+              <p14:cNvContentPartPr/>
+              <p14:nvPr/>
+            </p14:nvContentPartPr>
+            <p14:xfrm>
+              <a:off x="1142574" y="1551373"/>
+              <a:ext cx="270" cy="270"/>
+            </p14:xfrm>
+          </p:contentPart>
+        </mc:Choice>
+        <mc:Fallback xmlns="">
+          <p:pic>
+            <p:nvPicPr>
+              <p:cNvPr id="9" name="Ink 8">
+                <a:extLst>
+                  <a:ext uri="{FF2B5EF4-FFF2-40B4-BE49-F238E27FC236}">
+                    <a16:creationId xmlns:a16="http://schemas.microsoft.com/office/drawing/2014/main" id="{BC90F249-0F8D-8A72-C826-5B5928532520}"/>
+                  </a:ext>
+                </a:extLst>
+              </p:cNvPr>
+              <p:cNvPicPr/>
+              <p:nvPr/>
+            </p:nvPicPr>
+            <p:blipFill>
+              <a:blip r:embed="rId4"/>
+              <a:stretch>
+                <a:fillRect/>
+              </a:stretch>
+            </p:blipFill>
+            <p:spPr>
+              <a:xfrm>
+                <a:off x="1135824" y="1544623"/>
+                <a:ext cx="13500" cy="13500"/>
+              </a:xfrm>
+              <a:prstGeom prst="rect">
+                <a:avLst/>
+              </a:prstGeom>
+            </p:spPr>
+          </p:pic>
+        </mc:Fallback>
+      </mc:AlternateContent>
+      <p:sp>
+        <p:nvSpPr>
+          <p:cNvPr id="12" name="AutoShape 4">
+            <a:extLst>
+              <a:ext uri="{FF2B5EF4-FFF2-40B4-BE49-F238E27FC236}">
+                <a16:creationId xmlns:a16="http://schemas.microsoft.com/office/drawing/2014/main" id="{FE0AB9DE-032B-FEB1-7919-5866291B0A49}"/>
+              </a:ext>
+            </a:extLst>
+          </p:cNvPr>
+          <p:cNvSpPr>
+            <a:spLocks noChangeAspect="1" noChangeArrowheads="1"/>
+          </p:cNvSpPr>
+          <p:nvPr/>
+        </p:nvSpPr>
+        <p:spPr bwMode="auto">
+          <a:xfrm>
+            <a:off x="3239691" y="1325166"/>
+            <a:ext cx="2664619" cy="2493169"/>
+          </a:xfrm>
+          <a:prstGeom prst="rect">
+            <a:avLst/>
+          </a:prstGeom>
+          <a:noFill/>
+          <a:extLst>
+            <a:ext uri="{909E8E84-426E-40DD-AFC4-6F175D3DCCD1}">
+              <a14:hiddenFill xmlns:a14="http://schemas.microsoft.com/office/drawing/2010/main">
+                <a:solidFill>
+                  <a:srgbClr val="FFFFFF"/>
+                </a:solidFill>
+              </a14:hiddenFill>
+            </a:ext>
+          </a:extLst>
+        </p:spPr>
+        <p:txBody>
+          <a:bodyPr vert="horz" wrap="square" lIns="68580" tIns="34290" rIns="68580" bIns="34290" numCol="1" anchor="t" anchorCtr="0" compatLnSpc="1">
+            <a:prstTxWarp prst="textNoShape">
+              <a:avLst/>
+            </a:prstTxWarp>
+          </a:bodyPr>
+          <a:lstStyle/>
+          <a:p>
+            <a:endParaRPr lang="en-US" sz="1050"/>
+          </a:p>
+        </p:txBody>
+      </p:sp>
+      <p:pic>
+        <p:nvPicPr>
+          <p:cNvPr id="5" name="Picture 4">
+            <a:extLst>
+              <a:ext uri="{FF2B5EF4-FFF2-40B4-BE49-F238E27FC236}">
+                <a16:creationId xmlns:a16="http://schemas.microsoft.com/office/drawing/2014/main" id="{FD6888DE-161F-35F1-5EF9-C9875C200BAA}"/>
+              </a:ext>
+            </a:extLst>
+          </p:cNvPr>
+          <p:cNvPicPr>
+            <a:picLocks noChangeAspect="1"/>
+          </p:cNvPicPr>
+          <p:nvPr/>
+        </p:nvPicPr>
+        <p:blipFill>
+          <a:blip r:embed="rId6"/>
+          <a:srcRect/>
+          <a:stretch/>
+        </p:blipFill>
+        <p:spPr>
+          <a:xfrm>
+            <a:off x="4210647" y="-24189"/>
+            <a:ext cx="4761465" cy="1397075"/>
+          </a:xfrm>
+          <a:prstGeom prst="rect">
+            <a:avLst/>
+          </a:prstGeom>
+        </p:spPr>
+      </p:pic>
+      <p:sp>
+        <p:nvSpPr>
+          <p:cNvPr id="4" name="Slide Number Placeholder 3">
+            <a:extLst>
+              <a:ext uri="{FF2B5EF4-FFF2-40B4-BE49-F238E27FC236}">
+                <a16:creationId xmlns:a16="http://schemas.microsoft.com/office/drawing/2014/main" id="{C3F30F5D-428A-5923-785A-05CCD424315E}"/>
+              </a:ext>
+            </a:extLst>
+          </p:cNvPr>
+          <p:cNvSpPr>
+            <a:spLocks noGrp="1"/>
+          </p:cNvSpPr>
+          <p:nvPr>
+            <p:ph type="sldNum" sz="quarter" idx="4"/>
+          </p:nvPr>
+        </p:nvSpPr>
+        <p:spPr/>
+        <p:txBody>
+          <a:bodyPr/>
+          <a:lstStyle/>
+          <a:p>
+            <a:fld id="{C4204591-24BD-A542-B9D5-F8D8A88D2FEE}" type="slidenum">
+              <a:rPr lang="en-US" smtClean="0"/>
+              <a:pPr/>
+              <a:t>16</a:t>
+            </a:fld>
+            <a:endParaRPr lang="en-US" dirty="0"/>
+          </a:p>
+        </p:txBody>
+      </p:sp>
+    </p:spTree>
+    <p:extLst>
+      <p:ext uri="{BB962C8B-B14F-4D97-AF65-F5344CB8AC3E}">
+        <p14:creationId xmlns:p14="http://schemas.microsoft.com/office/powerpoint/2010/main" val="623579125"/>
       </p:ext>
     </p:extLst>
   </p:cSld>
@@ -19479,14 +21499,14 @@
           </a:ln>
           <a:extLst>
             <a:ext uri="{909E8E84-426E-40dd-AFC4-6F175D3DCCD1}">
-              <a14:hiddenFill xmlns:a14="http://schemas.microsoft.com/office/drawing/2010/main" xmlns="">
+              <a14:hiddenFill xmlns="" xmlns:a14="http://schemas.microsoft.com/office/drawing/2010/main">
                 <a:solidFill>
                   <a:srgbClr val="FFFFFF"/>
                 </a:solidFill>
               </a14:hiddenFill>
             </a:ext>
             <a:ext uri="{91240B29-F687-4f45-9708-019B960494DF}">
-              <a14:hiddenLine xmlns:a14="http://schemas.microsoft.com/office/drawing/2010/main" xmlns="" w="9525">
+              <a14:hiddenLine xmlns="" xmlns:a14="http://schemas.microsoft.com/office/drawing/2010/main" w="9525">
                 <a:solidFill>
                   <a:srgbClr val="000000"/>
                 </a:solidFill>
@@ -25243,14 +27263,14 @@
           </a:ln>
           <a:extLst>
             <a:ext uri="{909E8E84-426E-40dd-AFC4-6F175D3DCCD1}">
-              <a14:hiddenFill xmlns:a14="http://schemas.microsoft.com/office/drawing/2010/main" xmlns="">
+              <a14:hiddenFill xmlns="" xmlns:a14="http://schemas.microsoft.com/office/drawing/2010/main">
                 <a:solidFill>
                   <a:srgbClr val="FFFFFF"/>
                 </a:solidFill>
               </a14:hiddenFill>
             </a:ext>
             <a:ext uri="{91240B29-F687-4f45-9708-019B960494DF}">
-              <a14:hiddenLine xmlns:a14="http://schemas.microsoft.com/office/drawing/2010/main" xmlns="" w="9525">
+              <a14:hiddenLine xmlns="" xmlns:a14="http://schemas.microsoft.com/office/drawing/2010/main" w="9525">
                 <a:solidFill>
                   <a:srgbClr val="000000"/>
                 </a:solidFill>
@@ -25471,14 +27491,14 @@
           </a:ln>
           <a:extLst>
             <a:ext uri="{909E8E84-426E-40dd-AFC4-6F175D3DCCD1}">
-              <a14:hiddenFill xmlns:a14="http://schemas.microsoft.com/office/drawing/2010/main" xmlns="">
+              <a14:hiddenFill xmlns="" xmlns:a14="http://schemas.microsoft.com/office/drawing/2010/main">
                 <a:solidFill>
                   <a:srgbClr val="FFFFFF"/>
                 </a:solidFill>
               </a14:hiddenFill>
             </a:ext>
             <a:ext uri="{91240B29-F687-4f45-9708-019B960494DF}">
-              <a14:hiddenLine xmlns:a14="http://schemas.microsoft.com/office/drawing/2010/main" xmlns="" w="9525">
+              <a14:hiddenLine xmlns="" xmlns:a14="http://schemas.microsoft.com/office/drawing/2010/main" w="9525">
                 <a:solidFill>
                   <a:srgbClr val="000000"/>
                 </a:solidFill>
@@ -25870,6 +27890,36 @@
                 <a:schemeClr val="tx1"/>
               </a:solidFill>
             </a:endParaRPr>
+          </a:p>
+        </p:txBody>
+      </p:sp>
+      <p:sp>
+        <p:nvSpPr>
+          <p:cNvPr id="6" name="Slide Number Placeholder 5">
+            <a:extLst>
+              <a:ext uri="{FF2B5EF4-FFF2-40B4-BE49-F238E27FC236}">
+                <a16:creationId xmlns:a16="http://schemas.microsoft.com/office/drawing/2014/main" id="{2471214F-B1AF-A534-2870-602CE650250E}"/>
+              </a:ext>
+            </a:extLst>
+          </p:cNvPr>
+          <p:cNvSpPr>
+            <a:spLocks noGrp="1"/>
+          </p:cNvSpPr>
+          <p:nvPr>
+            <p:ph type="sldNum" sz="quarter" idx="4"/>
+          </p:nvPr>
+        </p:nvSpPr>
+        <p:spPr/>
+        <p:txBody>
+          <a:bodyPr/>
+          <a:lstStyle/>
+          <a:p>
+            <a:fld id="{C4204591-24BD-A542-B9D5-F8D8A88D2FEE}" type="slidenum">
+              <a:rPr lang="en-US" smtClean="0"/>
+              <a:pPr/>
+              <a:t>2</a:t>
+            </a:fld>
+            <a:endParaRPr lang="en-US" dirty="0"/>
           </a:p>
         </p:txBody>
       </p:sp>
@@ -26232,40 +28282,6 @@
           </a:p>
         </p:txBody>
       </p:sp>
-      <p:sp>
-        <p:nvSpPr>
-          <p:cNvPr id="5" name="Slide Number Placeholder 4">
-            <a:extLst>
-              <a:ext uri="{FF2B5EF4-FFF2-40B4-BE49-F238E27FC236}">
-                <a16:creationId xmlns:a16="http://schemas.microsoft.com/office/drawing/2014/main" id="{1D0B0DF4-D0B4-4369-972D-BE8AFA559C49}"/>
-              </a:ext>
-            </a:extLst>
-          </p:cNvPr>
-          <p:cNvSpPr>
-            <a:spLocks noGrp="1"/>
-          </p:cNvSpPr>
-          <p:nvPr>
-            <p:ph type="sldNum" sz="quarter" idx="4"/>
-          </p:nvPr>
-        </p:nvSpPr>
-        <p:spPr/>
-        <p:txBody>
-          <a:bodyPr/>
-          <a:lstStyle/>
-          <a:p>
-            <a:r>
-              <a:rPr lang="en-US"/>
-              <a:t>Introduction: 1-</a:t>
-            </a:r>
-            <a:fld id="{C4204591-24BD-A542-B9D5-F8D8A88D2FEE}" type="slidenum">
-              <a:rPr lang="en-US" smtClean="0"/>
-              <a:pPr/>
-              <a:t>3</a:t>
-            </a:fld>
-            <a:endParaRPr lang="en-US" dirty="0"/>
-          </a:p>
-        </p:txBody>
-      </p:sp>
       <p:pic>
         <p:nvPicPr>
           <p:cNvPr id="6" name="Picture 5">
@@ -26296,6 +28312,36 @@
           </a:prstGeom>
         </p:spPr>
       </p:pic>
+      <p:sp>
+        <p:nvSpPr>
+          <p:cNvPr id="4" name="Slide Number Placeholder 3">
+            <a:extLst>
+              <a:ext uri="{FF2B5EF4-FFF2-40B4-BE49-F238E27FC236}">
+                <a16:creationId xmlns:a16="http://schemas.microsoft.com/office/drawing/2014/main" id="{28DDB450-B6B5-ADD8-C4AB-80B6F0A2A8EE}"/>
+              </a:ext>
+            </a:extLst>
+          </p:cNvPr>
+          <p:cNvSpPr>
+            <a:spLocks noGrp="1"/>
+          </p:cNvSpPr>
+          <p:nvPr>
+            <p:ph type="sldNum" sz="quarter" idx="4"/>
+          </p:nvPr>
+        </p:nvSpPr>
+        <p:spPr/>
+        <p:txBody>
+          <a:bodyPr/>
+          <a:lstStyle/>
+          <a:p>
+            <a:fld id="{C4204591-24BD-A542-B9D5-F8D8A88D2FEE}" type="slidenum">
+              <a:rPr lang="en-US" smtClean="0"/>
+              <a:pPr/>
+              <a:t>3</a:t>
+            </a:fld>
+            <a:endParaRPr lang="en-US" dirty="0"/>
+          </a:p>
+        </p:txBody>
+      </p:sp>
     </p:spTree>
     <p:extLst>
       <p:ext uri="{BB962C8B-B14F-4D97-AF65-F5344CB8AC3E}">
@@ -26332,8 +28378,8 @@
           <a:chExt cx="0" cy="0"/>
         </a:xfrm>
       </p:grpSpPr>
-      <mc:AlternateContent xmlns:mc="http://schemas.openxmlformats.org/markup-compatibility/2006">
-        <mc:Choice xmlns:a14="http://schemas.microsoft.com/office/drawing/2010/main" Requires="a14">
+      <mc:AlternateContent xmlns:mc="http://schemas.openxmlformats.org/markup-compatibility/2006" xmlns:a14="http://schemas.microsoft.com/office/drawing/2010/main">
+        <mc:Choice Requires="a14">
           <p:sp>
             <p:nvSpPr>
               <p:cNvPr id="5" name="Content Placeholder 3">
@@ -26745,7 +28791,7 @@
             </p:txBody>
           </p:sp>
         </mc:Choice>
-        <mc:Fallback>
+        <mc:Fallback xmlns="">
           <p:sp>
             <p:nvSpPr>
               <p:cNvPr id="5" name="Content Placeholder 3">
@@ -26821,6 +28867,36 @@
               <a:rPr lang="en-US" dirty="0"/>
               <a:t>Q1 End-­to­‐end delay ANS </a:t>
             </a:r>
+          </a:p>
+        </p:txBody>
+      </p:sp>
+      <p:sp>
+        <p:nvSpPr>
+          <p:cNvPr id="3" name="Slide Number Placeholder 2">
+            <a:extLst>
+              <a:ext uri="{FF2B5EF4-FFF2-40B4-BE49-F238E27FC236}">
+                <a16:creationId xmlns:a16="http://schemas.microsoft.com/office/drawing/2014/main" id="{8C140476-9AEB-B878-0B9C-18BACB8A11F6}"/>
+              </a:ext>
+            </a:extLst>
+          </p:cNvPr>
+          <p:cNvSpPr>
+            <a:spLocks noGrp="1"/>
+          </p:cNvSpPr>
+          <p:nvPr>
+            <p:ph type="sldNum" sz="quarter" idx="4"/>
+          </p:nvPr>
+        </p:nvSpPr>
+        <p:spPr/>
+        <p:txBody>
+          <a:bodyPr/>
+          <a:lstStyle/>
+          <a:p>
+            <a:fld id="{C4204591-24BD-A542-B9D5-F8D8A88D2FEE}" type="slidenum">
+              <a:rPr lang="en-US" smtClean="0"/>
+              <a:pPr/>
+              <a:t>4</a:t>
+            </a:fld>
+            <a:endParaRPr lang="en-US" dirty="0"/>
           </a:p>
         </p:txBody>
       </p:sp>
@@ -26938,8 +29014,8 @@
           </a:p>
         </p:txBody>
       </p:sp>
-      <mc:AlternateContent xmlns:mc="http://schemas.openxmlformats.org/markup-compatibility/2006">
-        <mc:Choice xmlns:p14="http://schemas.microsoft.com/office/powerpoint/2010/main" Requires="p14">
+      <mc:AlternateContent xmlns:mc="http://schemas.openxmlformats.org/markup-compatibility/2006" xmlns:p14="http://schemas.microsoft.com/office/powerpoint/2010/main">
+        <mc:Choice Requires="p14">
           <p:contentPart p14:bwMode="auto" r:id="rId2">
             <p14:nvContentPartPr>
               <p14:cNvPr id="6" name="Ink 5">
@@ -26958,7 +29034,7 @@
             </p14:xfrm>
           </p:contentPart>
         </mc:Choice>
-        <mc:Fallback>
+        <mc:Fallback xmlns="">
           <p:pic>
             <p:nvPicPr>
               <p:cNvPr id="6" name="Ink 5">
@@ -26989,8 +29065,8 @@
           </p:pic>
         </mc:Fallback>
       </mc:AlternateContent>
-      <mc:AlternateContent xmlns:mc="http://schemas.openxmlformats.org/markup-compatibility/2006">
-        <mc:Choice xmlns:p14="http://schemas.microsoft.com/office/powerpoint/2010/main" Requires="p14">
+      <mc:AlternateContent xmlns:mc="http://schemas.openxmlformats.org/markup-compatibility/2006" xmlns:p14="http://schemas.microsoft.com/office/powerpoint/2010/main">
+        <mc:Choice Requires="p14">
           <p:contentPart p14:bwMode="auto" r:id="rId4">
             <p14:nvContentPartPr>
               <p14:cNvPr id="7" name="Ink 6">
@@ -27009,7 +29085,7 @@
             </p14:xfrm>
           </p:contentPart>
         </mc:Choice>
-        <mc:Fallback>
+        <mc:Fallback xmlns="">
           <p:pic>
             <p:nvPicPr>
               <p:cNvPr id="7" name="Ink 6">
@@ -27040,8 +29116,8 @@
           </p:pic>
         </mc:Fallback>
       </mc:AlternateContent>
-      <mc:AlternateContent xmlns:mc="http://schemas.openxmlformats.org/markup-compatibility/2006">
-        <mc:Choice xmlns:p14="http://schemas.microsoft.com/office/powerpoint/2010/main" Requires="p14">
+      <mc:AlternateContent xmlns:mc="http://schemas.openxmlformats.org/markup-compatibility/2006" xmlns:p14="http://schemas.microsoft.com/office/powerpoint/2010/main">
+        <mc:Choice Requires="p14">
           <p:contentPart p14:bwMode="auto" r:id="rId5">
             <p14:nvContentPartPr>
               <p14:cNvPr id="8" name="Ink 7">
@@ -27060,7 +29136,7 @@
             </p14:xfrm>
           </p:contentPart>
         </mc:Choice>
-        <mc:Fallback>
+        <mc:Fallback xmlns="">
           <p:pic>
             <p:nvPicPr>
               <p:cNvPr id="8" name="Ink 7">
@@ -27091,8 +29167,8 @@
           </p:pic>
         </mc:Fallback>
       </mc:AlternateContent>
-      <mc:AlternateContent xmlns:mc="http://schemas.openxmlformats.org/markup-compatibility/2006">
-        <mc:Choice xmlns:p14="http://schemas.microsoft.com/office/powerpoint/2010/main" Requires="p14">
+      <mc:AlternateContent xmlns:mc="http://schemas.openxmlformats.org/markup-compatibility/2006" xmlns:p14="http://schemas.microsoft.com/office/powerpoint/2010/main">
+        <mc:Choice Requires="p14">
           <p:contentPart p14:bwMode="auto" r:id="rId6">
             <p14:nvContentPartPr>
               <p14:cNvPr id="9" name="Ink 8">
@@ -27111,7 +29187,7 @@
             </p14:xfrm>
           </p:contentPart>
         </mc:Choice>
-        <mc:Fallback>
+        <mc:Fallback xmlns="">
           <p:pic>
             <p:nvPicPr>
               <p:cNvPr id="9" name="Ink 8">
@@ -27217,6 +29293,36 @@
           </a:prstGeom>
         </p:spPr>
       </p:pic>
+      <p:sp>
+        <p:nvSpPr>
+          <p:cNvPr id="5" name="Slide Number Placeholder 4">
+            <a:extLst>
+              <a:ext uri="{FF2B5EF4-FFF2-40B4-BE49-F238E27FC236}">
+                <a16:creationId xmlns:a16="http://schemas.microsoft.com/office/drawing/2014/main" id="{93C2361B-509F-0249-1C38-4A72D018ED31}"/>
+              </a:ext>
+            </a:extLst>
+          </p:cNvPr>
+          <p:cNvSpPr>
+            <a:spLocks noGrp="1"/>
+          </p:cNvSpPr>
+          <p:nvPr>
+            <p:ph type="sldNum" sz="quarter" idx="4"/>
+          </p:nvPr>
+        </p:nvSpPr>
+        <p:spPr/>
+        <p:txBody>
+          <a:bodyPr/>
+          <a:lstStyle/>
+          <a:p>
+            <a:fld id="{C4204591-24BD-A542-B9D5-F8D8A88D2FEE}" type="slidenum">
+              <a:rPr lang="en-US" smtClean="0"/>
+              <a:pPr/>
+              <a:t>5</a:t>
+            </a:fld>
+            <a:endParaRPr lang="en-US" dirty="0"/>
+          </a:p>
+        </p:txBody>
+      </p:sp>
     </p:spTree>
     <p:extLst>
       <p:ext uri="{BB962C8B-B14F-4D97-AF65-F5344CB8AC3E}">
@@ -27247,8 +29353,8 @@
           <a:chExt cx="0" cy="0"/>
         </a:xfrm>
       </p:grpSpPr>
-      <mc:AlternateContent xmlns:mc="http://schemas.openxmlformats.org/markup-compatibility/2006">
-        <mc:Choice xmlns:a14="http://schemas.microsoft.com/office/drawing/2010/main" Requires="a14">
+      <mc:AlternateContent xmlns:mc="http://schemas.openxmlformats.org/markup-compatibility/2006" xmlns:a14="http://schemas.microsoft.com/office/drawing/2010/main">
+        <mc:Choice Requires="a14">
           <p:sp>
             <p:nvSpPr>
               <p:cNvPr id="3" name="Content Placeholder 2">
@@ -27308,55 +29414,81 @@
                       <m:t> </m:t>
                     </m:r>
                     <m:r>
-                      <a:rPr lang="en-US" sz="1600"/>
+                      <a:rPr lang="en-US" sz="1600">
+                        <a:latin typeface="Cambria Math" panose="02040503050406030204" pitchFamily="18" charset="0"/>
+                      </a:rPr>
                       <m:t>20</m:t>
                     </m:r>
                     <m:r>
-                      <a:rPr lang="en-US" sz="1600"/>
+                      <a:rPr lang="en-US" sz="1600">
+                        <a:latin typeface="Cambria Math" panose="02040503050406030204" pitchFamily="18" charset="0"/>
+                      </a:rPr>
                       <m:t>,</m:t>
                     </m:r>
                     <m:r>
-                      <a:rPr lang="en-US" sz="1600"/>
+                      <a:rPr lang="en-US" sz="1600">
+                        <a:latin typeface="Cambria Math" panose="02040503050406030204" pitchFamily="18" charset="0"/>
+                      </a:rPr>
                       <m:t>000</m:t>
                     </m:r>
                     <m:r>
-                      <a:rPr lang="en-US" sz="1600"/>
+                      <a:rPr lang="en-US" sz="1600">
+                        <a:latin typeface="Cambria Math" panose="02040503050406030204" pitchFamily="18" charset="0"/>
+                      </a:rPr>
                       <m:t>/</m:t>
                     </m:r>
                     <m:r>
-                      <a:rPr lang="en-US" sz="1600"/>
+                      <a:rPr lang="en-US" sz="1600">
+                        <a:latin typeface="Cambria Math" panose="02040503050406030204" pitchFamily="18" charset="0"/>
+                      </a:rPr>
                       <m:t>100</m:t>
                     </m:r>
                     <m:r>
-                      <a:rPr lang="en-US" sz="1600"/>
+                      <a:rPr lang="en-US" sz="1600">
+                        <a:latin typeface="Cambria Math" panose="02040503050406030204" pitchFamily="18" charset="0"/>
+                      </a:rPr>
                       <m:t>,</m:t>
                     </m:r>
                     <m:r>
-                      <a:rPr lang="en-US" sz="1600"/>
+                      <a:rPr lang="en-US" sz="1600">
+                        <a:latin typeface="Cambria Math" panose="02040503050406030204" pitchFamily="18" charset="0"/>
+                      </a:rPr>
                       <m:t>000</m:t>
                     </m:r>
                     <m:r>
-                      <a:rPr lang="en-US" sz="1600"/>
+                      <a:rPr lang="en-US" sz="1600">
+                        <a:latin typeface="Cambria Math" panose="02040503050406030204" pitchFamily="18" charset="0"/>
+                      </a:rPr>
                       <m:t>,</m:t>
                     </m:r>
                     <m:r>
-                      <a:rPr lang="en-US" sz="1600"/>
+                      <a:rPr lang="en-US" sz="1600">
+                        <a:latin typeface="Cambria Math" panose="02040503050406030204" pitchFamily="18" charset="0"/>
+                      </a:rPr>
                       <m:t>000</m:t>
                     </m:r>
                     <m:r>
-                      <a:rPr lang="en-US" sz="1600"/>
+                      <a:rPr lang="en-US" sz="1600">
+                        <a:latin typeface="Cambria Math" panose="02040503050406030204" pitchFamily="18" charset="0"/>
+                      </a:rPr>
                       <m:t>=</m:t>
                     </m:r>
                     <m:r>
-                      <a:rPr lang="en-US" sz="1600"/>
+                      <a:rPr lang="en-US" sz="1600">
+                        <a:latin typeface="Cambria Math" panose="02040503050406030204" pitchFamily="18" charset="0"/>
+                      </a:rPr>
                       <m:t>0</m:t>
                     </m:r>
                     <m:r>
-                      <a:rPr lang="en-US" sz="1600"/>
+                      <a:rPr lang="en-US" sz="1600">
+                        <a:latin typeface="Cambria Math" panose="02040503050406030204" pitchFamily="18" charset="0"/>
+                      </a:rPr>
                       <m:t>.</m:t>
                     </m:r>
                     <m:r>
-                      <a:rPr lang="en-US" sz="1600"/>
+                      <a:rPr lang="en-US" sz="1600">
+                        <a:latin typeface="Cambria Math" panose="02040503050406030204" pitchFamily="18" charset="0"/>
+                      </a:rPr>
                       <m:t>0002</m:t>
                     </m:r>
                   </m:oMath>
@@ -27402,55 +29534,81 @@
                       <m:t> </m:t>
                     </m:r>
                     <m:r>
-                      <a:rPr lang="en-US" sz="1600"/>
+                      <a:rPr lang="en-US" sz="1600">
+                        <a:latin typeface="Cambria Math" panose="02040503050406030204" pitchFamily="18" charset="0"/>
+                      </a:rPr>
                       <m:t>20</m:t>
                     </m:r>
                     <m:r>
-                      <a:rPr lang="en-US" sz="1600"/>
+                      <a:rPr lang="en-US" sz="1600">
+                        <a:latin typeface="Cambria Math" panose="02040503050406030204" pitchFamily="18" charset="0"/>
+                      </a:rPr>
                       <m:t>,</m:t>
                     </m:r>
                     <m:r>
-                      <a:rPr lang="en-US" sz="1600"/>
+                      <a:rPr lang="en-US" sz="1600">
+                        <a:latin typeface="Cambria Math" panose="02040503050406030204" pitchFamily="18" charset="0"/>
+                      </a:rPr>
                       <m:t>000</m:t>
                     </m:r>
                     <m:r>
-                      <a:rPr lang="en-US" sz="1600"/>
+                      <a:rPr lang="en-US" sz="1600">
+                        <a:latin typeface="Cambria Math" panose="02040503050406030204" pitchFamily="18" charset="0"/>
+                      </a:rPr>
                       <m:t>/</m:t>
                     </m:r>
                     <m:r>
-                      <a:rPr lang="en-US" sz="1600"/>
+                      <a:rPr lang="en-US" sz="1600">
+                        <a:latin typeface="Cambria Math" panose="02040503050406030204" pitchFamily="18" charset="0"/>
+                      </a:rPr>
                       <m:t>50</m:t>
                     </m:r>
                     <m:r>
-                      <a:rPr lang="en-US" sz="1600"/>
+                      <a:rPr lang="en-US" sz="1600">
+                        <a:latin typeface="Cambria Math" panose="02040503050406030204" pitchFamily="18" charset="0"/>
+                      </a:rPr>
                       <m:t>,</m:t>
                     </m:r>
                     <m:r>
-                      <a:rPr lang="en-US" sz="1600"/>
+                      <a:rPr lang="en-US" sz="1600">
+                        <a:latin typeface="Cambria Math" panose="02040503050406030204" pitchFamily="18" charset="0"/>
+                      </a:rPr>
                       <m:t>000</m:t>
                     </m:r>
                     <m:r>
-                      <a:rPr lang="en-US" sz="1600"/>
+                      <a:rPr lang="en-US" sz="1600">
+                        <a:latin typeface="Cambria Math" panose="02040503050406030204" pitchFamily="18" charset="0"/>
+                      </a:rPr>
                       <m:t>,</m:t>
                     </m:r>
                     <m:r>
-                      <a:rPr lang="en-US" sz="1600"/>
+                      <a:rPr lang="en-US" sz="1600">
+                        <a:latin typeface="Cambria Math" panose="02040503050406030204" pitchFamily="18" charset="0"/>
+                      </a:rPr>
                       <m:t>000</m:t>
                     </m:r>
                     <m:r>
-                      <a:rPr lang="en-US" sz="1600"/>
+                      <a:rPr lang="en-US" sz="1600">
+                        <a:latin typeface="Cambria Math" panose="02040503050406030204" pitchFamily="18" charset="0"/>
+                      </a:rPr>
                       <m:t>=</m:t>
                     </m:r>
                     <m:r>
-                      <a:rPr lang="en-US" sz="1600"/>
+                      <a:rPr lang="en-US" sz="1600">
+                        <a:latin typeface="Cambria Math" panose="02040503050406030204" pitchFamily="18" charset="0"/>
+                      </a:rPr>
                       <m:t>0</m:t>
                     </m:r>
                     <m:r>
-                      <a:rPr lang="en-US" sz="1600"/>
+                      <a:rPr lang="en-US" sz="1600">
+                        <a:latin typeface="Cambria Math" panose="02040503050406030204" pitchFamily="18" charset="0"/>
+                      </a:rPr>
                       <m:t>.</m:t>
                     </m:r>
                     <m:r>
-                      <a:rPr lang="en-US" sz="1600"/>
+                      <a:rPr lang="en-US" sz="1600">
+                        <a:latin typeface="Cambria Math" panose="02040503050406030204" pitchFamily="18" charset="0"/>
+                      </a:rPr>
                       <m:t>0004</m:t>
                     </m:r>
                   </m:oMath>
@@ -27496,63 +29654,93 @@
                       <m:t> </m:t>
                     </m:r>
                     <m:r>
-                      <a:rPr lang="en-US" sz="1600"/>
+                      <a:rPr lang="en-US" sz="1600">
+                        <a:latin typeface="Cambria Math" panose="02040503050406030204" pitchFamily="18" charset="0"/>
+                      </a:rPr>
                       <m:t>20</m:t>
                     </m:r>
                     <m:r>
-                      <a:rPr lang="en-US" sz="1600"/>
+                      <a:rPr lang="en-US" sz="1600">
+                        <a:latin typeface="Cambria Math" panose="02040503050406030204" pitchFamily="18" charset="0"/>
+                      </a:rPr>
                       <m:t>,</m:t>
                     </m:r>
                     <m:r>
-                      <a:rPr lang="en-US" sz="1600"/>
+                      <a:rPr lang="en-US" sz="1600">
+                        <a:latin typeface="Cambria Math" panose="02040503050406030204" pitchFamily="18" charset="0"/>
+                      </a:rPr>
                       <m:t>000</m:t>
                     </m:r>
                     <m:r>
-                      <a:rPr lang="en-US" sz="1600"/>
+                      <a:rPr lang="en-US" sz="1600">
+                        <a:latin typeface="Cambria Math" panose="02040503050406030204" pitchFamily="18" charset="0"/>
+                      </a:rPr>
                       <m:t>/</m:t>
                     </m:r>
                     <m:r>
-                      <a:rPr lang="en-US" sz="1600"/>
+                      <a:rPr lang="en-US" sz="1600">
+                        <a:latin typeface="Cambria Math" panose="02040503050406030204" pitchFamily="18" charset="0"/>
+                      </a:rPr>
                       <m:t>1</m:t>
                     </m:r>
                     <m:r>
-                      <a:rPr lang="en-US" sz="1600"/>
+                      <a:rPr lang="en-US" sz="1600">
+                        <a:latin typeface="Cambria Math" panose="02040503050406030204" pitchFamily="18" charset="0"/>
+                      </a:rPr>
                       <m:t>,</m:t>
                     </m:r>
                     <m:r>
-                      <a:rPr lang="en-US" sz="1600"/>
+                      <a:rPr lang="en-US" sz="1600">
+                        <a:latin typeface="Cambria Math" panose="02040503050406030204" pitchFamily="18" charset="0"/>
+                      </a:rPr>
                       <m:t>000</m:t>
                     </m:r>
                     <m:r>
-                      <a:rPr lang="en-US" sz="1600"/>
+                      <a:rPr lang="en-US" sz="1600">
+                        <a:latin typeface="Cambria Math" panose="02040503050406030204" pitchFamily="18" charset="0"/>
+                      </a:rPr>
                       <m:t>,</m:t>
                     </m:r>
                     <m:r>
-                      <a:rPr lang="en-US" sz="1600"/>
+                      <a:rPr lang="en-US" sz="1600">
+                        <a:latin typeface="Cambria Math" panose="02040503050406030204" pitchFamily="18" charset="0"/>
+                      </a:rPr>
                       <m:t>000</m:t>
                     </m:r>
                     <m:r>
-                      <a:rPr lang="en-US" sz="1600"/>
+                      <a:rPr lang="en-US" sz="1600">
+                        <a:latin typeface="Cambria Math" panose="02040503050406030204" pitchFamily="18" charset="0"/>
+                      </a:rPr>
                       <m:t>,</m:t>
                     </m:r>
                     <m:r>
-                      <a:rPr lang="en-US" sz="1600"/>
+                      <a:rPr lang="en-US" sz="1600">
+                        <a:latin typeface="Cambria Math" panose="02040503050406030204" pitchFamily="18" charset="0"/>
+                      </a:rPr>
                       <m:t>000</m:t>
                     </m:r>
                     <m:r>
-                      <a:rPr lang="en-US" sz="1600"/>
+                      <a:rPr lang="en-US" sz="1600">
+                        <a:latin typeface="Cambria Math" panose="02040503050406030204" pitchFamily="18" charset="0"/>
+                      </a:rPr>
                       <m:t>=</m:t>
                     </m:r>
                     <m:r>
-                      <a:rPr lang="en-US" sz="1600"/>
+                      <a:rPr lang="en-US" sz="1600">
+                        <a:latin typeface="Cambria Math" panose="02040503050406030204" pitchFamily="18" charset="0"/>
+                      </a:rPr>
                       <m:t>0</m:t>
                     </m:r>
                     <m:r>
-                      <a:rPr lang="en-US" sz="1600"/>
+                      <a:rPr lang="en-US" sz="1600">
+                        <a:latin typeface="Cambria Math" panose="02040503050406030204" pitchFamily="18" charset="0"/>
+                      </a:rPr>
                       <m:t>.</m:t>
                     </m:r>
                     <m:r>
-                      <a:rPr lang="en-US" sz="1600"/>
+                      <a:rPr lang="en-US" sz="1600">
+                        <a:latin typeface="Cambria Math" panose="02040503050406030204" pitchFamily="18" charset="0"/>
+                      </a:rPr>
                       <m:t>00002</m:t>
                     </m:r>
                   </m:oMath>
@@ -27619,31 +29807,45 @@
                       <m:t>=</m:t>
                     </m:r>
                     <m:r>
-                      <a:rPr lang="en-US" sz="1600"/>
+                      <a:rPr lang="en-US" sz="1600">
+                        <a:latin typeface="Cambria Math" panose="02040503050406030204" pitchFamily="18" charset="0"/>
+                      </a:rPr>
                       <m:t>200</m:t>
                     </m:r>
                     <m:r>
-                      <a:rPr lang="en-US" sz="1600"/>
+                      <a:rPr lang="en-US" sz="1600">
+                        <a:latin typeface="Cambria Math" panose="02040503050406030204" pitchFamily="18" charset="0"/>
+                      </a:rPr>
                       <m:t>+</m:t>
                     </m:r>
                     <m:r>
-                      <a:rPr lang="en-US" sz="1600"/>
+                      <a:rPr lang="en-US" sz="1600">
+                        <a:latin typeface="Cambria Math" panose="02040503050406030204" pitchFamily="18" charset="0"/>
+                      </a:rPr>
                       <m:t>400</m:t>
                     </m:r>
                     <m:r>
-                      <a:rPr lang="en-US" sz="1600"/>
+                      <a:rPr lang="en-US" sz="1600">
+                        <a:latin typeface="Cambria Math" panose="02040503050406030204" pitchFamily="18" charset="0"/>
+                      </a:rPr>
                       <m:t>+</m:t>
                     </m:r>
                     <m:r>
-                      <a:rPr lang="en-US" sz="1600"/>
+                      <a:rPr lang="en-US" sz="1600">
+                        <a:latin typeface="Cambria Math" panose="02040503050406030204" pitchFamily="18" charset="0"/>
+                      </a:rPr>
                       <m:t>20</m:t>
                     </m:r>
                     <m:r>
-                      <a:rPr lang="en-US" sz="1600"/>
+                      <a:rPr lang="en-US" sz="1600">
+                        <a:latin typeface="Cambria Math" panose="02040503050406030204" pitchFamily="18" charset="0"/>
+                      </a:rPr>
                       <m:t>=</m:t>
                     </m:r>
                     <m:r>
-                      <a:rPr lang="en-US" sz="1600"/>
+                      <a:rPr lang="en-US" sz="1600">
+                        <a:latin typeface="Cambria Math" panose="02040503050406030204" pitchFamily="18" charset="0"/>
+                      </a:rPr>
                       <m:t>620</m:t>
                     </m:r>
                   </m:oMath>
@@ -27791,23 +29993,33 @@
                       <m:t>=</m:t>
                     </m:r>
                     <m:r>
-                      <a:rPr lang="en-US" sz="1600"/>
+                      <a:rPr lang="en-US" sz="1600">
+                        <a:latin typeface="Cambria Math" panose="02040503050406030204" pitchFamily="18" charset="0"/>
+                      </a:rPr>
                       <m:t>50</m:t>
                     </m:r>
                     <m:r>
-                      <a:rPr lang="en-US" sz="1600"/>
+                      <a:rPr lang="en-US" sz="1600">
+                        <a:latin typeface="Cambria Math" panose="02040503050406030204" pitchFamily="18" charset="0"/>
+                      </a:rPr>
                       <m:t>+</m:t>
                     </m:r>
                     <m:r>
-                      <a:rPr lang="en-US" sz="1600"/>
+                      <a:rPr lang="en-US" sz="1600">
+                        <a:latin typeface="Cambria Math" panose="02040503050406030204" pitchFamily="18" charset="0"/>
+                      </a:rPr>
                       <m:t>200</m:t>
                     </m:r>
                     <m:r>
-                      <a:rPr lang="en-US" sz="1600"/>
+                      <a:rPr lang="en-US" sz="1600">
+                        <a:latin typeface="Cambria Math" panose="02040503050406030204" pitchFamily="18" charset="0"/>
+                      </a:rPr>
                       <m:t>=</m:t>
                     </m:r>
                     <m:r>
-                      <a:rPr lang="en-US" sz="1600"/>
+                      <a:rPr lang="en-US" sz="1600">
+                        <a:latin typeface="Cambria Math" panose="02040503050406030204" pitchFamily="18" charset="0"/>
+                      </a:rPr>
                       <m:t>250</m:t>
                     </m:r>
                     <m:r>
@@ -27844,7 +30056,9 @@
                 <a14:m>
                   <m:oMath xmlns:m="http://schemas.openxmlformats.org/officeDocument/2006/math">
                     <m:r>
-                      <a:rPr lang="en-US" sz="1600"/>
+                      <a:rPr lang="en-US" sz="1600">
+                        <a:latin typeface="Cambria Math" panose="02040503050406030204" pitchFamily="18" charset="0"/>
+                      </a:rPr>
                       <m:t>250</m:t>
                     </m:r>
                     <m:r>
@@ -27862,19 +30076,27 @@
                       <m:t>ms</m:t>
                     </m:r>
                     <m:r>
-                      <a:rPr lang="en-US" sz="1600"/>
+                      <a:rPr lang="en-US" sz="1600">
+                        <a:latin typeface="Cambria Math" panose="02040503050406030204" pitchFamily="18" charset="0"/>
+                      </a:rPr>
                       <m:t>+</m:t>
                     </m:r>
                     <m:r>
-                      <a:rPr lang="en-US" sz="1600"/>
+                      <a:rPr lang="en-US" sz="1600">
+                        <a:latin typeface="Cambria Math" panose="02040503050406030204" pitchFamily="18" charset="0"/>
+                      </a:rPr>
                       <m:t>0</m:t>
                     </m:r>
                     <m:r>
-                      <a:rPr lang="en-US" sz="1600"/>
+                      <a:rPr lang="en-US" sz="1600">
+                        <a:latin typeface="Cambria Math" panose="02040503050406030204" pitchFamily="18" charset="0"/>
+                      </a:rPr>
                       <m:t>.</m:t>
                     </m:r>
                     <m:r>
-                      <a:rPr lang="en-US" sz="1600"/>
+                      <a:rPr lang="en-US" sz="1600">
+                        <a:latin typeface="Cambria Math" panose="02040503050406030204" pitchFamily="18" charset="0"/>
+                      </a:rPr>
                       <m:t>62</m:t>
                     </m:r>
                     <m:r>
@@ -27892,7 +30114,9 @@
                       <m:t>ms</m:t>
                     </m:r>
                     <m:r>
-                      <a:rPr lang="en-US" sz="1600"/>
+                      <a:rPr lang="en-US" sz="1600">
+                        <a:latin typeface="Cambria Math" panose="02040503050406030204" pitchFamily="18" charset="0"/>
+                      </a:rPr>
                       <m:t>=</m:t>
                     </m:r>
                   </m:oMath>
@@ -27942,7 +30166,7 @@
             </p:txBody>
           </p:sp>
         </mc:Choice>
-        <mc:Fallback>
+        <mc:Fallback xmlns="">
           <p:sp>
             <p:nvSpPr>
               <p:cNvPr id="3" name="Content Placeholder 2">
@@ -28021,6 +30245,36 @@
           </a:p>
         </p:txBody>
       </p:sp>
+      <p:sp>
+        <p:nvSpPr>
+          <p:cNvPr id="4" name="Slide Number Placeholder 3">
+            <a:extLst>
+              <a:ext uri="{FF2B5EF4-FFF2-40B4-BE49-F238E27FC236}">
+                <a16:creationId xmlns:a16="http://schemas.microsoft.com/office/drawing/2014/main" id="{0537A2E6-0625-B3BE-988B-AD901B65A264}"/>
+              </a:ext>
+            </a:extLst>
+          </p:cNvPr>
+          <p:cNvSpPr>
+            <a:spLocks noGrp="1"/>
+          </p:cNvSpPr>
+          <p:nvPr>
+            <p:ph type="sldNum" sz="quarter" idx="4"/>
+          </p:nvPr>
+        </p:nvSpPr>
+        <p:spPr/>
+        <p:txBody>
+          <a:bodyPr/>
+          <a:lstStyle/>
+          <a:p>
+            <a:fld id="{C4204591-24BD-A542-B9D5-F8D8A88D2FEE}" type="slidenum">
+              <a:rPr lang="en-US" smtClean="0"/>
+              <a:pPr/>
+              <a:t>6</a:t>
+            </a:fld>
+            <a:endParaRPr lang="en-US" dirty="0"/>
+          </a:p>
+        </p:txBody>
+      </p:sp>
     </p:spTree>
     <p:extLst>
       <p:ext uri="{BB962C8B-B14F-4D97-AF65-F5344CB8AC3E}">
@@ -28092,8 +30346,8 @@
           </a:p>
         </p:txBody>
       </p:sp>
-      <mc:AlternateContent xmlns:mc="http://schemas.openxmlformats.org/markup-compatibility/2006">
-        <mc:Choice xmlns:a14="http://schemas.microsoft.com/office/drawing/2010/main" Requires="a14">
+      <mc:AlternateContent xmlns:mc="http://schemas.openxmlformats.org/markup-compatibility/2006" xmlns:a14="http://schemas.microsoft.com/office/drawing/2010/main">
+        <mc:Choice Requires="a14">
           <p:sp>
             <p:nvSpPr>
               <p:cNvPr id="3" name="Content Placeholder 2">
@@ -28129,28 +30383,38 @@
                 <a14:m>
                   <m:oMath xmlns:m="http://schemas.openxmlformats.org/officeDocument/2006/math">
                     <m:r>
-                      <a:rPr lang="en-US"/>
+                      <a:rPr lang="en-US">
+                        <a:latin typeface="Cambria Math" panose="02040503050406030204" pitchFamily="18" charset="0"/>
+                      </a:rPr>
                       <m:t>3</m:t>
                     </m:r>
                     <m:r>
-                      <a:rPr lang="en-US"/>
+                      <a:rPr lang="en-US">
+                        <a:latin typeface="Cambria Math" panose="02040503050406030204" pitchFamily="18" charset="0"/>
+                      </a:rPr>
                       <m:t>×</m:t>
                     </m:r>
                     <m:sSup>
                       <m:sSupPr>
                         <m:ctrlPr>
-                          <a:rPr lang="ar-AE" i="1"/>
+                          <a:rPr lang="ar-AE" i="1">
+                            <a:latin typeface="Cambria Math" panose="02040503050406030204" pitchFamily="18" charset="0"/>
+                          </a:rPr>
                         </m:ctrlPr>
                       </m:sSupPr>
                       <m:e>
                         <m:r>
-                          <a:rPr lang="ar-AE"/>
+                          <a:rPr lang="ar-AE">
+                            <a:latin typeface="Cambria Math" panose="02040503050406030204" pitchFamily="18" charset="0"/>
+                          </a:rPr>
                           <m:t>10</m:t>
                         </m:r>
                       </m:e>
                       <m:sup>
                         <m:r>
-                          <a:rPr lang="ar-AE"/>
+                          <a:rPr lang="ar-AE">
+                            <a:latin typeface="Cambria Math" panose="02040503050406030204" pitchFamily="18" charset="0"/>
+                          </a:rPr>
                           <m:t>8</m:t>
                         </m:r>
                       </m:sup>
@@ -28173,7 +30437,7 @@
             </p:txBody>
           </p:sp>
         </mc:Choice>
-        <mc:Fallback>
+        <mc:Fallback xmlns="">
           <p:sp>
             <p:nvSpPr>
               <p:cNvPr id="3" name="Content Placeholder 2">
@@ -28217,8 +30481,8 @@
           </p:sp>
         </mc:Fallback>
       </mc:AlternateContent>
-      <mc:AlternateContent xmlns:mc="http://schemas.openxmlformats.org/markup-compatibility/2006">
-        <mc:Choice xmlns:p14="http://schemas.microsoft.com/office/powerpoint/2010/main" Requires="p14">
+      <mc:AlternateContent xmlns:mc="http://schemas.openxmlformats.org/markup-compatibility/2006" xmlns:p14="http://schemas.microsoft.com/office/powerpoint/2010/main">
+        <mc:Choice Requires="p14">
           <p:contentPart p14:bwMode="auto" r:id="rId3">
             <p14:nvContentPartPr>
               <p14:cNvPr id="8" name="Ink 7">
@@ -28237,7 +30501,7 @@
             </p14:xfrm>
           </p:contentPart>
         </mc:Choice>
-        <mc:Fallback>
+        <mc:Fallback xmlns="">
           <p:pic>
             <p:nvPicPr>
               <p:cNvPr id="8" name="Ink 7">
@@ -28268,8 +30532,8 @@
           </p:pic>
         </mc:Fallback>
       </mc:AlternateContent>
-      <mc:AlternateContent xmlns:mc="http://schemas.openxmlformats.org/markup-compatibility/2006">
-        <mc:Choice xmlns:p14="http://schemas.microsoft.com/office/powerpoint/2010/main" Requires="p14">
+      <mc:AlternateContent xmlns:mc="http://schemas.openxmlformats.org/markup-compatibility/2006" xmlns:p14="http://schemas.microsoft.com/office/powerpoint/2010/main">
+        <mc:Choice Requires="p14">
           <p:contentPart p14:bwMode="auto" r:id="rId5">
             <p14:nvContentPartPr>
               <p14:cNvPr id="9" name="Ink 8">
@@ -28288,7 +30552,7 @@
             </p14:xfrm>
           </p:contentPart>
         </mc:Choice>
-        <mc:Fallback>
+        <mc:Fallback xmlns="">
           <p:pic>
             <p:nvPicPr>
               <p:cNvPr id="9" name="Ink 8">
@@ -28361,6 +30625,36 @@
           <a:lstStyle/>
           <a:p>
             <a:endParaRPr lang="en-US" sz="1050"/>
+          </a:p>
+        </p:txBody>
+      </p:sp>
+      <p:sp>
+        <p:nvSpPr>
+          <p:cNvPr id="5" name="Slide Number Placeholder 4">
+            <a:extLst>
+              <a:ext uri="{FF2B5EF4-FFF2-40B4-BE49-F238E27FC236}">
+                <a16:creationId xmlns:a16="http://schemas.microsoft.com/office/drawing/2014/main" id="{0FEDD5B0-BCC5-0862-4680-0C8B4874BDF3}"/>
+              </a:ext>
+            </a:extLst>
+          </p:cNvPr>
+          <p:cNvSpPr>
+            <a:spLocks noGrp="1"/>
+          </p:cNvSpPr>
+          <p:nvPr>
+            <p:ph type="sldNum" sz="quarter" idx="4"/>
+          </p:nvPr>
+        </p:nvSpPr>
+        <p:spPr/>
+        <p:txBody>
+          <a:bodyPr/>
+          <a:lstStyle/>
+          <a:p>
+            <a:fld id="{C4204591-24BD-A542-B9D5-F8D8A88D2FEE}" type="slidenum">
+              <a:rPr lang="en-US" smtClean="0"/>
+              <a:pPr/>
+              <a:t>7</a:t>
+            </a:fld>
+            <a:endParaRPr lang="en-US" dirty="0"/>
           </a:p>
         </p:txBody>
       </p:sp>
@@ -28455,13 +30749,13 @@
             </p:nvSpPr>
             <p:spPr>
               <a:xfrm>
-                <a:off x="0" y="1009833"/>
+                <a:off x="0" y="853367"/>
                 <a:ext cx="8816196" cy="4133667"/>
               </a:xfrm>
             </p:spPr>
             <p:txBody>
               <a:bodyPr>
-                <a:normAutofit fontScale="92500" lnSpcReduction="10000"/>
+                <a:normAutofit fontScale="92500"/>
               </a:bodyPr>
               <a:lstStyle/>
               <a:p>
@@ -28484,7 +30778,9 @@
                       <m:t> </m:t>
                     </m:r>
                     <m:r>
-                      <a:rPr lang="en-US"/>
+                      <a:rPr lang="en-US">
+                        <a:latin typeface="Cambria Math" panose="02040503050406030204" pitchFamily="18" charset="0"/>
+                      </a:rPr>
                       <m:t>1000</m:t>
                     </m:r>
                   </m:oMath>
@@ -28496,8 +30792,16 @@
                 <a14:m>
                   <m:oMath xmlns:m="http://schemas.openxmlformats.org/officeDocument/2006/math">
                     <m:r>
-                      <a:rPr lang="en-US"/>
-                      <m:t>=8000</m:t>
+                      <a:rPr lang="en-US">
+                        <a:latin typeface="Cambria Math" panose="02040503050406030204" pitchFamily="18" charset="0"/>
+                      </a:rPr>
+                      <m:t>=</m:t>
+                    </m:r>
+                    <m:r>
+                      <a:rPr lang="en-US">
+                        <a:latin typeface="Cambria Math" panose="02040503050406030204" pitchFamily="18" charset="0"/>
+                      </a:rPr>
+                      <m:t>8000</m:t>
                     </m:r>
                   </m:oMath>
                 </a14:m>
@@ -28520,7 +30824,9 @@
                       <m:t> </m:t>
                     </m:r>
                     <m:r>
-                      <a:rPr lang="en-US"/>
+                      <a:rPr lang="en-US">
+                        <a:latin typeface="Cambria Math" panose="02040503050406030204" pitchFamily="18" charset="0"/>
+                      </a:rPr>
                       <m:t>100</m:t>
                     </m:r>
                   </m:oMath>
@@ -28532,32 +30838,44 @@
                 <a14:m>
                   <m:oMath xmlns:m="http://schemas.openxmlformats.org/officeDocument/2006/math">
                     <m:r>
-                      <a:rPr lang="en-US"/>
+                      <a:rPr lang="en-US">
+                        <a:latin typeface="Cambria Math" panose="02040503050406030204" pitchFamily="18" charset="0"/>
+                      </a:rPr>
                       <m:t>=</m:t>
                     </m:r>
                     <m:r>
-                      <a:rPr lang="en-US"/>
+                      <a:rPr lang="en-US">
+                        <a:latin typeface="Cambria Math" panose="02040503050406030204" pitchFamily="18" charset="0"/>
+                      </a:rPr>
                       <m:t>100</m:t>
                     </m:r>
                     <m:r>
-                      <a:rPr lang="en-US"/>
+                      <a:rPr lang="en-US">
+                        <a:latin typeface="Cambria Math" panose="02040503050406030204" pitchFamily="18" charset="0"/>
+                      </a:rPr>
                       <m:t>×</m:t>
                     </m:r>
                     <m:sSup>
                       <m:sSupPr>
                         <m:ctrlPr>
-                          <a:rPr lang="ar-AE" i="1"/>
+                          <a:rPr lang="ar-AE" i="1">
+                            <a:latin typeface="Cambria Math" panose="02040503050406030204" pitchFamily="18" charset="0"/>
+                          </a:rPr>
                         </m:ctrlPr>
                       </m:sSupPr>
                       <m:e>
                         <m:r>
-                          <a:rPr lang="ar-AE"/>
+                          <a:rPr lang="ar-AE">
+                            <a:latin typeface="Cambria Math" panose="02040503050406030204" pitchFamily="18" charset="0"/>
+                          </a:rPr>
                           <m:t>10</m:t>
                         </m:r>
                       </m:e>
                       <m:sup>
                         <m:r>
-                          <a:rPr lang="ar-AE"/>
+                          <a:rPr lang="ar-AE">
+                            <a:latin typeface="Cambria Math" panose="02040503050406030204" pitchFamily="18" charset="0"/>
+                          </a:rPr>
                           <m:t>6</m:t>
                         </m:r>
                       </m:sup>
@@ -28575,62 +30893,84 @@
                     <m:sSub>
                       <m:sSubPr>
                         <m:ctrlPr>
-                          <a:rPr lang="ar-AE"/>
+                          <a:rPr lang="ar-AE" i="1">
+                            <a:latin typeface="Cambria Math" panose="02040503050406030204" pitchFamily="18" charset="0"/>
+                          </a:rPr>
                         </m:ctrlPr>
                       </m:sSubPr>
                       <m:e>
                         <m:r>
-                          <a:rPr lang="ar-AE" i="1"/>
+                          <a:rPr lang="ar-AE" i="1">
+                            <a:latin typeface="Cambria Math" panose="02040503050406030204" pitchFamily="18" charset="0"/>
+                          </a:rPr>
                           <m:t>𝑡</m:t>
                         </m:r>
                       </m:e>
                       <m:sub>
                         <m:r>
-                          <a:rPr lang="ar-AE" i="1"/>
+                          <a:rPr lang="ar-AE" i="1">
+                            <a:latin typeface="Cambria Math" panose="02040503050406030204" pitchFamily="18" charset="0"/>
+                          </a:rPr>
                           <m:t>𝑡𝑥</m:t>
                         </m:r>
                       </m:sub>
                     </m:sSub>
                     <m:r>
-                      <a:rPr lang="ar-AE"/>
+                      <a:rPr lang="ar-AE">
+                        <a:latin typeface="Cambria Math" panose="02040503050406030204" pitchFamily="18" charset="0"/>
+                      </a:rPr>
                       <m:t>=</m:t>
                     </m:r>
                     <m:f>
                       <m:fPr>
                         <m:ctrlPr>
-                          <a:rPr lang="ar-AE" i="1"/>
+                          <a:rPr lang="ar-AE" i="1">
+                            <a:latin typeface="Cambria Math" panose="02040503050406030204" pitchFamily="18" charset="0"/>
+                          </a:rPr>
                         </m:ctrlPr>
                       </m:fPr>
                       <m:num>
                         <m:r>
-                          <a:rPr lang="ar-AE"/>
+                          <a:rPr lang="ar-AE">
+                            <a:latin typeface="Cambria Math" panose="02040503050406030204" pitchFamily="18" charset="0"/>
+                          </a:rPr>
                           <m:t>8000</m:t>
                         </m:r>
                       </m:num>
                       <m:den>
                         <m:r>
-                          <a:rPr lang="ar-AE"/>
+                          <a:rPr lang="ar-AE">
+                            <a:latin typeface="Cambria Math" panose="02040503050406030204" pitchFamily="18" charset="0"/>
+                          </a:rPr>
                           <m:t>100</m:t>
                         </m:r>
                         <m:r>
-                          <a:rPr lang="ar-AE"/>
+                          <a:rPr lang="ar-AE">
+                            <a:latin typeface="Cambria Math" panose="02040503050406030204" pitchFamily="18" charset="0"/>
+                          </a:rPr>
                           <m:t>×</m:t>
                         </m:r>
                         <m:sSup>
                           <m:sSupPr>
                             <m:ctrlPr>
-                              <a:rPr lang="ar-AE" i="1"/>
+                              <a:rPr lang="ar-AE" i="1">
+                                <a:latin typeface="Cambria Math" panose="02040503050406030204" pitchFamily="18" charset="0"/>
+                              </a:rPr>
                             </m:ctrlPr>
                           </m:sSupPr>
                           <m:e>
                             <m:r>
-                              <a:rPr lang="ar-AE"/>
+                              <a:rPr lang="ar-AE">
+                                <a:latin typeface="Cambria Math" panose="02040503050406030204" pitchFamily="18" charset="0"/>
+                              </a:rPr>
                               <m:t>10</m:t>
                             </m:r>
                           </m:e>
                           <m:sup>
                             <m:r>
-                              <a:rPr lang="ar-AE"/>
+                              <a:rPr lang="ar-AE">
+                                <a:latin typeface="Cambria Math" panose="02040503050406030204" pitchFamily="18" charset="0"/>
+                              </a:rPr>
                               <m:t>6</m:t>
                             </m:r>
                           </m:sup>
@@ -28638,36 +30978,50 @@
                       </m:den>
                     </m:f>
                     <m:r>
-                      <a:rPr lang="ar-AE"/>
+                      <a:rPr lang="ar-AE">
+                        <a:latin typeface="Cambria Math" panose="02040503050406030204" pitchFamily="18" charset="0"/>
+                      </a:rPr>
                       <m:t>=</m:t>
                     </m:r>
                     <m:r>
-                      <a:rPr lang="ar-AE"/>
+                      <a:rPr lang="ar-AE">
+                        <a:latin typeface="Cambria Math" panose="02040503050406030204" pitchFamily="18" charset="0"/>
+                      </a:rPr>
                       <m:t>8</m:t>
                     </m:r>
                     <m:r>
-                      <a:rPr lang="ar-AE"/>
+                      <a:rPr lang="ar-AE">
+                        <a:latin typeface="Cambria Math" panose="02040503050406030204" pitchFamily="18" charset="0"/>
+                      </a:rPr>
                       <m:t>×</m:t>
                     </m:r>
                     <m:sSup>
                       <m:sSupPr>
                         <m:ctrlPr>
-                          <a:rPr lang="ar-AE" i="1"/>
+                          <a:rPr lang="ar-AE" i="1">
+                            <a:latin typeface="Cambria Math" panose="02040503050406030204" pitchFamily="18" charset="0"/>
+                          </a:rPr>
                         </m:ctrlPr>
                       </m:sSupPr>
                       <m:e>
                         <m:r>
-                          <a:rPr lang="ar-AE"/>
+                          <a:rPr lang="ar-AE">
+                            <a:latin typeface="Cambria Math" panose="02040503050406030204" pitchFamily="18" charset="0"/>
+                          </a:rPr>
                           <m:t>10</m:t>
                         </m:r>
                       </m:e>
                       <m:sup>
                         <m:r>
-                          <a:rPr lang="ar-AE"/>
+                          <a:rPr lang="ar-AE">
+                            <a:latin typeface="Cambria Math" panose="02040503050406030204" pitchFamily="18" charset="0"/>
+                          </a:rPr>
                           <m:t>−</m:t>
                         </m:r>
                         <m:r>
-                          <a:rPr lang="ar-AE"/>
+                          <a:rPr lang="ar-AE">
+                            <a:latin typeface="Cambria Math" panose="02040503050406030204" pitchFamily="18" charset="0"/>
+                          </a:rPr>
                           <m:t>5</m:t>
                         </m:r>
                       </m:sup>
@@ -28687,19 +31041,27 @@
                       <m:t>s</m:t>
                     </m:r>
                     <m:r>
-                      <a:rPr lang="en-US"/>
+                      <a:rPr lang="en-US">
+                        <a:latin typeface="Cambria Math" panose="02040503050406030204" pitchFamily="18" charset="0"/>
+                      </a:rPr>
                       <m:t>=</m:t>
                     </m:r>
                     <m:r>
-                      <a:rPr lang="en-US"/>
+                      <a:rPr lang="en-US">
+                        <a:latin typeface="Cambria Math" panose="02040503050406030204" pitchFamily="18" charset="0"/>
+                      </a:rPr>
                       <m:t>0</m:t>
                     </m:r>
                     <m:r>
-                      <a:rPr lang="en-US"/>
+                      <a:rPr lang="en-US">
+                        <a:latin typeface="Cambria Math" panose="02040503050406030204" pitchFamily="18" charset="0"/>
+                      </a:rPr>
                       <m:t>.</m:t>
                     </m:r>
                     <m:r>
-                      <a:rPr lang="en-US"/>
+                      <a:rPr lang="en-US">
+                        <a:latin typeface="Cambria Math" panose="02040503050406030204" pitchFamily="18" charset="0"/>
+                      </a:rPr>
                       <m:t>08</m:t>
                     </m:r>
                     <m:r>
@@ -28740,7 +31102,9 @@
                       <m:t> </m:t>
                     </m:r>
                     <m:r>
-                      <a:rPr lang="en-US"/>
+                      <a:rPr lang="en-US">
+                        <a:latin typeface="Cambria Math" panose="02040503050406030204" pitchFamily="18" charset="0"/>
+                      </a:rPr>
                       <m:t>2100</m:t>
                     </m:r>
                   </m:oMath>
@@ -28752,40 +31116,56 @@
                 <a14:m>
                   <m:oMath xmlns:m="http://schemas.openxmlformats.org/officeDocument/2006/math">
                     <m:r>
-                      <a:rPr lang="en-US"/>
+                      <a:rPr lang="en-US">
+                        <a:latin typeface="Cambria Math" panose="02040503050406030204" pitchFamily="18" charset="0"/>
+                      </a:rPr>
                       <m:t>=</m:t>
                     </m:r>
                     <m:r>
-                      <a:rPr lang="en-US"/>
+                      <a:rPr lang="en-US">
+                        <a:latin typeface="Cambria Math" panose="02040503050406030204" pitchFamily="18" charset="0"/>
+                      </a:rPr>
                       <m:t>2</m:t>
                     </m:r>
                     <m:r>
-                      <a:rPr lang="en-US"/>
+                      <a:rPr lang="en-US">
+                        <a:latin typeface="Cambria Math" panose="02040503050406030204" pitchFamily="18" charset="0"/>
+                      </a:rPr>
                       <m:t>.</m:t>
                     </m:r>
                     <m:r>
-                      <a:rPr lang="en-US"/>
+                      <a:rPr lang="en-US">
+                        <a:latin typeface="Cambria Math" panose="02040503050406030204" pitchFamily="18" charset="0"/>
+                      </a:rPr>
                       <m:t>1</m:t>
                     </m:r>
                     <m:r>
-                      <a:rPr lang="en-US"/>
+                      <a:rPr lang="en-US">
+                        <a:latin typeface="Cambria Math" panose="02040503050406030204" pitchFamily="18" charset="0"/>
+                      </a:rPr>
                       <m:t>×</m:t>
                     </m:r>
                     <m:sSup>
                       <m:sSupPr>
                         <m:ctrlPr>
-                          <a:rPr lang="ar-AE" i="1"/>
+                          <a:rPr lang="ar-AE" i="1">
+                            <a:latin typeface="Cambria Math" panose="02040503050406030204" pitchFamily="18" charset="0"/>
+                          </a:rPr>
                         </m:ctrlPr>
                       </m:sSupPr>
                       <m:e>
                         <m:r>
-                          <a:rPr lang="ar-AE"/>
+                          <a:rPr lang="ar-AE">
+                            <a:latin typeface="Cambria Math" panose="02040503050406030204" pitchFamily="18" charset="0"/>
+                          </a:rPr>
                           <m:t>10</m:t>
                         </m:r>
                       </m:e>
                       <m:sup>
                         <m:r>
-                          <a:rPr lang="ar-AE"/>
+                          <a:rPr lang="ar-AE">
+                            <a:latin typeface="Cambria Math" panose="02040503050406030204" pitchFamily="18" charset="0"/>
+                          </a:rPr>
                           <m:t>6</m:t>
                         </m:r>
                       </m:sup>
@@ -28811,28 +31191,38 @@
                       <m:t> </m:t>
                     </m:r>
                     <m:r>
-                      <a:rPr lang="en-US"/>
+                      <a:rPr lang="en-US">
+                        <a:latin typeface="Cambria Math" panose="02040503050406030204" pitchFamily="18" charset="0"/>
+                      </a:rPr>
                       <m:t>3</m:t>
                     </m:r>
                     <m:r>
-                      <a:rPr lang="en-US"/>
+                      <a:rPr lang="en-US">
+                        <a:latin typeface="Cambria Math" panose="02040503050406030204" pitchFamily="18" charset="0"/>
+                      </a:rPr>
                       <m:t>×</m:t>
                     </m:r>
                     <m:sSup>
                       <m:sSupPr>
                         <m:ctrlPr>
-                          <a:rPr lang="ar-AE" i="1"/>
+                          <a:rPr lang="ar-AE" i="1">
+                            <a:latin typeface="Cambria Math" panose="02040503050406030204" pitchFamily="18" charset="0"/>
+                          </a:rPr>
                         </m:ctrlPr>
                       </m:sSupPr>
                       <m:e>
                         <m:r>
-                          <a:rPr lang="ar-AE"/>
+                          <a:rPr lang="ar-AE">
+                            <a:latin typeface="Cambria Math" panose="02040503050406030204" pitchFamily="18" charset="0"/>
+                          </a:rPr>
                           <m:t>10</m:t>
                         </m:r>
                       </m:e>
                       <m:sup>
                         <m:r>
-                          <a:rPr lang="ar-AE"/>
+                          <a:rPr lang="ar-AE">
+                            <a:latin typeface="Cambria Math" panose="02040503050406030204" pitchFamily="18" charset="0"/>
+                          </a:rPr>
                           <m:t>8</m:t>
                         </m:r>
                       </m:sup>
@@ -28850,64 +31240,88 @@
                     <m:sSub>
                       <m:sSubPr>
                         <m:ctrlPr>
-                          <a:rPr lang="ar-AE"/>
+                          <a:rPr lang="ar-AE" i="1">
+                            <a:latin typeface="Cambria Math" panose="02040503050406030204" pitchFamily="18" charset="0"/>
+                          </a:rPr>
                         </m:ctrlPr>
                       </m:sSubPr>
                       <m:e>
                         <m:r>
-                          <a:rPr lang="ar-AE" i="1"/>
+                          <a:rPr lang="ar-AE" i="1">
+                            <a:latin typeface="Cambria Math" panose="02040503050406030204" pitchFamily="18" charset="0"/>
+                          </a:rPr>
                           <m:t>𝑡</m:t>
                         </m:r>
                       </m:e>
                       <m:sub>
                         <m:r>
-                          <a:rPr lang="ar-AE" i="1"/>
+                          <a:rPr lang="ar-AE" i="1">
+                            <a:latin typeface="Cambria Math" panose="02040503050406030204" pitchFamily="18" charset="0"/>
+                          </a:rPr>
                           <m:t>𝑝𝑟𝑜𝑝</m:t>
                         </m:r>
                       </m:sub>
                     </m:sSub>
                     <m:r>
-                      <a:rPr lang="ar-AE"/>
+                      <a:rPr lang="ar-AE">
+                        <a:latin typeface="Cambria Math" panose="02040503050406030204" pitchFamily="18" charset="0"/>
+                      </a:rPr>
                       <m:t>=</m:t>
                     </m:r>
                     <m:f>
                       <m:fPr>
                         <m:ctrlPr>
-                          <a:rPr lang="ar-AE" i="1"/>
+                          <a:rPr lang="ar-AE" i="1">
+                            <a:latin typeface="Cambria Math" panose="02040503050406030204" pitchFamily="18" charset="0"/>
+                          </a:rPr>
                         </m:ctrlPr>
                       </m:fPr>
                       <m:num>
                         <m:r>
-                          <a:rPr lang="ar-AE"/>
+                          <a:rPr lang="ar-AE">
+                            <a:latin typeface="Cambria Math" panose="02040503050406030204" pitchFamily="18" charset="0"/>
+                          </a:rPr>
                           <m:t>2</m:t>
                         </m:r>
                         <m:r>
-                          <a:rPr lang="ar-AE"/>
+                          <a:rPr lang="ar-AE">
+                            <a:latin typeface="Cambria Math" panose="02040503050406030204" pitchFamily="18" charset="0"/>
+                          </a:rPr>
                           <m:t>.</m:t>
                         </m:r>
                         <m:r>
-                          <a:rPr lang="ar-AE"/>
+                          <a:rPr lang="ar-AE">
+                            <a:latin typeface="Cambria Math" panose="02040503050406030204" pitchFamily="18" charset="0"/>
+                          </a:rPr>
                           <m:t>1</m:t>
                         </m:r>
                         <m:r>
-                          <a:rPr lang="ar-AE"/>
+                          <a:rPr lang="ar-AE">
+                            <a:latin typeface="Cambria Math" panose="02040503050406030204" pitchFamily="18" charset="0"/>
+                          </a:rPr>
                           <m:t>×</m:t>
                         </m:r>
                         <m:sSup>
                           <m:sSupPr>
                             <m:ctrlPr>
-                              <a:rPr lang="ar-AE" i="1"/>
+                              <a:rPr lang="ar-AE" i="1">
+                                <a:latin typeface="Cambria Math" panose="02040503050406030204" pitchFamily="18" charset="0"/>
+                              </a:rPr>
                             </m:ctrlPr>
                           </m:sSupPr>
                           <m:e>
                             <m:r>
-                              <a:rPr lang="ar-AE"/>
+                              <a:rPr lang="ar-AE">
+                                <a:latin typeface="Cambria Math" panose="02040503050406030204" pitchFamily="18" charset="0"/>
+                              </a:rPr>
                               <m:t>10</m:t>
                             </m:r>
                           </m:e>
                           <m:sup>
                             <m:r>
-                              <a:rPr lang="ar-AE"/>
+                              <a:rPr lang="ar-AE">
+                                <a:latin typeface="Cambria Math" panose="02040503050406030204" pitchFamily="18" charset="0"/>
+                              </a:rPr>
                               <m:t>6</m:t>
                             </m:r>
                           </m:sup>
@@ -28915,28 +31329,38 @@
                       </m:num>
                       <m:den>
                         <m:r>
-                          <a:rPr lang="ar-AE"/>
+                          <a:rPr lang="ar-AE">
+                            <a:latin typeface="Cambria Math" panose="02040503050406030204" pitchFamily="18" charset="0"/>
+                          </a:rPr>
                           <m:t>3</m:t>
                         </m:r>
                         <m:r>
-                          <a:rPr lang="ar-AE"/>
+                          <a:rPr lang="ar-AE">
+                            <a:latin typeface="Cambria Math" panose="02040503050406030204" pitchFamily="18" charset="0"/>
+                          </a:rPr>
                           <m:t>×</m:t>
                         </m:r>
                         <m:sSup>
                           <m:sSupPr>
                             <m:ctrlPr>
-                              <a:rPr lang="ar-AE" i="1"/>
+                              <a:rPr lang="ar-AE" i="1">
+                                <a:latin typeface="Cambria Math" panose="02040503050406030204" pitchFamily="18" charset="0"/>
+                              </a:rPr>
                             </m:ctrlPr>
                           </m:sSupPr>
                           <m:e>
                             <m:r>
-                              <a:rPr lang="ar-AE"/>
+                              <a:rPr lang="ar-AE">
+                                <a:latin typeface="Cambria Math" panose="02040503050406030204" pitchFamily="18" charset="0"/>
+                              </a:rPr>
                               <m:t>10</m:t>
                             </m:r>
                           </m:e>
                           <m:sup>
                             <m:r>
-                              <a:rPr lang="ar-AE"/>
+                              <a:rPr lang="ar-AE">
+                                <a:latin typeface="Cambria Math" panose="02040503050406030204" pitchFamily="18" charset="0"/>
+                              </a:rPr>
                               <m:t>8</m:t>
                             </m:r>
                           </m:sup>
@@ -28944,36 +31368,50 @@
                       </m:den>
                     </m:f>
                     <m:r>
-                      <a:rPr lang="ar-AE"/>
+                      <a:rPr lang="ar-AE">
+                        <a:latin typeface="Cambria Math" panose="02040503050406030204" pitchFamily="18" charset="0"/>
+                      </a:rPr>
                       <m:t>=</m:t>
                     </m:r>
                     <m:r>
-                      <a:rPr lang="ar-AE"/>
+                      <a:rPr lang="ar-AE">
+                        <a:latin typeface="Cambria Math" panose="02040503050406030204" pitchFamily="18" charset="0"/>
+                      </a:rPr>
                       <m:t>7</m:t>
                     </m:r>
                     <m:r>
-                      <a:rPr lang="ar-AE"/>
+                      <a:rPr lang="ar-AE">
+                        <a:latin typeface="Cambria Math" panose="02040503050406030204" pitchFamily="18" charset="0"/>
+                      </a:rPr>
                       <m:t>×</m:t>
                     </m:r>
                     <m:sSup>
                       <m:sSupPr>
                         <m:ctrlPr>
-                          <a:rPr lang="ar-AE" i="1"/>
+                          <a:rPr lang="ar-AE" i="1">
+                            <a:latin typeface="Cambria Math" panose="02040503050406030204" pitchFamily="18" charset="0"/>
+                          </a:rPr>
                         </m:ctrlPr>
                       </m:sSupPr>
                       <m:e>
                         <m:r>
-                          <a:rPr lang="ar-AE"/>
+                          <a:rPr lang="ar-AE">
+                            <a:latin typeface="Cambria Math" panose="02040503050406030204" pitchFamily="18" charset="0"/>
+                          </a:rPr>
                           <m:t>10</m:t>
                         </m:r>
                       </m:e>
                       <m:sup>
                         <m:r>
-                          <a:rPr lang="ar-AE"/>
+                          <a:rPr lang="ar-AE">
+                            <a:latin typeface="Cambria Math" panose="02040503050406030204" pitchFamily="18" charset="0"/>
+                          </a:rPr>
                           <m:t>−</m:t>
                         </m:r>
                         <m:r>
-                          <a:rPr lang="ar-AE"/>
+                          <a:rPr lang="ar-AE">
+                            <a:latin typeface="Cambria Math" panose="02040503050406030204" pitchFamily="18" charset="0"/>
+                          </a:rPr>
                           <m:t>3</m:t>
                         </m:r>
                       </m:sup>
@@ -28993,19 +31431,27 @@
                       <m:t>s</m:t>
                     </m:r>
                     <m:r>
-                      <a:rPr lang="en-US"/>
+                      <a:rPr lang="en-US">
+                        <a:latin typeface="Cambria Math" panose="02040503050406030204" pitchFamily="18" charset="0"/>
+                      </a:rPr>
                       <m:t>=</m:t>
                     </m:r>
                     <m:r>
-                      <a:rPr lang="en-US"/>
+                      <a:rPr lang="en-US">
+                        <a:latin typeface="Cambria Math" panose="02040503050406030204" pitchFamily="18" charset="0"/>
+                      </a:rPr>
                       <m:t>7</m:t>
                     </m:r>
                     <m:r>
-                      <a:rPr lang="en-US"/>
+                      <a:rPr lang="en-US">
+                        <a:latin typeface="Cambria Math" panose="02040503050406030204" pitchFamily="18" charset="0"/>
+                      </a:rPr>
                       <m:t>.</m:t>
                     </m:r>
                     <m:r>
-                      <a:rPr lang="en-US"/>
+                      <a:rPr lang="en-US">
+                        <a:latin typeface="Cambria Math" panose="02040503050406030204" pitchFamily="18" charset="0"/>
+                      </a:rPr>
                       <m:t>00</m:t>
                     </m:r>
                     <m:r>
@@ -29038,114 +31484,160 @@
                     <m:sSub>
                       <m:sSubPr>
                         <m:ctrlPr>
-                          <a:rPr lang="ar-AE"/>
+                          <a:rPr lang="ar-AE" i="1">
+                            <a:latin typeface="Cambria Math" panose="02040503050406030204" pitchFamily="18" charset="0"/>
+                          </a:rPr>
                         </m:ctrlPr>
                       </m:sSubPr>
                       <m:e>
                         <m:r>
-                          <a:rPr lang="ar-AE" i="1"/>
+                          <a:rPr lang="ar-AE" i="1">
+                            <a:latin typeface="Cambria Math" panose="02040503050406030204" pitchFamily="18" charset="0"/>
+                          </a:rPr>
                           <m:t>𝑡</m:t>
                         </m:r>
                       </m:e>
                       <m:sub>
                         <m:r>
-                          <a:rPr lang="ar-AE" i="1"/>
+                          <a:rPr lang="ar-AE" i="1">
+                            <a:latin typeface="Cambria Math" panose="02040503050406030204" pitchFamily="18" charset="0"/>
+                          </a:rPr>
                           <m:t>𝑡𝑜𝑡𝑎𝑙</m:t>
                         </m:r>
                       </m:sub>
                     </m:sSub>
                     <m:r>
-                      <a:rPr lang="ar-AE"/>
+                      <a:rPr lang="ar-AE">
+                        <a:latin typeface="Cambria Math" panose="02040503050406030204" pitchFamily="18" charset="0"/>
+                      </a:rPr>
                       <m:t>=</m:t>
                     </m:r>
                     <m:sSub>
                       <m:sSubPr>
                         <m:ctrlPr>
-                          <a:rPr lang="ar-AE" i="1"/>
+                          <a:rPr lang="ar-AE" i="1">
+                            <a:latin typeface="Cambria Math" panose="02040503050406030204" pitchFamily="18" charset="0"/>
+                          </a:rPr>
                         </m:ctrlPr>
                       </m:sSubPr>
                       <m:e>
                         <m:r>
-                          <a:rPr lang="ar-AE" i="1"/>
+                          <a:rPr lang="ar-AE" i="1">
+                            <a:latin typeface="Cambria Math" panose="02040503050406030204" pitchFamily="18" charset="0"/>
+                          </a:rPr>
                           <m:t>𝑡</m:t>
                         </m:r>
                       </m:e>
                       <m:sub>
                         <m:r>
-                          <a:rPr lang="ar-AE" i="1"/>
+                          <a:rPr lang="ar-AE" i="1">
+                            <a:latin typeface="Cambria Math" panose="02040503050406030204" pitchFamily="18" charset="0"/>
+                          </a:rPr>
                           <m:t>𝑡𝑥</m:t>
                         </m:r>
                       </m:sub>
                     </m:sSub>
                     <m:r>
-                      <a:rPr lang="ar-AE"/>
+                      <a:rPr lang="ar-AE">
+                        <a:latin typeface="Cambria Math" panose="02040503050406030204" pitchFamily="18" charset="0"/>
+                      </a:rPr>
                       <m:t>+</m:t>
                     </m:r>
                     <m:sSub>
                       <m:sSubPr>
                         <m:ctrlPr>
-                          <a:rPr lang="ar-AE" i="1"/>
+                          <a:rPr lang="ar-AE" i="1">
+                            <a:latin typeface="Cambria Math" panose="02040503050406030204" pitchFamily="18" charset="0"/>
+                          </a:rPr>
                         </m:ctrlPr>
                       </m:sSubPr>
                       <m:e>
                         <m:r>
-                          <a:rPr lang="ar-AE" i="1"/>
+                          <a:rPr lang="ar-AE" i="1">
+                            <a:latin typeface="Cambria Math" panose="02040503050406030204" pitchFamily="18" charset="0"/>
+                          </a:rPr>
                           <m:t>𝑡</m:t>
                         </m:r>
                       </m:e>
                       <m:sub>
                         <m:r>
-                          <a:rPr lang="ar-AE" i="1"/>
+                          <a:rPr lang="ar-AE" i="1">
+                            <a:latin typeface="Cambria Math" panose="02040503050406030204" pitchFamily="18" charset="0"/>
+                          </a:rPr>
                           <m:t>𝑝𝑟𝑜𝑝</m:t>
                         </m:r>
                       </m:sub>
                     </m:sSub>
                     <m:r>
-                      <a:rPr lang="ar-AE"/>
+                      <a:rPr lang="ar-AE">
+                        <a:latin typeface="Cambria Math" panose="02040503050406030204" pitchFamily="18" charset="0"/>
+                      </a:rPr>
                       <m:t>=</m:t>
                     </m:r>
                     <m:r>
-                      <a:rPr lang="ar-AE"/>
+                      <a:rPr lang="ar-AE">
+                        <a:latin typeface="Cambria Math" panose="02040503050406030204" pitchFamily="18" charset="0"/>
+                      </a:rPr>
                       <m:t>0</m:t>
                     </m:r>
                     <m:r>
-                      <a:rPr lang="ar-AE"/>
+                      <a:rPr lang="ar-AE">
+                        <a:latin typeface="Cambria Math" panose="02040503050406030204" pitchFamily="18" charset="0"/>
+                      </a:rPr>
                       <m:t>.</m:t>
                     </m:r>
                     <m:r>
-                      <a:rPr lang="ar-AE"/>
+                      <a:rPr lang="ar-AE">
+                        <a:latin typeface="Cambria Math" panose="02040503050406030204" pitchFamily="18" charset="0"/>
+                      </a:rPr>
                       <m:t>08</m:t>
                     </m:r>
                     <m:r>
-                      <a:rPr lang="ar-AE"/>
+                      <a:rPr lang="ar-AE">
+                        <a:latin typeface="Cambria Math" panose="02040503050406030204" pitchFamily="18" charset="0"/>
+                      </a:rPr>
                       <m:t>+</m:t>
                     </m:r>
                     <m:r>
-                      <a:rPr lang="ar-AE"/>
+                      <a:rPr lang="ar-AE">
+                        <a:latin typeface="Cambria Math" panose="02040503050406030204" pitchFamily="18" charset="0"/>
+                      </a:rPr>
                       <m:t>7</m:t>
                     </m:r>
                     <m:r>
-                      <a:rPr lang="ar-AE"/>
+                      <a:rPr lang="ar-AE">
+                        <a:latin typeface="Cambria Math" panose="02040503050406030204" pitchFamily="18" charset="0"/>
+                      </a:rPr>
                       <m:t>.</m:t>
                     </m:r>
                     <m:r>
-                      <a:rPr lang="ar-AE"/>
+                      <a:rPr lang="ar-AE">
+                        <a:latin typeface="Cambria Math" panose="02040503050406030204" pitchFamily="18" charset="0"/>
+                      </a:rPr>
                       <m:t>00</m:t>
                     </m:r>
                     <m:r>
-                      <a:rPr lang="ar-AE"/>
+                      <a:rPr lang="ar-AE">
+                        <a:latin typeface="Cambria Math" panose="02040503050406030204" pitchFamily="18" charset="0"/>
+                      </a:rPr>
                       <m:t>=</m:t>
                     </m:r>
                     <m:r>
-                      <a:rPr lang="ar-AE"/>
+                      <a:rPr lang="ar-AE">
+                        <a:latin typeface="Cambria Math" panose="02040503050406030204" pitchFamily="18" charset="0"/>
+                      </a:rPr>
                       <m:t>7</m:t>
                     </m:r>
                     <m:r>
-                      <a:rPr lang="ar-AE"/>
+                      <a:rPr lang="ar-AE">
+                        <a:latin typeface="Cambria Math" panose="02040503050406030204" pitchFamily="18" charset="0"/>
+                      </a:rPr>
                       <m:t>.</m:t>
                     </m:r>
                     <m:r>
-                      <a:rPr lang="ar-AE"/>
+                      <a:rPr lang="ar-AE">
+                        <a:latin typeface="Cambria Math" panose="02040503050406030204" pitchFamily="18" charset="0"/>
+                      </a:rPr>
                       <m:t>08</m:t>
                     </m:r>
                     <m:r>
@@ -29191,13 +31683,13 @@
             </p:nvSpPr>
             <p:spPr>
               <a:xfrm>
-                <a:off x="0" y="1009833"/>
+                <a:off x="0" y="853367"/>
                 <a:ext cx="8816196" cy="4133667"/>
               </a:xfrm>
               <a:blipFill>
                 <a:blip r:embed="rId2"/>
                 <a:stretch>
-                  <a:fillRect/>
+                  <a:fillRect b="-442"/>
                 </a:stretch>
               </a:blipFill>
             </p:spPr>
@@ -29216,8 +31708,8 @@
           </p:sp>
         </mc:Fallback>
       </mc:AlternateContent>
-      <mc:AlternateContent xmlns:mc="http://schemas.openxmlformats.org/markup-compatibility/2006">
-        <mc:Choice xmlns:p14="http://schemas.microsoft.com/office/powerpoint/2010/main" Requires="p14">
+      <mc:AlternateContent xmlns:mc="http://schemas.openxmlformats.org/markup-compatibility/2006" xmlns:p14="http://schemas.microsoft.com/office/powerpoint/2010/main">
+        <mc:Choice Requires="p14">
           <p:contentPart p14:bwMode="auto" r:id="rId3">
             <p14:nvContentPartPr>
               <p14:cNvPr id="8" name="Ink 7">
@@ -29236,7 +31728,7 @@
             </p14:xfrm>
           </p:contentPart>
         </mc:Choice>
-        <mc:Fallback>
+        <mc:Fallback xmlns="">
           <p:pic>
             <p:nvPicPr>
               <p:cNvPr id="8" name="Ink 7">
@@ -29267,8 +31759,8 @@
           </p:pic>
         </mc:Fallback>
       </mc:AlternateContent>
-      <mc:AlternateContent xmlns:mc="http://schemas.openxmlformats.org/markup-compatibility/2006">
-        <mc:Choice xmlns:p14="http://schemas.microsoft.com/office/powerpoint/2010/main" Requires="p14">
+      <mc:AlternateContent xmlns:mc="http://schemas.openxmlformats.org/markup-compatibility/2006" xmlns:p14="http://schemas.microsoft.com/office/powerpoint/2010/main">
+        <mc:Choice Requires="p14">
           <p:contentPart p14:bwMode="auto" r:id="rId5">
             <p14:nvContentPartPr>
               <p14:cNvPr id="9" name="Ink 8">
@@ -29287,7 +31779,7 @@
             </p14:xfrm>
           </p:contentPart>
         </mc:Choice>
-        <mc:Fallback>
+        <mc:Fallback xmlns="">
           <p:pic>
             <p:nvPicPr>
               <p:cNvPr id="9" name="Ink 8">
@@ -29363,6 +31855,36 @@
           </a:p>
         </p:txBody>
       </p:sp>
+      <p:sp>
+        <p:nvSpPr>
+          <p:cNvPr id="5" name="Slide Number Placeholder 4">
+            <a:extLst>
+              <a:ext uri="{FF2B5EF4-FFF2-40B4-BE49-F238E27FC236}">
+                <a16:creationId xmlns:a16="http://schemas.microsoft.com/office/drawing/2014/main" id="{BB56AF58-0F26-11A5-6EAF-AF9DC70B72FD}"/>
+              </a:ext>
+            </a:extLst>
+          </p:cNvPr>
+          <p:cNvSpPr>
+            <a:spLocks noGrp="1"/>
+          </p:cNvSpPr>
+          <p:nvPr>
+            <p:ph type="sldNum" sz="quarter" idx="4"/>
+          </p:nvPr>
+        </p:nvSpPr>
+        <p:spPr/>
+        <p:txBody>
+          <a:bodyPr/>
+          <a:lstStyle/>
+          <a:p>
+            <a:fld id="{C4204591-24BD-A542-B9D5-F8D8A88D2FEE}" type="slidenum">
+              <a:rPr lang="en-US" smtClean="0"/>
+              <a:pPr/>
+              <a:t>8</a:t>
+            </a:fld>
+            <a:endParaRPr lang="en-US" dirty="0"/>
+          </a:p>
+        </p:txBody>
+      </p:sp>
     </p:spTree>
     <p:extLst>
       <p:ext uri="{BB962C8B-B14F-4D97-AF65-F5344CB8AC3E}">
@@ -29434,8 +31956,8 @@
           </a:p>
         </p:txBody>
       </p:sp>
-      <mc:AlternateContent xmlns:mc="http://schemas.openxmlformats.org/markup-compatibility/2006">
-        <mc:Choice xmlns:a14="http://schemas.microsoft.com/office/drawing/2010/main" Requires="a14">
+      <mc:AlternateContent xmlns:mc="http://schemas.openxmlformats.org/markup-compatibility/2006" xmlns:a14="http://schemas.microsoft.com/office/drawing/2010/main">
+        <mc:Choice Requires="a14">
           <p:sp>
             <p:nvSpPr>
               <p:cNvPr id="3" name="Content Placeholder 2">
@@ -29471,28 +31993,38 @@
                 <a14:m>
                   <m:oMath xmlns:m="http://schemas.openxmlformats.org/officeDocument/2006/math">
                     <m:r>
-                      <a:rPr lang="en-US"/>
+                      <a:rPr lang="en-US">
+                        <a:latin typeface="Cambria Math" panose="02040503050406030204" pitchFamily="18" charset="0"/>
+                      </a:rPr>
                       <m:t>2</m:t>
                     </m:r>
                     <m:r>
-                      <a:rPr lang="en-US"/>
+                      <a:rPr lang="en-US">
+                        <a:latin typeface="Cambria Math" panose="02040503050406030204" pitchFamily="18" charset="0"/>
+                      </a:rPr>
                       <m:t>×</m:t>
                     </m:r>
                     <m:sSup>
                       <m:sSupPr>
                         <m:ctrlPr>
-                          <a:rPr lang="ar-AE" i="1"/>
+                          <a:rPr lang="ar-AE" i="1">
+                            <a:latin typeface="Cambria Math" panose="02040503050406030204" pitchFamily="18" charset="0"/>
+                          </a:rPr>
                         </m:ctrlPr>
                       </m:sSupPr>
                       <m:e>
                         <m:r>
-                          <a:rPr lang="ar-AE"/>
+                          <a:rPr lang="ar-AE">
+                            <a:latin typeface="Cambria Math" panose="02040503050406030204" pitchFamily="18" charset="0"/>
+                          </a:rPr>
                           <m:t>10</m:t>
                         </m:r>
                       </m:e>
                       <m:sup>
                         <m:r>
-                          <a:rPr lang="ar-AE"/>
+                          <a:rPr lang="ar-AE">
+                            <a:latin typeface="Cambria Math" panose="02040503050406030204" pitchFamily="18" charset="0"/>
+                          </a:rPr>
                           <m:t>9</m:t>
                         </m:r>
                       </m:sup>
@@ -29507,7 +32039,7 @@
             </p:txBody>
           </p:sp>
         </mc:Choice>
-        <mc:Fallback>
+        <mc:Fallback xmlns="">
           <p:sp>
             <p:nvSpPr>
               <p:cNvPr id="3" name="Content Placeholder 2">
@@ -29551,8 +32083,8 @@
           </p:sp>
         </mc:Fallback>
       </mc:AlternateContent>
-      <mc:AlternateContent xmlns:mc="http://schemas.openxmlformats.org/markup-compatibility/2006">
-        <mc:Choice xmlns:p14="http://schemas.microsoft.com/office/powerpoint/2010/main" Requires="p14">
+      <mc:AlternateContent xmlns:mc="http://schemas.openxmlformats.org/markup-compatibility/2006" xmlns:p14="http://schemas.microsoft.com/office/powerpoint/2010/main">
+        <mc:Choice Requires="p14">
           <p:contentPart p14:bwMode="auto" r:id="rId3">
             <p14:nvContentPartPr>
               <p14:cNvPr id="8" name="Ink 7">
@@ -29571,7 +32103,7 @@
             </p14:xfrm>
           </p:contentPart>
         </mc:Choice>
-        <mc:Fallback>
+        <mc:Fallback xmlns="">
           <p:pic>
             <p:nvPicPr>
               <p:cNvPr id="8" name="Ink 7">
@@ -29602,8 +32134,8 @@
           </p:pic>
         </mc:Fallback>
       </mc:AlternateContent>
-      <mc:AlternateContent xmlns:mc="http://schemas.openxmlformats.org/markup-compatibility/2006">
-        <mc:Choice xmlns:p14="http://schemas.microsoft.com/office/powerpoint/2010/main" Requires="p14">
+      <mc:AlternateContent xmlns:mc="http://schemas.openxmlformats.org/markup-compatibility/2006" xmlns:p14="http://schemas.microsoft.com/office/powerpoint/2010/main">
+        <mc:Choice Requires="p14">
           <p:contentPart p14:bwMode="auto" r:id="rId5">
             <p14:nvContentPartPr>
               <p14:cNvPr id="9" name="Ink 8">
@@ -29622,7 +32154,7 @@
             </p14:xfrm>
           </p:contentPart>
         </mc:Choice>
-        <mc:Fallback>
+        <mc:Fallback xmlns="">
           <p:pic>
             <p:nvPicPr>
               <p:cNvPr id="9" name="Ink 8">
@@ -29695,6 +32227,36 @@
           <a:lstStyle/>
           <a:p>
             <a:endParaRPr lang="en-US" sz="1050"/>
+          </a:p>
+        </p:txBody>
+      </p:sp>
+      <p:sp>
+        <p:nvSpPr>
+          <p:cNvPr id="5" name="Slide Number Placeholder 4">
+            <a:extLst>
+              <a:ext uri="{FF2B5EF4-FFF2-40B4-BE49-F238E27FC236}">
+                <a16:creationId xmlns:a16="http://schemas.microsoft.com/office/drawing/2014/main" id="{18E420C5-DA48-DC21-0C91-103F706D88A1}"/>
+              </a:ext>
+            </a:extLst>
+          </p:cNvPr>
+          <p:cNvSpPr>
+            <a:spLocks noGrp="1"/>
+          </p:cNvSpPr>
+          <p:nvPr>
+            <p:ph type="sldNum" sz="quarter" idx="4"/>
+          </p:nvPr>
+        </p:nvSpPr>
+        <p:spPr/>
+        <p:txBody>
+          <a:bodyPr/>
+          <a:lstStyle/>
+          <a:p>
+            <a:fld id="{C4204591-24BD-A542-B9D5-F8D8A88D2FEE}" type="slidenum">
+              <a:rPr lang="en-US" smtClean="0"/>
+              <a:pPr/>
+              <a:t>9</a:t>
+            </a:fld>
+            <a:endParaRPr lang="en-US" dirty="0"/>
           </a:p>
         </p:txBody>
       </p:sp>
